--- a/presentation.pptx
+++ b/presentation.pptx
@@ -1,35 +1,33 @@
 
 <file path=ppt/presentation.xml><?xml version="1.0" encoding="utf-8"?>
-<p:presentation xmlns:a="http://schemas.openxmlformats.org/drawingml/2006/main" xmlns:r="http://schemas.openxmlformats.org/officeDocument/2006/relationships" xmlns:mc="http://schemas.openxmlformats.org/markup-compatibility/2006" xmlns:mv="urn:schemas-microsoft-com:mac:vml" xmlns:p="http://schemas.openxmlformats.org/presentationml/2006/main" xmlns:c="http://schemas.openxmlformats.org/drawingml/2006/chart" xmlns:dgm="http://schemas.openxmlformats.org/drawingml/2006/diagram" xmlns:o="urn:schemas-microsoft-com:office:office" xmlns:v="urn:schemas-microsoft-com:vml" xmlns:pvml="urn:schemas-microsoft-com:office:powerpoint" xmlns:com="http://schemas.openxmlformats.org/drawingml/2006/compatibility" xmlns:p14="http://schemas.microsoft.com/office/powerpoint/2010/main" xmlns:p15="http://schemas.microsoft.com/office/powerpoint/2012/main" xmlns:ahyp="http://schemas.microsoft.com/office/drawing/2018/hyperlinkcolor" autoCompressPictures="0" strictFirstAndLastChars="0" saveSubsetFonts="1">
+<p:presentation xmlns:a="http://schemas.openxmlformats.org/drawingml/2006/main" xmlns:r="http://schemas.openxmlformats.org/officeDocument/2006/relationships" xmlns:p="http://schemas.openxmlformats.org/presentationml/2006/main" strictFirstAndLastChars="0" saveSubsetFonts="1" autoCompressPictures="0">
   <p:sldMasterIdLst>
-    <p:sldMasterId id="2147483659" r:id="rId4"/>
+    <p:sldMasterId id="2147483659" r:id="rId1"/>
   </p:sldMasterIdLst>
   <p:notesMasterIdLst>
-    <p:notesMasterId r:id="rId5"/>
+    <p:notesMasterId r:id="rId17"/>
   </p:notesMasterIdLst>
   <p:sldIdLst>
-    <p:sldId id="256" r:id="rId6"/>
-    <p:sldId id="257" r:id="rId7"/>
-    <p:sldId id="258" r:id="rId8"/>
-    <p:sldId id="259" r:id="rId9"/>
-    <p:sldId id="260" r:id="rId10"/>
-    <p:sldId id="261" r:id="rId11"/>
-    <p:sldId id="262" r:id="rId12"/>
-    <p:sldId id="263" r:id="rId13"/>
-    <p:sldId id="264" r:id="rId14"/>
-    <p:sldId id="265" r:id="rId15"/>
-    <p:sldId id="266" r:id="rId16"/>
-    <p:sldId id="267" r:id="rId17"/>
-    <p:sldId id="268" r:id="rId18"/>
-    <p:sldId id="269" r:id="rId19"/>
-    <p:sldId id="270" r:id="rId20"/>
-    <p:sldId id="271" r:id="rId21"/>
-    <p:sldId id="272" r:id="rId22"/>
+    <p:sldId id="256" r:id="rId2"/>
+    <p:sldId id="257" r:id="rId3"/>
+    <p:sldId id="258" r:id="rId4"/>
+    <p:sldId id="259" r:id="rId5"/>
+    <p:sldId id="260" r:id="rId6"/>
+    <p:sldId id="261" r:id="rId7"/>
+    <p:sldId id="262" r:id="rId8"/>
+    <p:sldId id="263" r:id="rId9"/>
+    <p:sldId id="264" r:id="rId10"/>
+    <p:sldId id="265" r:id="rId11"/>
+    <p:sldId id="266" r:id="rId12"/>
+    <p:sldId id="267" r:id="rId13"/>
+    <p:sldId id="268" r:id="rId14"/>
+    <p:sldId id="269" r:id="rId15"/>
+    <p:sldId id="272" r:id="rId16"/>
   </p:sldIdLst>
-  <p:sldSz cy="5143500" cx="9144000"/>
+  <p:sldSz cx="9144000" cy="5143500" type="screen16x9"/>
   <p:notesSz cx="6858000" cy="9144000"/>
   <p:defaultTextStyle>
-    <a:defPPr lvl="0" marR="0" rtl="0" algn="l">
+    <a:defPPr marR="0" lvl="0" algn="l" rtl="0">
       <a:lnSpc>
         <a:spcPct val="100000"/>
       </a:lnSpc>
@@ -40,7 +38,7 @@
         <a:spcPts val="0"/>
       </a:spcAft>
     </a:defPPr>
-    <a:lvl1pPr lvl="0" marR="0" rtl="0" algn="l">
+    <a:lvl1pPr marR="0" lvl="0" algn="l" rtl="0">
       <a:lnSpc>
         <a:spcPct val="100000"/>
       </a:lnSpc>
@@ -54,7 +52,7 @@
         <a:srgbClr val="000000"/>
       </a:buClr>
       <a:buFont typeface="Arial"/>
-      <a:defRPr b="0" i="0" sz="1400" u="none" cap="none" strike="noStrike">
+      <a:defRPr sz="1400" b="0" i="0" u="none" strike="noStrike" cap="none">
         <a:solidFill>
           <a:srgbClr val="000000"/>
         </a:solidFill>
@@ -64,7 +62,7 @@
         <a:sym typeface="Arial"/>
       </a:defRPr>
     </a:lvl1pPr>
-    <a:lvl2pPr lvl="1" marR="0" rtl="0" algn="l">
+    <a:lvl2pPr marR="0" lvl="1" algn="l" rtl="0">
       <a:lnSpc>
         <a:spcPct val="100000"/>
       </a:lnSpc>
@@ -78,7 +76,7 @@
         <a:srgbClr val="000000"/>
       </a:buClr>
       <a:buFont typeface="Arial"/>
-      <a:defRPr b="0" i="0" sz="1400" u="none" cap="none" strike="noStrike">
+      <a:defRPr sz="1400" b="0" i="0" u="none" strike="noStrike" cap="none">
         <a:solidFill>
           <a:srgbClr val="000000"/>
         </a:solidFill>
@@ -88,7 +86,7 @@
         <a:sym typeface="Arial"/>
       </a:defRPr>
     </a:lvl2pPr>
-    <a:lvl3pPr lvl="2" marR="0" rtl="0" algn="l">
+    <a:lvl3pPr marR="0" lvl="2" algn="l" rtl="0">
       <a:lnSpc>
         <a:spcPct val="100000"/>
       </a:lnSpc>
@@ -102,7 +100,7 @@
         <a:srgbClr val="000000"/>
       </a:buClr>
       <a:buFont typeface="Arial"/>
-      <a:defRPr b="0" i="0" sz="1400" u="none" cap="none" strike="noStrike">
+      <a:defRPr sz="1400" b="0" i="0" u="none" strike="noStrike" cap="none">
         <a:solidFill>
           <a:srgbClr val="000000"/>
         </a:solidFill>
@@ -112,7 +110,7 @@
         <a:sym typeface="Arial"/>
       </a:defRPr>
     </a:lvl3pPr>
-    <a:lvl4pPr lvl="3" marR="0" rtl="0" algn="l">
+    <a:lvl4pPr marR="0" lvl="3" algn="l" rtl="0">
       <a:lnSpc>
         <a:spcPct val="100000"/>
       </a:lnSpc>
@@ -126,7 +124,7 @@
         <a:srgbClr val="000000"/>
       </a:buClr>
       <a:buFont typeface="Arial"/>
-      <a:defRPr b="0" i="0" sz="1400" u="none" cap="none" strike="noStrike">
+      <a:defRPr sz="1400" b="0" i="0" u="none" strike="noStrike" cap="none">
         <a:solidFill>
           <a:srgbClr val="000000"/>
         </a:solidFill>
@@ -136,7 +134,7 @@
         <a:sym typeface="Arial"/>
       </a:defRPr>
     </a:lvl4pPr>
-    <a:lvl5pPr lvl="4" marR="0" rtl="0" algn="l">
+    <a:lvl5pPr marR="0" lvl="4" algn="l" rtl="0">
       <a:lnSpc>
         <a:spcPct val="100000"/>
       </a:lnSpc>
@@ -150,7 +148,7 @@
         <a:srgbClr val="000000"/>
       </a:buClr>
       <a:buFont typeface="Arial"/>
-      <a:defRPr b="0" i="0" sz="1400" u="none" cap="none" strike="noStrike">
+      <a:defRPr sz="1400" b="0" i="0" u="none" strike="noStrike" cap="none">
         <a:solidFill>
           <a:srgbClr val="000000"/>
         </a:solidFill>
@@ -160,7 +158,7 @@
         <a:sym typeface="Arial"/>
       </a:defRPr>
     </a:lvl5pPr>
-    <a:lvl6pPr lvl="5" marR="0" rtl="0" algn="l">
+    <a:lvl6pPr marR="0" lvl="5" algn="l" rtl="0">
       <a:lnSpc>
         <a:spcPct val="100000"/>
       </a:lnSpc>
@@ -174,7 +172,7 @@
         <a:srgbClr val="000000"/>
       </a:buClr>
       <a:buFont typeface="Arial"/>
-      <a:defRPr b="0" i="0" sz="1400" u="none" cap="none" strike="noStrike">
+      <a:defRPr sz="1400" b="0" i="0" u="none" strike="noStrike" cap="none">
         <a:solidFill>
           <a:srgbClr val="000000"/>
         </a:solidFill>
@@ -184,7 +182,7 @@
         <a:sym typeface="Arial"/>
       </a:defRPr>
     </a:lvl6pPr>
-    <a:lvl7pPr lvl="6" marR="0" rtl="0" algn="l">
+    <a:lvl7pPr marR="0" lvl="6" algn="l" rtl="0">
       <a:lnSpc>
         <a:spcPct val="100000"/>
       </a:lnSpc>
@@ -198,7 +196,7 @@
         <a:srgbClr val="000000"/>
       </a:buClr>
       <a:buFont typeface="Arial"/>
-      <a:defRPr b="0" i="0" sz="1400" u="none" cap="none" strike="noStrike">
+      <a:defRPr sz="1400" b="0" i="0" u="none" strike="noStrike" cap="none">
         <a:solidFill>
           <a:srgbClr val="000000"/>
         </a:solidFill>
@@ -208,7 +206,7 @@
         <a:sym typeface="Arial"/>
       </a:defRPr>
     </a:lvl7pPr>
-    <a:lvl8pPr lvl="7" marR="0" rtl="0" algn="l">
+    <a:lvl8pPr marR="0" lvl="7" algn="l" rtl="0">
       <a:lnSpc>
         <a:spcPct val="100000"/>
       </a:lnSpc>
@@ -222,7 +220,7 @@
         <a:srgbClr val="000000"/>
       </a:buClr>
       <a:buFont typeface="Arial"/>
-      <a:defRPr b="0" i="0" sz="1400" u="none" cap="none" strike="noStrike">
+      <a:defRPr sz="1400" b="0" i="0" u="none" strike="noStrike" cap="none">
         <a:solidFill>
           <a:srgbClr val="000000"/>
         </a:solidFill>
@@ -232,7 +230,7 @@
         <a:sym typeface="Arial"/>
       </a:defRPr>
     </a:lvl8pPr>
-    <a:lvl9pPr lvl="8" marR="0" rtl="0" algn="l">
+    <a:lvl9pPr marR="0" lvl="8" algn="l" rtl="0">
       <a:lnSpc>
         <a:spcPct val="100000"/>
       </a:lnSpc>
@@ -246,7 +244,7 @@
         <a:srgbClr val="000000"/>
       </a:buClr>
       <a:buFont typeface="Arial"/>
-      <a:defRPr b="0" i="0" sz="1400" u="none" cap="none" strike="noStrike">
+      <a:defRPr sz="1400" b="0" i="0" u="none" strike="noStrike" cap="none">
         <a:solidFill>
           <a:srgbClr val="000000"/>
         </a:solidFill>
@@ -259,7 +257,7 @@
   </p:defaultTextStyle>
   <p:extLst>
     <p:ext uri="{EFAFB233-063F-42B5-8137-9DF3F51BA10A}">
-      <p15:sldGuideLst>
+      <p15:sldGuideLst xmlns:p15="http://schemas.microsoft.com/office/powerpoint/2012/main">
         <p15:guide id="1" orient="horz" pos="1620">
           <p15:clr>
             <a:srgbClr val="747775"/>
@@ -277,11 +275,16 @@
 </file>
 
 <file path=ppt/notesMasters/notesMaster1.xml><?xml version="1.0" encoding="utf-8"?>
-<p:notesMaster xmlns:a="http://schemas.openxmlformats.org/drawingml/2006/main" xmlns:r="http://schemas.openxmlformats.org/officeDocument/2006/relationships" xmlns:mc="http://schemas.openxmlformats.org/markup-compatibility/2006" xmlns:mv="urn:schemas-microsoft-com:mac:vml" xmlns:p="http://schemas.openxmlformats.org/presentationml/2006/main" xmlns:c="http://schemas.openxmlformats.org/drawingml/2006/chart" xmlns:dgm="http://schemas.openxmlformats.org/drawingml/2006/diagram" xmlns:o="urn:schemas-microsoft-com:office:office" xmlns:v="urn:schemas-microsoft-com:vml" xmlns:pvml="urn:schemas-microsoft-com:office:powerpoint" xmlns:com="http://schemas.openxmlformats.org/drawingml/2006/compatibility" xmlns:p14="http://schemas.microsoft.com/office/powerpoint/2010/main" xmlns:p15="http://schemas.microsoft.com/office/powerpoint/2012/main" xmlns:ahyp="http://schemas.microsoft.com/office/drawing/2018/hyperlinkcolor">
+<p:notesMaster xmlns:a="http://schemas.openxmlformats.org/drawingml/2006/main" xmlns:r="http://schemas.openxmlformats.org/officeDocument/2006/relationships" xmlns:p="http://schemas.openxmlformats.org/presentationml/2006/main">
   <p:cSld>
+    <p:bg>
+      <p:bgRef idx="1001">
+        <a:schemeClr val="bg1"/>
+      </p:bgRef>
+    </p:bg>
     <p:spTree>
       <p:nvGrpSpPr>
-        <p:cNvPr id="2" name="Shape 2"/>
+        <p:cNvPr id="1" name="Shape 2"/>
         <p:cNvGrpSpPr/>
         <p:nvPr/>
       </p:nvGrpSpPr>
@@ -296,9 +299,11 @@
       <p:sp>
         <p:nvSpPr>
           <p:cNvPr id="3" name="Google Shape;3;n"/>
-          <p:cNvSpPr/>
+          <p:cNvSpPr>
+            <a:spLocks noGrp="1" noRot="1" noChangeAspect="1"/>
+          </p:cNvSpPr>
           <p:nvPr>
-            <p:ph idx="2" type="sldImg"/>
+            <p:ph type="sldImg" idx="2"/>
           </p:nvPr>
         </p:nvSpPr>
         <p:spPr>
@@ -307,9 +312,13 @@
             <a:ext cx="6096075" cy="3429000"/>
           </a:xfrm>
           <a:custGeom>
-            <a:rect b="b" l="l" r="r" t="t"/>
+            <a:avLst/>
+            <a:gdLst/>
+            <a:ahLst/>
+            <a:cxnLst/>
+            <a:rect l="l" t="t" r="r" b="b"/>
             <a:pathLst>
-              <a:path extrusionOk="0" h="120000" w="120000">
+              <a:path w="120000" h="120000" extrusionOk="0">
                 <a:moveTo>
                   <a:pt x="0" y="0"/>
                 </a:moveTo>
@@ -327,23 +336,25 @@
             </a:pathLst>
           </a:custGeom>
           <a:noFill/>
-          <a:ln cap="flat" cmpd="sng" w="9525">
+          <a:ln w="9525" cap="flat" cmpd="sng">
             <a:solidFill>
               <a:srgbClr val="000000"/>
             </a:solidFill>
             <a:prstDash val="solid"/>
             <a:round/>
-            <a:headEnd len="sm" w="sm" type="none"/>
-            <a:tailEnd len="sm" w="sm" type="none"/>
+            <a:headEnd type="none" w="sm" len="sm"/>
+            <a:tailEnd type="none" w="sm" len="sm"/>
           </a:ln>
         </p:spPr>
       </p:sp>
       <p:sp>
         <p:nvSpPr>
           <p:cNvPr id="4" name="Google Shape;4;n"/>
-          <p:cNvSpPr txBox="1"/>
+          <p:cNvSpPr txBox="1">
+            <a:spLocks noGrp="1"/>
+          </p:cNvSpPr>
           <p:nvPr>
-            <p:ph idx="1" type="body"/>
+            <p:ph type="body" idx="1"/>
           </p:nvPr>
         </p:nvSpPr>
         <p:spPr>
@@ -360,11 +371,11 @@
           </a:ln>
         </p:spPr>
         <p:txBody>
-          <a:bodyPr anchorCtr="0" anchor="t" bIns="91425" lIns="91425" spcFirstLastPara="1" rIns="91425" wrap="square" tIns="91425">
+          <a:bodyPr spcFirstLastPara="1" wrap="square" lIns="91425" tIns="91425" rIns="91425" bIns="91425" anchor="t" anchorCtr="0">
             <a:noAutofit/>
           </a:bodyPr>
           <a:lstStyle>
-            <a:lvl1pPr indent="-298450" lvl="0" marL="457200">
+            <a:lvl1pPr marL="457200" lvl="0" indent="-298450">
               <a:spcBef>
                 <a:spcPts val="0"/>
               </a:spcBef>
@@ -375,7 +386,7 @@
               <a:buChar char="●"/>
               <a:defRPr sz="1100"/>
             </a:lvl1pPr>
-            <a:lvl2pPr indent="-298450" lvl="1" marL="914400">
+            <a:lvl2pPr marL="914400" lvl="1" indent="-298450">
               <a:spcBef>
                 <a:spcPts val="0"/>
               </a:spcBef>
@@ -386,7 +397,7 @@
               <a:buChar char="○"/>
               <a:defRPr sz="1100"/>
             </a:lvl2pPr>
-            <a:lvl3pPr indent="-298450" lvl="2" marL="1371600">
+            <a:lvl3pPr marL="1371600" lvl="2" indent="-298450">
               <a:spcBef>
                 <a:spcPts val="0"/>
               </a:spcBef>
@@ -397,7 +408,7 @@
               <a:buChar char="■"/>
               <a:defRPr sz="1100"/>
             </a:lvl3pPr>
-            <a:lvl4pPr indent="-298450" lvl="3" marL="1828800">
+            <a:lvl4pPr marL="1828800" lvl="3" indent="-298450">
               <a:spcBef>
                 <a:spcPts val="0"/>
               </a:spcBef>
@@ -408,7 +419,7 @@
               <a:buChar char="●"/>
               <a:defRPr sz="1100"/>
             </a:lvl4pPr>
-            <a:lvl5pPr indent="-298450" lvl="4" marL="2286000">
+            <a:lvl5pPr marL="2286000" lvl="4" indent="-298450">
               <a:spcBef>
                 <a:spcPts val="0"/>
               </a:spcBef>
@@ -419,7 +430,7 @@
               <a:buChar char="○"/>
               <a:defRPr sz="1100"/>
             </a:lvl5pPr>
-            <a:lvl6pPr indent="-298450" lvl="5" marL="2743200">
+            <a:lvl6pPr marL="2743200" lvl="5" indent="-298450">
               <a:spcBef>
                 <a:spcPts val="0"/>
               </a:spcBef>
@@ -430,7 +441,7 @@
               <a:buChar char="■"/>
               <a:defRPr sz="1100"/>
             </a:lvl6pPr>
-            <a:lvl7pPr indent="-298450" lvl="6" marL="3200400">
+            <a:lvl7pPr marL="3200400" lvl="6" indent="-298450">
               <a:spcBef>
                 <a:spcPts val="0"/>
               </a:spcBef>
@@ -441,7 +452,7 @@
               <a:buChar char="●"/>
               <a:defRPr sz="1100"/>
             </a:lvl7pPr>
-            <a:lvl8pPr indent="-298450" lvl="7" marL="3657600">
+            <a:lvl8pPr marL="3657600" lvl="7" indent="-298450">
               <a:spcBef>
                 <a:spcPts val="0"/>
               </a:spcBef>
@@ -452,7 +463,7 @@
               <a:buChar char="○"/>
               <a:defRPr sz="1100"/>
             </a:lvl8pPr>
-            <a:lvl9pPr indent="-298450" lvl="8" marL="4114800">
+            <a:lvl9pPr marL="4114800" lvl="8" indent="-298450">
               <a:spcBef>
                 <a:spcPts val="0"/>
               </a:spcBef>
@@ -464,14 +475,16 @@
               <a:defRPr sz="1100"/>
             </a:lvl9pPr>
           </a:lstStyle>
-          <a:p/>
+          <a:p>
+            <a:endParaRPr/>
+          </a:p>
         </p:txBody>
       </p:sp>
     </p:spTree>
   </p:cSld>
-  <p:clrMap accent1="accent1" accent2="accent2" accent3="accent3" accent4="accent4" accent5="accent5" accent6="accent6" bg1="lt1" bg2="dk2" tx1="dk1" tx2="lt2" folHlink="folHlink" hlink="hlink"/>
+  <p:clrMap bg1="lt1" tx1="dk1" bg2="dk2" tx2="lt2" accent1="accent1" accent2="accent2" accent3="accent3" accent4="accent4" accent5="accent5" accent6="accent6" hlink="hlink" folHlink="folHlink"/>
   <p:notesStyle>
-    <a:defPPr lvl="0" marR="0" rtl="0" algn="l">
+    <a:defPPr marR="0" lvl="0" algn="l" rtl="0">
       <a:lnSpc>
         <a:spcPct val="100000"/>
       </a:lnSpc>
@@ -482,7 +495,7 @@
         <a:spcPts val="0"/>
       </a:spcAft>
     </a:defPPr>
-    <a:lvl1pPr lvl="0" marR="0" rtl="0" algn="l">
+    <a:lvl1pPr marR="0" lvl="0" algn="l" rtl="0">
       <a:lnSpc>
         <a:spcPct val="100000"/>
       </a:lnSpc>
@@ -496,7 +509,7 @@
         <a:srgbClr val="000000"/>
       </a:buClr>
       <a:buFont typeface="Arial"/>
-      <a:defRPr b="0" i="0" sz="1400" u="none" cap="none" strike="noStrike">
+      <a:defRPr sz="1400" b="0" i="0" u="none" strike="noStrike" cap="none">
         <a:solidFill>
           <a:srgbClr val="000000"/>
         </a:solidFill>
@@ -506,7 +519,7 @@
         <a:sym typeface="Arial"/>
       </a:defRPr>
     </a:lvl1pPr>
-    <a:lvl2pPr lvl="1" marR="0" rtl="0" algn="l">
+    <a:lvl2pPr marR="0" lvl="1" algn="l" rtl="0">
       <a:lnSpc>
         <a:spcPct val="100000"/>
       </a:lnSpc>
@@ -520,7 +533,7 @@
         <a:srgbClr val="000000"/>
       </a:buClr>
       <a:buFont typeface="Arial"/>
-      <a:defRPr b="0" i="0" sz="1400" u="none" cap="none" strike="noStrike">
+      <a:defRPr sz="1400" b="0" i="0" u="none" strike="noStrike" cap="none">
         <a:solidFill>
           <a:srgbClr val="000000"/>
         </a:solidFill>
@@ -530,7 +543,7 @@
         <a:sym typeface="Arial"/>
       </a:defRPr>
     </a:lvl2pPr>
-    <a:lvl3pPr lvl="2" marR="0" rtl="0" algn="l">
+    <a:lvl3pPr marR="0" lvl="2" algn="l" rtl="0">
       <a:lnSpc>
         <a:spcPct val="100000"/>
       </a:lnSpc>
@@ -544,7 +557,7 @@
         <a:srgbClr val="000000"/>
       </a:buClr>
       <a:buFont typeface="Arial"/>
-      <a:defRPr b="0" i="0" sz="1400" u="none" cap="none" strike="noStrike">
+      <a:defRPr sz="1400" b="0" i="0" u="none" strike="noStrike" cap="none">
         <a:solidFill>
           <a:srgbClr val="000000"/>
         </a:solidFill>
@@ -554,7 +567,7 @@
         <a:sym typeface="Arial"/>
       </a:defRPr>
     </a:lvl3pPr>
-    <a:lvl4pPr lvl="3" marR="0" rtl="0" algn="l">
+    <a:lvl4pPr marR="0" lvl="3" algn="l" rtl="0">
       <a:lnSpc>
         <a:spcPct val="100000"/>
       </a:lnSpc>
@@ -568,7 +581,7 @@
         <a:srgbClr val="000000"/>
       </a:buClr>
       <a:buFont typeface="Arial"/>
-      <a:defRPr b="0" i="0" sz="1400" u="none" cap="none" strike="noStrike">
+      <a:defRPr sz="1400" b="0" i="0" u="none" strike="noStrike" cap="none">
         <a:solidFill>
           <a:srgbClr val="000000"/>
         </a:solidFill>
@@ -578,7 +591,7 @@
         <a:sym typeface="Arial"/>
       </a:defRPr>
     </a:lvl4pPr>
-    <a:lvl5pPr lvl="4" marR="0" rtl="0" algn="l">
+    <a:lvl5pPr marR="0" lvl="4" algn="l" rtl="0">
       <a:lnSpc>
         <a:spcPct val="100000"/>
       </a:lnSpc>
@@ -592,7 +605,7 @@
         <a:srgbClr val="000000"/>
       </a:buClr>
       <a:buFont typeface="Arial"/>
-      <a:defRPr b="0" i="0" sz="1400" u="none" cap="none" strike="noStrike">
+      <a:defRPr sz="1400" b="0" i="0" u="none" strike="noStrike" cap="none">
         <a:solidFill>
           <a:srgbClr val="000000"/>
         </a:solidFill>
@@ -602,7 +615,7 @@
         <a:sym typeface="Arial"/>
       </a:defRPr>
     </a:lvl5pPr>
-    <a:lvl6pPr lvl="5" marR="0" rtl="0" algn="l">
+    <a:lvl6pPr marR="0" lvl="5" algn="l" rtl="0">
       <a:lnSpc>
         <a:spcPct val="100000"/>
       </a:lnSpc>
@@ -616,7 +629,7 @@
         <a:srgbClr val="000000"/>
       </a:buClr>
       <a:buFont typeface="Arial"/>
-      <a:defRPr b="0" i="0" sz="1400" u="none" cap="none" strike="noStrike">
+      <a:defRPr sz="1400" b="0" i="0" u="none" strike="noStrike" cap="none">
         <a:solidFill>
           <a:srgbClr val="000000"/>
         </a:solidFill>
@@ -626,7 +639,7 @@
         <a:sym typeface="Arial"/>
       </a:defRPr>
     </a:lvl6pPr>
-    <a:lvl7pPr lvl="6" marR="0" rtl="0" algn="l">
+    <a:lvl7pPr marR="0" lvl="6" algn="l" rtl="0">
       <a:lnSpc>
         <a:spcPct val="100000"/>
       </a:lnSpc>
@@ -640,7 +653,7 @@
         <a:srgbClr val="000000"/>
       </a:buClr>
       <a:buFont typeface="Arial"/>
-      <a:defRPr b="0" i="0" sz="1400" u="none" cap="none" strike="noStrike">
+      <a:defRPr sz="1400" b="0" i="0" u="none" strike="noStrike" cap="none">
         <a:solidFill>
           <a:srgbClr val="000000"/>
         </a:solidFill>
@@ -650,7 +663,7 @@
         <a:sym typeface="Arial"/>
       </a:defRPr>
     </a:lvl7pPr>
-    <a:lvl8pPr lvl="7" marR="0" rtl="0" algn="l">
+    <a:lvl8pPr marR="0" lvl="7" algn="l" rtl="0">
       <a:lnSpc>
         <a:spcPct val="100000"/>
       </a:lnSpc>
@@ -664,7 +677,7 @@
         <a:srgbClr val="000000"/>
       </a:buClr>
       <a:buFont typeface="Arial"/>
-      <a:defRPr b="0" i="0" sz="1400" u="none" cap="none" strike="noStrike">
+      <a:defRPr sz="1400" b="0" i="0" u="none" strike="noStrike" cap="none">
         <a:solidFill>
           <a:srgbClr val="000000"/>
         </a:solidFill>
@@ -674,7 +687,7 @@
         <a:sym typeface="Arial"/>
       </a:defRPr>
     </a:lvl8pPr>
-    <a:lvl9pPr lvl="8" marR="0" rtl="0" algn="l">
+    <a:lvl9pPr marR="0" lvl="8" algn="l" rtl="0">
       <a:lnSpc>
         <a:spcPct val="100000"/>
       </a:lnSpc>
@@ -688,7 +701,7 @@
         <a:srgbClr val="000000"/>
       </a:buClr>
       <a:buFont typeface="Arial"/>
-      <a:defRPr b="0" i="0" sz="1400" u="none" cap="none" strike="noStrike">
+      <a:defRPr sz="1400" b="0" i="0" u="none" strike="noStrike" cap="none">
         <a:solidFill>
           <a:srgbClr val="000000"/>
         </a:solidFill>
@@ -703,11 +716,11 @@
 </file>
 
 <file path=ppt/slideLayouts/slideLayout1.xml><?xml version="1.0" encoding="utf-8"?>
-<p:sldLayout xmlns:a="http://schemas.openxmlformats.org/drawingml/2006/main" xmlns:r="http://schemas.openxmlformats.org/officeDocument/2006/relationships" xmlns:mc="http://schemas.openxmlformats.org/markup-compatibility/2006" xmlns:mv="urn:schemas-microsoft-com:mac:vml" xmlns:p="http://schemas.openxmlformats.org/presentationml/2006/main" xmlns:c="http://schemas.openxmlformats.org/drawingml/2006/chart" xmlns:dgm="http://schemas.openxmlformats.org/drawingml/2006/diagram" xmlns:o="urn:schemas-microsoft-com:office:office" xmlns:v="urn:schemas-microsoft-com:vml" xmlns:pvml="urn:schemas-microsoft-com:office:powerpoint" xmlns:com="http://schemas.openxmlformats.org/drawingml/2006/compatibility" xmlns:p14="http://schemas.microsoft.com/office/powerpoint/2010/main" xmlns:p15="http://schemas.microsoft.com/office/powerpoint/2012/main" xmlns:ahyp="http://schemas.microsoft.com/office/drawing/2018/hyperlinkcolor" matchingName="Title slide" type="title">
+<p:sldLayout xmlns:a="http://schemas.openxmlformats.org/drawingml/2006/main" xmlns:r="http://schemas.openxmlformats.org/officeDocument/2006/relationships" xmlns:p="http://schemas.openxmlformats.org/presentationml/2006/main" matchingName="Title slide" type="title">
   <p:cSld name="TITLE">
     <p:spTree>
       <p:nvGrpSpPr>
-        <p:cNvPr id="9" name="Shape 9"/>
+        <p:cNvPr id="1" name="Shape 9"/>
         <p:cNvGrpSpPr/>
         <p:nvPr/>
       </p:nvGrpSpPr>
@@ -722,7 +735,9 @@
       <p:sp>
         <p:nvSpPr>
           <p:cNvPr id="10" name="Google Shape;10;p2"/>
-          <p:cNvSpPr txBox="1"/>
+          <p:cNvSpPr txBox="1">
+            <a:spLocks noGrp="1"/>
+          </p:cNvSpPr>
           <p:nvPr>
             <p:ph type="ctrTitle"/>
           </p:nvPr>
@@ -737,7 +752,7 @@
           </a:prstGeom>
         </p:spPr>
         <p:txBody>
-          <a:bodyPr anchorCtr="0" anchor="b" bIns="91425" lIns="91425" spcFirstLastPara="1" rIns="91425" wrap="square" tIns="91425">
+          <a:bodyPr spcFirstLastPara="1" wrap="square" lIns="91425" tIns="91425" rIns="91425" bIns="91425" anchor="b" anchorCtr="0">
             <a:normAutofit/>
           </a:bodyPr>
           <a:lstStyle>
@@ -841,15 +856,19 @@
               <a:defRPr sz="5200"/>
             </a:lvl9pPr>
           </a:lstStyle>
-          <a:p/>
+          <a:p>
+            <a:endParaRPr/>
+          </a:p>
         </p:txBody>
       </p:sp>
       <p:sp>
         <p:nvSpPr>
           <p:cNvPr id="11" name="Google Shape;11;p2"/>
-          <p:cNvSpPr txBox="1"/>
+          <p:cNvSpPr txBox="1">
+            <a:spLocks noGrp="1"/>
+          </p:cNvSpPr>
           <p:nvPr>
-            <p:ph idx="1" type="subTitle"/>
+            <p:ph type="subTitle" idx="1"/>
           </p:nvPr>
         </p:nvSpPr>
         <p:spPr>
@@ -862,7 +881,7 @@
           </a:prstGeom>
         </p:spPr>
         <p:txBody>
-          <a:bodyPr anchorCtr="0" anchor="t" bIns="91425" lIns="91425" spcFirstLastPara="1" rIns="91425" wrap="square" tIns="91425">
+          <a:bodyPr spcFirstLastPara="1" wrap="square" lIns="91425" tIns="91425" rIns="91425" bIns="91425" anchor="t" anchorCtr="0">
             <a:normAutofit/>
           </a:bodyPr>
           <a:lstStyle>
@@ -993,15 +1012,19 @@
               <a:defRPr sz="2800"/>
             </a:lvl9pPr>
           </a:lstStyle>
-          <a:p/>
+          <a:p>
+            <a:endParaRPr/>
+          </a:p>
         </p:txBody>
       </p:sp>
       <p:sp>
         <p:nvSpPr>
           <p:cNvPr id="12" name="Google Shape;12;p2"/>
-          <p:cNvSpPr txBox="1"/>
+          <p:cNvSpPr txBox="1">
+            <a:spLocks noGrp="1"/>
+          </p:cNvSpPr>
           <p:nvPr>
-            <p:ph idx="12" type="sldNum"/>
+            <p:ph type="sldNum" idx="12"/>
           </p:nvPr>
         </p:nvSpPr>
         <p:spPr>
@@ -1014,7 +1037,7 @@
           </a:prstGeom>
         </p:spPr>
         <p:txBody>
-          <a:bodyPr anchorCtr="0" anchor="ctr" bIns="91425" lIns="91425" spcFirstLastPara="1" rIns="91425" wrap="square" tIns="91425">
+          <a:bodyPr spcFirstLastPara="1" wrap="square" lIns="91425" tIns="91425" rIns="91425" bIns="91425" anchor="ctr" anchorCtr="0">
             <a:normAutofit/>
           </a:bodyPr>
           <a:lstStyle>
@@ -1056,7 +1079,7 @@
             </a:lvl9pPr>
           </a:lstStyle>
           <a:p>
-            <a:pPr indent="0" lvl="0" marL="0" rtl="0" algn="r">
+            <a:pPr marL="0" lvl="0" indent="0" algn="r" rtl="0">
               <a:spcBef>
                 <a:spcPts val="0"/>
               </a:spcBef>
@@ -1082,11 +1105,11 @@
 </file>
 
 <file path=ppt/slideLayouts/slideLayout10.xml><?xml version="1.0" encoding="utf-8"?>
-<p:sldLayout xmlns:a="http://schemas.openxmlformats.org/drawingml/2006/main" xmlns:r="http://schemas.openxmlformats.org/officeDocument/2006/relationships" xmlns:mc="http://schemas.openxmlformats.org/markup-compatibility/2006" xmlns:mv="urn:schemas-microsoft-com:mac:vml" xmlns:p="http://schemas.openxmlformats.org/presentationml/2006/main" xmlns:c="http://schemas.openxmlformats.org/drawingml/2006/chart" xmlns:dgm="http://schemas.openxmlformats.org/drawingml/2006/diagram" xmlns:o="urn:schemas-microsoft-com:office:office" xmlns:v="urn:schemas-microsoft-com:vml" xmlns:pvml="urn:schemas-microsoft-com:office:powerpoint" xmlns:com="http://schemas.openxmlformats.org/drawingml/2006/compatibility" xmlns:p14="http://schemas.microsoft.com/office/powerpoint/2010/main" xmlns:p15="http://schemas.microsoft.com/office/powerpoint/2012/main" xmlns:ahyp="http://schemas.microsoft.com/office/drawing/2018/hyperlinkcolor" matchingName="Big number">
+<p:sldLayout xmlns:a="http://schemas.openxmlformats.org/drawingml/2006/main" xmlns:r="http://schemas.openxmlformats.org/officeDocument/2006/relationships" xmlns:p="http://schemas.openxmlformats.org/presentationml/2006/main" matchingName="Big number">
   <p:cSld name="BIG_NUMBER">
     <p:spTree>
       <p:nvGrpSpPr>
-        <p:cNvPr id="44" name="Shape 44"/>
+        <p:cNvPr id="1" name="Shape 44"/>
         <p:cNvGrpSpPr/>
         <p:nvPr/>
       </p:nvGrpSpPr>
@@ -1101,9 +1124,11 @@
       <p:sp>
         <p:nvSpPr>
           <p:cNvPr id="45" name="Google Shape;45;p11"/>
-          <p:cNvSpPr txBox="1"/>
+          <p:cNvSpPr txBox="1">
+            <a:spLocks noGrp="1"/>
+          </p:cNvSpPr>
           <p:nvPr>
-            <p:ph hasCustomPrompt="1" type="title"/>
+            <p:ph type="title" hasCustomPrompt="1"/>
           </p:nvPr>
         </p:nvSpPr>
         <p:spPr>
@@ -1116,7 +1141,7 @@
           </a:prstGeom>
         </p:spPr>
         <p:txBody>
-          <a:bodyPr anchorCtr="0" anchor="b" bIns="91425" lIns="91425" spcFirstLastPara="1" rIns="91425" wrap="square" tIns="91425">
+          <a:bodyPr spcFirstLastPara="1" wrap="square" lIns="91425" tIns="91425" rIns="91425" bIns="91425" anchor="b" anchorCtr="0">
             <a:normAutofit/>
           </a:bodyPr>
           <a:lstStyle>
@@ -1230,9 +1255,11 @@
       <p:sp>
         <p:nvSpPr>
           <p:cNvPr id="46" name="Google Shape;46;p11"/>
-          <p:cNvSpPr txBox="1"/>
+          <p:cNvSpPr txBox="1">
+            <a:spLocks noGrp="1"/>
+          </p:cNvSpPr>
           <p:nvPr>
-            <p:ph idx="1" type="body"/>
+            <p:ph type="body" idx="1"/>
           </p:nvPr>
         </p:nvSpPr>
         <p:spPr>
@@ -1245,11 +1272,11 @@
           </a:prstGeom>
         </p:spPr>
         <p:txBody>
-          <a:bodyPr anchorCtr="0" anchor="t" bIns="91425" lIns="91425" spcFirstLastPara="1" rIns="91425" wrap="square" tIns="91425">
+          <a:bodyPr spcFirstLastPara="1" wrap="square" lIns="91425" tIns="91425" rIns="91425" bIns="91425" anchor="t" anchorCtr="0">
             <a:normAutofit/>
           </a:bodyPr>
           <a:lstStyle>
-            <a:lvl1pPr indent="-342900" lvl="0" marL="457200" algn="ctr">
+            <a:lvl1pPr marL="457200" lvl="0" indent="-342900" algn="ctr">
               <a:spcBef>
                 <a:spcPts val="0"/>
               </a:spcBef>
@@ -1260,7 +1287,7 @@
               <a:buChar char="●"/>
               <a:defRPr/>
             </a:lvl1pPr>
-            <a:lvl2pPr indent="-317500" lvl="1" marL="914400" algn="ctr">
+            <a:lvl2pPr marL="914400" lvl="1" indent="-317500" algn="ctr">
               <a:spcBef>
                 <a:spcPts val="0"/>
               </a:spcBef>
@@ -1271,7 +1298,7 @@
               <a:buChar char="○"/>
               <a:defRPr/>
             </a:lvl2pPr>
-            <a:lvl3pPr indent="-317500" lvl="2" marL="1371600" algn="ctr">
+            <a:lvl3pPr marL="1371600" lvl="2" indent="-317500" algn="ctr">
               <a:spcBef>
                 <a:spcPts val="0"/>
               </a:spcBef>
@@ -1282,7 +1309,7 @@
               <a:buChar char="■"/>
               <a:defRPr/>
             </a:lvl3pPr>
-            <a:lvl4pPr indent="-317500" lvl="3" marL="1828800" algn="ctr">
+            <a:lvl4pPr marL="1828800" lvl="3" indent="-317500" algn="ctr">
               <a:spcBef>
                 <a:spcPts val="0"/>
               </a:spcBef>
@@ -1293,7 +1320,7 @@
               <a:buChar char="●"/>
               <a:defRPr/>
             </a:lvl4pPr>
-            <a:lvl5pPr indent="-317500" lvl="4" marL="2286000" algn="ctr">
+            <a:lvl5pPr marL="2286000" lvl="4" indent="-317500" algn="ctr">
               <a:spcBef>
                 <a:spcPts val="0"/>
               </a:spcBef>
@@ -1304,7 +1331,7 @@
               <a:buChar char="○"/>
               <a:defRPr/>
             </a:lvl5pPr>
-            <a:lvl6pPr indent="-317500" lvl="5" marL="2743200" algn="ctr">
+            <a:lvl6pPr marL="2743200" lvl="5" indent="-317500" algn="ctr">
               <a:spcBef>
                 <a:spcPts val="0"/>
               </a:spcBef>
@@ -1315,7 +1342,7 @@
               <a:buChar char="■"/>
               <a:defRPr/>
             </a:lvl6pPr>
-            <a:lvl7pPr indent="-317500" lvl="6" marL="3200400" algn="ctr">
+            <a:lvl7pPr marL="3200400" lvl="6" indent="-317500" algn="ctr">
               <a:spcBef>
                 <a:spcPts val="0"/>
               </a:spcBef>
@@ -1326,7 +1353,7 @@
               <a:buChar char="●"/>
               <a:defRPr/>
             </a:lvl7pPr>
-            <a:lvl8pPr indent="-317500" lvl="7" marL="3657600" algn="ctr">
+            <a:lvl8pPr marL="3657600" lvl="7" indent="-317500" algn="ctr">
               <a:spcBef>
                 <a:spcPts val="0"/>
               </a:spcBef>
@@ -1337,7 +1364,7 @@
               <a:buChar char="○"/>
               <a:defRPr/>
             </a:lvl8pPr>
-            <a:lvl9pPr indent="-317500" lvl="8" marL="4114800" algn="ctr">
+            <a:lvl9pPr marL="4114800" lvl="8" indent="-317500" algn="ctr">
               <a:spcBef>
                 <a:spcPts val="0"/>
               </a:spcBef>
@@ -1349,15 +1376,19 @@
               <a:defRPr/>
             </a:lvl9pPr>
           </a:lstStyle>
-          <a:p/>
+          <a:p>
+            <a:endParaRPr/>
+          </a:p>
         </p:txBody>
       </p:sp>
       <p:sp>
         <p:nvSpPr>
           <p:cNvPr id="47" name="Google Shape;47;p11"/>
-          <p:cNvSpPr txBox="1"/>
+          <p:cNvSpPr txBox="1">
+            <a:spLocks noGrp="1"/>
+          </p:cNvSpPr>
           <p:nvPr>
-            <p:ph idx="12" type="sldNum"/>
+            <p:ph type="sldNum" idx="12"/>
           </p:nvPr>
         </p:nvSpPr>
         <p:spPr>
@@ -1370,7 +1401,7 @@
           </a:prstGeom>
         </p:spPr>
         <p:txBody>
-          <a:bodyPr anchorCtr="0" anchor="ctr" bIns="91425" lIns="91425" spcFirstLastPara="1" rIns="91425" wrap="square" tIns="91425">
+          <a:bodyPr spcFirstLastPara="1" wrap="square" lIns="91425" tIns="91425" rIns="91425" bIns="91425" anchor="ctr" anchorCtr="0">
             <a:normAutofit/>
           </a:bodyPr>
           <a:lstStyle>
@@ -1412,7 +1443,7 @@
             </a:lvl9pPr>
           </a:lstStyle>
           <a:p>
-            <a:pPr indent="0" lvl="0" marL="0" rtl="0" algn="r">
+            <a:pPr marL="0" lvl="0" indent="0" algn="r" rtl="0">
               <a:spcBef>
                 <a:spcPts val="0"/>
               </a:spcBef>
@@ -1438,11 +1469,11 @@
 </file>
 
 <file path=ppt/slideLayouts/slideLayout11.xml><?xml version="1.0" encoding="utf-8"?>
-<p:sldLayout xmlns:a="http://schemas.openxmlformats.org/drawingml/2006/main" xmlns:r="http://schemas.openxmlformats.org/officeDocument/2006/relationships" xmlns:mc="http://schemas.openxmlformats.org/markup-compatibility/2006" xmlns:mv="urn:schemas-microsoft-com:mac:vml" xmlns:p="http://schemas.openxmlformats.org/presentationml/2006/main" xmlns:c="http://schemas.openxmlformats.org/drawingml/2006/chart" xmlns:dgm="http://schemas.openxmlformats.org/drawingml/2006/diagram" xmlns:o="urn:schemas-microsoft-com:office:office" xmlns:v="urn:schemas-microsoft-com:vml" xmlns:pvml="urn:schemas-microsoft-com:office:powerpoint" xmlns:com="http://schemas.openxmlformats.org/drawingml/2006/compatibility" xmlns:p14="http://schemas.microsoft.com/office/powerpoint/2010/main" xmlns:p15="http://schemas.microsoft.com/office/powerpoint/2012/main" xmlns:ahyp="http://schemas.microsoft.com/office/drawing/2018/hyperlinkcolor" matchingName="Blank" type="blank">
+<p:sldLayout xmlns:a="http://schemas.openxmlformats.org/drawingml/2006/main" xmlns:r="http://schemas.openxmlformats.org/officeDocument/2006/relationships" xmlns:p="http://schemas.openxmlformats.org/presentationml/2006/main" matchingName="Blank" type="blank">
   <p:cSld name="BLANK">
     <p:spTree>
       <p:nvGrpSpPr>
-        <p:cNvPr id="48" name="Shape 48"/>
+        <p:cNvPr id="1" name="Shape 48"/>
         <p:cNvGrpSpPr/>
         <p:nvPr/>
       </p:nvGrpSpPr>
@@ -1457,9 +1488,11 @@
       <p:sp>
         <p:nvSpPr>
           <p:cNvPr id="49" name="Google Shape;49;p12"/>
-          <p:cNvSpPr txBox="1"/>
+          <p:cNvSpPr txBox="1">
+            <a:spLocks noGrp="1"/>
+          </p:cNvSpPr>
           <p:nvPr>
-            <p:ph idx="12" type="sldNum"/>
+            <p:ph type="sldNum" idx="12"/>
           </p:nvPr>
         </p:nvSpPr>
         <p:spPr>
@@ -1472,7 +1505,7 @@
           </a:prstGeom>
         </p:spPr>
         <p:txBody>
-          <a:bodyPr anchorCtr="0" anchor="ctr" bIns="91425" lIns="91425" spcFirstLastPara="1" rIns="91425" wrap="square" tIns="91425">
+          <a:bodyPr spcFirstLastPara="1" wrap="square" lIns="91425" tIns="91425" rIns="91425" bIns="91425" anchor="ctr" anchorCtr="0">
             <a:normAutofit/>
           </a:bodyPr>
           <a:lstStyle>
@@ -1514,7 +1547,7 @@
             </a:lvl9pPr>
           </a:lstStyle>
           <a:p>
-            <a:pPr indent="0" lvl="0" marL="0" rtl="0" algn="r">
+            <a:pPr marL="0" lvl="0" indent="0" algn="r" rtl="0">
               <a:spcBef>
                 <a:spcPts val="0"/>
               </a:spcBef>
@@ -1540,11 +1573,11 @@
 </file>
 
 <file path=ppt/slideLayouts/slideLayout2.xml><?xml version="1.0" encoding="utf-8"?>
-<p:sldLayout xmlns:a="http://schemas.openxmlformats.org/drawingml/2006/main" xmlns:r="http://schemas.openxmlformats.org/officeDocument/2006/relationships" xmlns:mc="http://schemas.openxmlformats.org/markup-compatibility/2006" xmlns:mv="urn:schemas-microsoft-com:mac:vml" xmlns:p="http://schemas.openxmlformats.org/presentationml/2006/main" xmlns:c="http://schemas.openxmlformats.org/drawingml/2006/chart" xmlns:dgm="http://schemas.openxmlformats.org/drawingml/2006/diagram" xmlns:o="urn:schemas-microsoft-com:office:office" xmlns:v="urn:schemas-microsoft-com:vml" xmlns:pvml="urn:schemas-microsoft-com:office:powerpoint" xmlns:com="http://schemas.openxmlformats.org/drawingml/2006/compatibility" xmlns:p14="http://schemas.microsoft.com/office/powerpoint/2010/main" xmlns:p15="http://schemas.microsoft.com/office/powerpoint/2012/main" xmlns:ahyp="http://schemas.microsoft.com/office/drawing/2018/hyperlinkcolor" matchingName="Section header" type="secHead">
+<p:sldLayout xmlns:a="http://schemas.openxmlformats.org/drawingml/2006/main" xmlns:r="http://schemas.openxmlformats.org/officeDocument/2006/relationships" xmlns:p="http://schemas.openxmlformats.org/presentationml/2006/main" matchingName="Section header" type="secHead">
   <p:cSld name="SECTION_HEADER">
     <p:spTree>
       <p:nvGrpSpPr>
-        <p:cNvPr id="13" name="Shape 13"/>
+        <p:cNvPr id="1" name="Shape 13"/>
         <p:cNvGrpSpPr/>
         <p:nvPr/>
       </p:nvGrpSpPr>
@@ -1559,7 +1592,9 @@
       <p:sp>
         <p:nvSpPr>
           <p:cNvPr id="14" name="Google Shape;14;p3"/>
-          <p:cNvSpPr txBox="1"/>
+          <p:cNvSpPr txBox="1">
+            <a:spLocks noGrp="1"/>
+          </p:cNvSpPr>
           <p:nvPr>
             <p:ph type="title"/>
           </p:nvPr>
@@ -1574,7 +1609,7 @@
           </a:prstGeom>
         </p:spPr>
         <p:txBody>
-          <a:bodyPr anchorCtr="0" anchor="ctr" bIns="91425" lIns="91425" spcFirstLastPara="1" rIns="91425" wrap="square" tIns="91425">
+          <a:bodyPr spcFirstLastPara="1" wrap="square" lIns="91425" tIns="91425" rIns="91425" bIns="91425" anchor="ctr" anchorCtr="0">
             <a:normAutofit/>
           </a:bodyPr>
           <a:lstStyle>
@@ -1678,15 +1713,19 @@
               <a:defRPr sz="3600"/>
             </a:lvl9pPr>
           </a:lstStyle>
-          <a:p/>
+          <a:p>
+            <a:endParaRPr/>
+          </a:p>
         </p:txBody>
       </p:sp>
       <p:sp>
         <p:nvSpPr>
           <p:cNvPr id="15" name="Google Shape;15;p3"/>
-          <p:cNvSpPr txBox="1"/>
+          <p:cNvSpPr txBox="1">
+            <a:spLocks noGrp="1"/>
+          </p:cNvSpPr>
           <p:nvPr>
-            <p:ph idx="12" type="sldNum"/>
+            <p:ph type="sldNum" idx="12"/>
           </p:nvPr>
         </p:nvSpPr>
         <p:spPr>
@@ -1699,7 +1738,7 @@
           </a:prstGeom>
         </p:spPr>
         <p:txBody>
-          <a:bodyPr anchorCtr="0" anchor="ctr" bIns="91425" lIns="91425" spcFirstLastPara="1" rIns="91425" wrap="square" tIns="91425">
+          <a:bodyPr spcFirstLastPara="1" wrap="square" lIns="91425" tIns="91425" rIns="91425" bIns="91425" anchor="ctr" anchorCtr="0">
             <a:normAutofit/>
           </a:bodyPr>
           <a:lstStyle>
@@ -1741,7 +1780,7 @@
             </a:lvl9pPr>
           </a:lstStyle>
           <a:p>
-            <a:pPr indent="0" lvl="0" marL="0" rtl="0" algn="r">
+            <a:pPr marL="0" lvl="0" indent="0" algn="r" rtl="0">
               <a:spcBef>
                 <a:spcPts val="0"/>
               </a:spcBef>
@@ -1767,11 +1806,11 @@
 </file>
 
 <file path=ppt/slideLayouts/slideLayout3.xml><?xml version="1.0" encoding="utf-8"?>
-<p:sldLayout xmlns:a="http://schemas.openxmlformats.org/drawingml/2006/main" xmlns:r="http://schemas.openxmlformats.org/officeDocument/2006/relationships" xmlns:mc="http://schemas.openxmlformats.org/markup-compatibility/2006" xmlns:mv="urn:schemas-microsoft-com:mac:vml" xmlns:p="http://schemas.openxmlformats.org/presentationml/2006/main" xmlns:c="http://schemas.openxmlformats.org/drawingml/2006/chart" xmlns:dgm="http://schemas.openxmlformats.org/drawingml/2006/diagram" xmlns:o="urn:schemas-microsoft-com:office:office" xmlns:v="urn:schemas-microsoft-com:vml" xmlns:pvml="urn:schemas-microsoft-com:office:powerpoint" xmlns:com="http://schemas.openxmlformats.org/drawingml/2006/compatibility" xmlns:p14="http://schemas.microsoft.com/office/powerpoint/2010/main" xmlns:p15="http://schemas.microsoft.com/office/powerpoint/2012/main" xmlns:ahyp="http://schemas.microsoft.com/office/drawing/2018/hyperlinkcolor" matchingName="Title and body" type="tx">
+<p:sldLayout xmlns:a="http://schemas.openxmlformats.org/drawingml/2006/main" xmlns:r="http://schemas.openxmlformats.org/officeDocument/2006/relationships" xmlns:p="http://schemas.openxmlformats.org/presentationml/2006/main" matchingName="Title and body" type="tx">
   <p:cSld name="TITLE_AND_BODY">
     <p:spTree>
       <p:nvGrpSpPr>
-        <p:cNvPr id="16" name="Shape 16"/>
+        <p:cNvPr id="1" name="Shape 16"/>
         <p:cNvGrpSpPr/>
         <p:nvPr/>
       </p:nvGrpSpPr>
@@ -1786,7 +1825,9 @@
       <p:sp>
         <p:nvSpPr>
           <p:cNvPr id="17" name="Google Shape;17;p4"/>
-          <p:cNvSpPr txBox="1"/>
+          <p:cNvSpPr txBox="1">
+            <a:spLocks noGrp="1"/>
+          </p:cNvSpPr>
           <p:nvPr>
             <p:ph type="title"/>
           </p:nvPr>
@@ -1801,7 +1842,7 @@
           </a:prstGeom>
         </p:spPr>
         <p:txBody>
-          <a:bodyPr anchorCtr="0" anchor="t" bIns="91425" lIns="91425" spcFirstLastPara="1" rIns="91425" wrap="square" tIns="91425">
+          <a:bodyPr spcFirstLastPara="1" wrap="square" lIns="91425" tIns="91425" rIns="91425" bIns="91425" anchor="t" anchorCtr="0">
             <a:normAutofit/>
           </a:bodyPr>
           <a:lstStyle>
@@ -1905,15 +1946,19 @@
               <a:defRPr/>
             </a:lvl9pPr>
           </a:lstStyle>
-          <a:p/>
+          <a:p>
+            <a:endParaRPr/>
+          </a:p>
         </p:txBody>
       </p:sp>
       <p:sp>
         <p:nvSpPr>
           <p:cNvPr id="18" name="Google Shape;18;p4"/>
-          <p:cNvSpPr txBox="1"/>
+          <p:cNvSpPr txBox="1">
+            <a:spLocks noGrp="1"/>
+          </p:cNvSpPr>
           <p:nvPr>
-            <p:ph idx="1" type="body"/>
+            <p:ph type="body" idx="1"/>
           </p:nvPr>
         </p:nvSpPr>
         <p:spPr>
@@ -1926,11 +1971,11 @@
           </a:prstGeom>
         </p:spPr>
         <p:txBody>
-          <a:bodyPr anchorCtr="0" anchor="t" bIns="91425" lIns="91425" spcFirstLastPara="1" rIns="91425" wrap="square" tIns="91425">
+          <a:bodyPr spcFirstLastPara="1" wrap="square" lIns="91425" tIns="91425" rIns="91425" bIns="91425" anchor="t" anchorCtr="0">
             <a:normAutofit/>
           </a:bodyPr>
           <a:lstStyle>
-            <a:lvl1pPr indent="-342900" lvl="0" marL="457200">
+            <a:lvl1pPr marL="457200" lvl="0" indent="-342900">
               <a:spcBef>
                 <a:spcPts val="0"/>
               </a:spcBef>
@@ -1941,7 +1986,7 @@
               <a:buChar char="●"/>
               <a:defRPr/>
             </a:lvl1pPr>
-            <a:lvl2pPr indent="-317500" lvl="1" marL="914400">
+            <a:lvl2pPr marL="914400" lvl="1" indent="-317500">
               <a:spcBef>
                 <a:spcPts val="0"/>
               </a:spcBef>
@@ -1952,7 +1997,7 @@
               <a:buChar char="○"/>
               <a:defRPr/>
             </a:lvl2pPr>
-            <a:lvl3pPr indent="-317500" lvl="2" marL="1371600">
+            <a:lvl3pPr marL="1371600" lvl="2" indent="-317500">
               <a:spcBef>
                 <a:spcPts val="0"/>
               </a:spcBef>
@@ -1963,7 +2008,7 @@
               <a:buChar char="■"/>
               <a:defRPr/>
             </a:lvl3pPr>
-            <a:lvl4pPr indent="-317500" lvl="3" marL="1828800">
+            <a:lvl4pPr marL="1828800" lvl="3" indent="-317500">
               <a:spcBef>
                 <a:spcPts val="0"/>
               </a:spcBef>
@@ -1974,7 +2019,7 @@
               <a:buChar char="●"/>
               <a:defRPr/>
             </a:lvl4pPr>
-            <a:lvl5pPr indent="-317500" lvl="4" marL="2286000">
+            <a:lvl5pPr marL="2286000" lvl="4" indent="-317500">
               <a:spcBef>
                 <a:spcPts val="0"/>
               </a:spcBef>
@@ -1985,7 +2030,7 @@
               <a:buChar char="○"/>
               <a:defRPr/>
             </a:lvl5pPr>
-            <a:lvl6pPr indent="-317500" lvl="5" marL="2743200">
+            <a:lvl6pPr marL="2743200" lvl="5" indent="-317500">
               <a:spcBef>
                 <a:spcPts val="0"/>
               </a:spcBef>
@@ -1996,7 +2041,7 @@
               <a:buChar char="■"/>
               <a:defRPr/>
             </a:lvl6pPr>
-            <a:lvl7pPr indent="-317500" lvl="6" marL="3200400">
+            <a:lvl7pPr marL="3200400" lvl="6" indent="-317500">
               <a:spcBef>
                 <a:spcPts val="0"/>
               </a:spcBef>
@@ -2007,7 +2052,7 @@
               <a:buChar char="●"/>
               <a:defRPr/>
             </a:lvl7pPr>
-            <a:lvl8pPr indent="-317500" lvl="7" marL="3657600">
+            <a:lvl8pPr marL="3657600" lvl="7" indent="-317500">
               <a:spcBef>
                 <a:spcPts val="0"/>
               </a:spcBef>
@@ -2018,7 +2063,7 @@
               <a:buChar char="○"/>
               <a:defRPr/>
             </a:lvl8pPr>
-            <a:lvl9pPr indent="-317500" lvl="8" marL="4114800">
+            <a:lvl9pPr marL="4114800" lvl="8" indent="-317500">
               <a:spcBef>
                 <a:spcPts val="0"/>
               </a:spcBef>
@@ -2030,15 +2075,19 @@
               <a:defRPr/>
             </a:lvl9pPr>
           </a:lstStyle>
-          <a:p/>
+          <a:p>
+            <a:endParaRPr/>
+          </a:p>
         </p:txBody>
       </p:sp>
       <p:sp>
         <p:nvSpPr>
           <p:cNvPr id="19" name="Google Shape;19;p4"/>
-          <p:cNvSpPr txBox="1"/>
+          <p:cNvSpPr txBox="1">
+            <a:spLocks noGrp="1"/>
+          </p:cNvSpPr>
           <p:nvPr>
-            <p:ph idx="12" type="sldNum"/>
+            <p:ph type="sldNum" idx="12"/>
           </p:nvPr>
         </p:nvSpPr>
         <p:spPr>
@@ -2051,7 +2100,7 @@
           </a:prstGeom>
         </p:spPr>
         <p:txBody>
-          <a:bodyPr anchorCtr="0" anchor="ctr" bIns="91425" lIns="91425" spcFirstLastPara="1" rIns="91425" wrap="square" tIns="91425">
+          <a:bodyPr spcFirstLastPara="1" wrap="square" lIns="91425" tIns="91425" rIns="91425" bIns="91425" anchor="ctr" anchorCtr="0">
             <a:normAutofit/>
           </a:bodyPr>
           <a:lstStyle>
@@ -2093,7 +2142,7 @@
             </a:lvl9pPr>
           </a:lstStyle>
           <a:p>
-            <a:pPr indent="0" lvl="0" marL="0" rtl="0" algn="r">
+            <a:pPr marL="0" lvl="0" indent="0" algn="r" rtl="0">
               <a:spcBef>
                 <a:spcPts val="0"/>
               </a:spcBef>
@@ -2119,11 +2168,11 @@
 </file>
 
 <file path=ppt/slideLayouts/slideLayout4.xml><?xml version="1.0" encoding="utf-8"?>
-<p:sldLayout xmlns:a="http://schemas.openxmlformats.org/drawingml/2006/main" xmlns:r="http://schemas.openxmlformats.org/officeDocument/2006/relationships" xmlns:mc="http://schemas.openxmlformats.org/markup-compatibility/2006" xmlns:mv="urn:schemas-microsoft-com:mac:vml" xmlns:p="http://schemas.openxmlformats.org/presentationml/2006/main" xmlns:c="http://schemas.openxmlformats.org/drawingml/2006/chart" xmlns:dgm="http://schemas.openxmlformats.org/drawingml/2006/diagram" xmlns:o="urn:schemas-microsoft-com:office:office" xmlns:v="urn:schemas-microsoft-com:vml" xmlns:pvml="urn:schemas-microsoft-com:office:powerpoint" xmlns:com="http://schemas.openxmlformats.org/drawingml/2006/compatibility" xmlns:p14="http://schemas.microsoft.com/office/powerpoint/2010/main" xmlns:p15="http://schemas.microsoft.com/office/powerpoint/2012/main" xmlns:ahyp="http://schemas.microsoft.com/office/drawing/2018/hyperlinkcolor" matchingName="Title and two columns" type="twoColTx">
+<p:sldLayout xmlns:a="http://schemas.openxmlformats.org/drawingml/2006/main" xmlns:r="http://schemas.openxmlformats.org/officeDocument/2006/relationships" xmlns:p="http://schemas.openxmlformats.org/presentationml/2006/main" matchingName="Title and two columns" type="twoColTx">
   <p:cSld name="TITLE_AND_TWO_COLUMNS">
     <p:spTree>
       <p:nvGrpSpPr>
-        <p:cNvPr id="20" name="Shape 20"/>
+        <p:cNvPr id="1" name="Shape 20"/>
         <p:cNvGrpSpPr/>
         <p:nvPr/>
       </p:nvGrpSpPr>
@@ -2138,7 +2187,9 @@
       <p:sp>
         <p:nvSpPr>
           <p:cNvPr id="21" name="Google Shape;21;p5"/>
-          <p:cNvSpPr txBox="1"/>
+          <p:cNvSpPr txBox="1">
+            <a:spLocks noGrp="1"/>
+          </p:cNvSpPr>
           <p:nvPr>
             <p:ph type="title"/>
           </p:nvPr>
@@ -2153,7 +2204,7 @@
           </a:prstGeom>
         </p:spPr>
         <p:txBody>
-          <a:bodyPr anchorCtr="0" anchor="t" bIns="91425" lIns="91425" spcFirstLastPara="1" rIns="91425" wrap="square" tIns="91425">
+          <a:bodyPr spcFirstLastPara="1" wrap="square" lIns="91425" tIns="91425" rIns="91425" bIns="91425" anchor="t" anchorCtr="0">
             <a:normAutofit/>
           </a:bodyPr>
           <a:lstStyle>
@@ -2257,15 +2308,19 @@
               <a:defRPr/>
             </a:lvl9pPr>
           </a:lstStyle>
-          <a:p/>
+          <a:p>
+            <a:endParaRPr/>
+          </a:p>
         </p:txBody>
       </p:sp>
       <p:sp>
         <p:nvSpPr>
           <p:cNvPr id="22" name="Google Shape;22;p5"/>
-          <p:cNvSpPr txBox="1"/>
+          <p:cNvSpPr txBox="1">
+            <a:spLocks noGrp="1"/>
+          </p:cNvSpPr>
           <p:nvPr>
-            <p:ph idx="1" type="body"/>
+            <p:ph type="body" idx="1"/>
           </p:nvPr>
         </p:nvSpPr>
         <p:spPr>
@@ -2278,11 +2333,11 @@
           </a:prstGeom>
         </p:spPr>
         <p:txBody>
-          <a:bodyPr anchorCtr="0" anchor="t" bIns="91425" lIns="91425" spcFirstLastPara="1" rIns="91425" wrap="square" tIns="91425">
+          <a:bodyPr spcFirstLastPara="1" wrap="square" lIns="91425" tIns="91425" rIns="91425" bIns="91425" anchor="t" anchorCtr="0">
             <a:normAutofit/>
           </a:bodyPr>
           <a:lstStyle>
-            <a:lvl1pPr indent="-317500" lvl="0" marL="457200">
+            <a:lvl1pPr marL="457200" lvl="0" indent="-317500">
               <a:spcBef>
                 <a:spcPts val="0"/>
               </a:spcBef>
@@ -2293,7 +2348,7 @@
               <a:buChar char="●"/>
               <a:defRPr sz="1400"/>
             </a:lvl1pPr>
-            <a:lvl2pPr indent="-304800" lvl="1" marL="914400">
+            <a:lvl2pPr marL="914400" lvl="1" indent="-304800">
               <a:spcBef>
                 <a:spcPts val="0"/>
               </a:spcBef>
@@ -2304,7 +2359,7 @@
               <a:buChar char="○"/>
               <a:defRPr sz="1200"/>
             </a:lvl2pPr>
-            <a:lvl3pPr indent="-304800" lvl="2" marL="1371600">
+            <a:lvl3pPr marL="1371600" lvl="2" indent="-304800">
               <a:spcBef>
                 <a:spcPts val="0"/>
               </a:spcBef>
@@ -2315,7 +2370,7 @@
               <a:buChar char="■"/>
               <a:defRPr sz="1200"/>
             </a:lvl3pPr>
-            <a:lvl4pPr indent="-304800" lvl="3" marL="1828800">
+            <a:lvl4pPr marL="1828800" lvl="3" indent="-304800">
               <a:spcBef>
                 <a:spcPts val="0"/>
               </a:spcBef>
@@ -2326,7 +2381,7 @@
               <a:buChar char="●"/>
               <a:defRPr sz="1200"/>
             </a:lvl4pPr>
-            <a:lvl5pPr indent="-304800" lvl="4" marL="2286000">
+            <a:lvl5pPr marL="2286000" lvl="4" indent="-304800">
               <a:spcBef>
                 <a:spcPts val="0"/>
               </a:spcBef>
@@ -2337,7 +2392,7 @@
               <a:buChar char="○"/>
               <a:defRPr sz="1200"/>
             </a:lvl5pPr>
-            <a:lvl6pPr indent="-304800" lvl="5" marL="2743200">
+            <a:lvl6pPr marL="2743200" lvl="5" indent="-304800">
               <a:spcBef>
                 <a:spcPts val="0"/>
               </a:spcBef>
@@ -2348,7 +2403,7 @@
               <a:buChar char="■"/>
               <a:defRPr sz="1200"/>
             </a:lvl6pPr>
-            <a:lvl7pPr indent="-304800" lvl="6" marL="3200400">
+            <a:lvl7pPr marL="3200400" lvl="6" indent="-304800">
               <a:spcBef>
                 <a:spcPts val="0"/>
               </a:spcBef>
@@ -2359,7 +2414,7 @@
               <a:buChar char="●"/>
               <a:defRPr sz="1200"/>
             </a:lvl7pPr>
-            <a:lvl8pPr indent="-304800" lvl="7" marL="3657600">
+            <a:lvl8pPr marL="3657600" lvl="7" indent="-304800">
               <a:spcBef>
                 <a:spcPts val="0"/>
               </a:spcBef>
@@ -2370,7 +2425,7 @@
               <a:buChar char="○"/>
               <a:defRPr sz="1200"/>
             </a:lvl8pPr>
-            <a:lvl9pPr indent="-304800" lvl="8" marL="4114800">
+            <a:lvl9pPr marL="4114800" lvl="8" indent="-304800">
               <a:spcBef>
                 <a:spcPts val="0"/>
               </a:spcBef>
@@ -2382,15 +2437,19 @@
               <a:defRPr sz="1200"/>
             </a:lvl9pPr>
           </a:lstStyle>
-          <a:p/>
+          <a:p>
+            <a:endParaRPr/>
+          </a:p>
         </p:txBody>
       </p:sp>
       <p:sp>
         <p:nvSpPr>
           <p:cNvPr id="23" name="Google Shape;23;p5"/>
-          <p:cNvSpPr txBox="1"/>
+          <p:cNvSpPr txBox="1">
+            <a:spLocks noGrp="1"/>
+          </p:cNvSpPr>
           <p:nvPr>
-            <p:ph idx="2" type="body"/>
+            <p:ph type="body" idx="2"/>
           </p:nvPr>
         </p:nvSpPr>
         <p:spPr>
@@ -2403,11 +2462,11 @@
           </a:prstGeom>
         </p:spPr>
         <p:txBody>
-          <a:bodyPr anchorCtr="0" anchor="t" bIns="91425" lIns="91425" spcFirstLastPara="1" rIns="91425" wrap="square" tIns="91425">
+          <a:bodyPr spcFirstLastPara="1" wrap="square" lIns="91425" tIns="91425" rIns="91425" bIns="91425" anchor="t" anchorCtr="0">
             <a:normAutofit/>
           </a:bodyPr>
           <a:lstStyle>
-            <a:lvl1pPr indent="-317500" lvl="0" marL="457200">
+            <a:lvl1pPr marL="457200" lvl="0" indent="-317500">
               <a:spcBef>
                 <a:spcPts val="0"/>
               </a:spcBef>
@@ -2418,7 +2477,7 @@
               <a:buChar char="●"/>
               <a:defRPr sz="1400"/>
             </a:lvl1pPr>
-            <a:lvl2pPr indent="-304800" lvl="1" marL="914400">
+            <a:lvl2pPr marL="914400" lvl="1" indent="-304800">
               <a:spcBef>
                 <a:spcPts val="0"/>
               </a:spcBef>
@@ -2429,7 +2488,7 @@
               <a:buChar char="○"/>
               <a:defRPr sz="1200"/>
             </a:lvl2pPr>
-            <a:lvl3pPr indent="-304800" lvl="2" marL="1371600">
+            <a:lvl3pPr marL="1371600" lvl="2" indent="-304800">
               <a:spcBef>
                 <a:spcPts val="0"/>
               </a:spcBef>
@@ -2440,7 +2499,7 @@
               <a:buChar char="■"/>
               <a:defRPr sz="1200"/>
             </a:lvl3pPr>
-            <a:lvl4pPr indent="-304800" lvl="3" marL="1828800">
+            <a:lvl4pPr marL="1828800" lvl="3" indent="-304800">
               <a:spcBef>
                 <a:spcPts val="0"/>
               </a:spcBef>
@@ -2451,7 +2510,7 @@
               <a:buChar char="●"/>
               <a:defRPr sz="1200"/>
             </a:lvl4pPr>
-            <a:lvl5pPr indent="-304800" lvl="4" marL="2286000">
+            <a:lvl5pPr marL="2286000" lvl="4" indent="-304800">
               <a:spcBef>
                 <a:spcPts val="0"/>
               </a:spcBef>
@@ -2462,7 +2521,7 @@
               <a:buChar char="○"/>
               <a:defRPr sz="1200"/>
             </a:lvl5pPr>
-            <a:lvl6pPr indent="-304800" lvl="5" marL="2743200">
+            <a:lvl6pPr marL="2743200" lvl="5" indent="-304800">
               <a:spcBef>
                 <a:spcPts val="0"/>
               </a:spcBef>
@@ -2473,7 +2532,7 @@
               <a:buChar char="■"/>
               <a:defRPr sz="1200"/>
             </a:lvl6pPr>
-            <a:lvl7pPr indent="-304800" lvl="6" marL="3200400">
+            <a:lvl7pPr marL="3200400" lvl="6" indent="-304800">
               <a:spcBef>
                 <a:spcPts val="0"/>
               </a:spcBef>
@@ -2484,7 +2543,7 @@
               <a:buChar char="●"/>
               <a:defRPr sz="1200"/>
             </a:lvl7pPr>
-            <a:lvl8pPr indent="-304800" lvl="7" marL="3657600">
+            <a:lvl8pPr marL="3657600" lvl="7" indent="-304800">
               <a:spcBef>
                 <a:spcPts val="0"/>
               </a:spcBef>
@@ -2495,7 +2554,7 @@
               <a:buChar char="○"/>
               <a:defRPr sz="1200"/>
             </a:lvl8pPr>
-            <a:lvl9pPr indent="-304800" lvl="8" marL="4114800">
+            <a:lvl9pPr marL="4114800" lvl="8" indent="-304800">
               <a:spcBef>
                 <a:spcPts val="0"/>
               </a:spcBef>
@@ -2507,15 +2566,19 @@
               <a:defRPr sz="1200"/>
             </a:lvl9pPr>
           </a:lstStyle>
-          <a:p/>
+          <a:p>
+            <a:endParaRPr/>
+          </a:p>
         </p:txBody>
       </p:sp>
       <p:sp>
         <p:nvSpPr>
           <p:cNvPr id="24" name="Google Shape;24;p5"/>
-          <p:cNvSpPr txBox="1"/>
+          <p:cNvSpPr txBox="1">
+            <a:spLocks noGrp="1"/>
+          </p:cNvSpPr>
           <p:nvPr>
-            <p:ph idx="12" type="sldNum"/>
+            <p:ph type="sldNum" idx="12"/>
           </p:nvPr>
         </p:nvSpPr>
         <p:spPr>
@@ -2528,7 +2591,7 @@
           </a:prstGeom>
         </p:spPr>
         <p:txBody>
-          <a:bodyPr anchorCtr="0" anchor="ctr" bIns="91425" lIns="91425" spcFirstLastPara="1" rIns="91425" wrap="square" tIns="91425">
+          <a:bodyPr spcFirstLastPara="1" wrap="square" lIns="91425" tIns="91425" rIns="91425" bIns="91425" anchor="ctr" anchorCtr="0">
             <a:normAutofit/>
           </a:bodyPr>
           <a:lstStyle>
@@ -2570,7 +2633,7 @@
             </a:lvl9pPr>
           </a:lstStyle>
           <a:p>
-            <a:pPr indent="0" lvl="0" marL="0" rtl="0" algn="r">
+            <a:pPr marL="0" lvl="0" indent="0" algn="r" rtl="0">
               <a:spcBef>
                 <a:spcPts val="0"/>
               </a:spcBef>
@@ -2596,11 +2659,11 @@
 </file>
 
 <file path=ppt/slideLayouts/slideLayout5.xml><?xml version="1.0" encoding="utf-8"?>
-<p:sldLayout xmlns:a="http://schemas.openxmlformats.org/drawingml/2006/main" xmlns:r="http://schemas.openxmlformats.org/officeDocument/2006/relationships" xmlns:mc="http://schemas.openxmlformats.org/markup-compatibility/2006" xmlns:mv="urn:schemas-microsoft-com:mac:vml" xmlns:p="http://schemas.openxmlformats.org/presentationml/2006/main" xmlns:c="http://schemas.openxmlformats.org/drawingml/2006/chart" xmlns:dgm="http://schemas.openxmlformats.org/drawingml/2006/diagram" xmlns:o="urn:schemas-microsoft-com:office:office" xmlns:v="urn:schemas-microsoft-com:vml" xmlns:pvml="urn:schemas-microsoft-com:office:powerpoint" xmlns:com="http://schemas.openxmlformats.org/drawingml/2006/compatibility" xmlns:p14="http://schemas.microsoft.com/office/powerpoint/2010/main" xmlns:p15="http://schemas.microsoft.com/office/powerpoint/2012/main" xmlns:ahyp="http://schemas.microsoft.com/office/drawing/2018/hyperlinkcolor" matchingName="Title only" type="titleOnly">
+<p:sldLayout xmlns:a="http://schemas.openxmlformats.org/drawingml/2006/main" xmlns:r="http://schemas.openxmlformats.org/officeDocument/2006/relationships" xmlns:p="http://schemas.openxmlformats.org/presentationml/2006/main" matchingName="Title only" type="titleOnly">
   <p:cSld name="TITLE_ONLY">
     <p:spTree>
       <p:nvGrpSpPr>
-        <p:cNvPr id="25" name="Shape 25"/>
+        <p:cNvPr id="1" name="Shape 25"/>
         <p:cNvGrpSpPr/>
         <p:nvPr/>
       </p:nvGrpSpPr>
@@ -2615,7 +2678,9 @@
       <p:sp>
         <p:nvSpPr>
           <p:cNvPr id="26" name="Google Shape;26;p6"/>
-          <p:cNvSpPr txBox="1"/>
+          <p:cNvSpPr txBox="1">
+            <a:spLocks noGrp="1"/>
+          </p:cNvSpPr>
           <p:nvPr>
             <p:ph type="title"/>
           </p:nvPr>
@@ -2630,7 +2695,7 @@
           </a:prstGeom>
         </p:spPr>
         <p:txBody>
-          <a:bodyPr anchorCtr="0" anchor="t" bIns="91425" lIns="91425" spcFirstLastPara="1" rIns="91425" wrap="square" tIns="91425">
+          <a:bodyPr spcFirstLastPara="1" wrap="square" lIns="91425" tIns="91425" rIns="91425" bIns="91425" anchor="t" anchorCtr="0">
             <a:normAutofit/>
           </a:bodyPr>
           <a:lstStyle>
@@ -2734,15 +2799,19 @@
               <a:defRPr/>
             </a:lvl9pPr>
           </a:lstStyle>
-          <a:p/>
+          <a:p>
+            <a:endParaRPr/>
+          </a:p>
         </p:txBody>
       </p:sp>
       <p:sp>
         <p:nvSpPr>
           <p:cNvPr id="27" name="Google Shape;27;p6"/>
-          <p:cNvSpPr txBox="1"/>
+          <p:cNvSpPr txBox="1">
+            <a:spLocks noGrp="1"/>
+          </p:cNvSpPr>
           <p:nvPr>
-            <p:ph idx="12" type="sldNum"/>
+            <p:ph type="sldNum" idx="12"/>
           </p:nvPr>
         </p:nvSpPr>
         <p:spPr>
@@ -2755,7 +2824,7 @@
           </a:prstGeom>
         </p:spPr>
         <p:txBody>
-          <a:bodyPr anchorCtr="0" anchor="ctr" bIns="91425" lIns="91425" spcFirstLastPara="1" rIns="91425" wrap="square" tIns="91425">
+          <a:bodyPr spcFirstLastPara="1" wrap="square" lIns="91425" tIns="91425" rIns="91425" bIns="91425" anchor="ctr" anchorCtr="0">
             <a:normAutofit/>
           </a:bodyPr>
           <a:lstStyle>
@@ -2797,7 +2866,7 @@
             </a:lvl9pPr>
           </a:lstStyle>
           <a:p>
-            <a:pPr indent="0" lvl="0" marL="0" rtl="0" algn="r">
+            <a:pPr marL="0" lvl="0" indent="0" algn="r" rtl="0">
               <a:spcBef>
                 <a:spcPts val="0"/>
               </a:spcBef>
@@ -2823,11 +2892,11 @@
 </file>
 
 <file path=ppt/slideLayouts/slideLayout6.xml><?xml version="1.0" encoding="utf-8"?>
-<p:sldLayout xmlns:a="http://schemas.openxmlformats.org/drawingml/2006/main" xmlns:r="http://schemas.openxmlformats.org/officeDocument/2006/relationships" xmlns:mc="http://schemas.openxmlformats.org/markup-compatibility/2006" xmlns:mv="urn:schemas-microsoft-com:mac:vml" xmlns:p="http://schemas.openxmlformats.org/presentationml/2006/main" xmlns:c="http://schemas.openxmlformats.org/drawingml/2006/chart" xmlns:dgm="http://schemas.openxmlformats.org/drawingml/2006/diagram" xmlns:o="urn:schemas-microsoft-com:office:office" xmlns:v="urn:schemas-microsoft-com:vml" xmlns:pvml="urn:schemas-microsoft-com:office:powerpoint" xmlns:com="http://schemas.openxmlformats.org/drawingml/2006/compatibility" xmlns:p14="http://schemas.microsoft.com/office/powerpoint/2010/main" xmlns:p15="http://schemas.microsoft.com/office/powerpoint/2012/main" xmlns:ahyp="http://schemas.microsoft.com/office/drawing/2018/hyperlinkcolor" matchingName="One column text">
+<p:sldLayout xmlns:a="http://schemas.openxmlformats.org/drawingml/2006/main" xmlns:r="http://schemas.openxmlformats.org/officeDocument/2006/relationships" xmlns:p="http://schemas.openxmlformats.org/presentationml/2006/main" matchingName="One column text">
   <p:cSld name="ONE_COLUMN_TEXT">
     <p:spTree>
       <p:nvGrpSpPr>
-        <p:cNvPr id="28" name="Shape 28"/>
+        <p:cNvPr id="1" name="Shape 28"/>
         <p:cNvGrpSpPr/>
         <p:nvPr/>
       </p:nvGrpSpPr>
@@ -2842,7 +2911,9 @@
       <p:sp>
         <p:nvSpPr>
           <p:cNvPr id="29" name="Google Shape;29;p7"/>
-          <p:cNvSpPr txBox="1"/>
+          <p:cNvSpPr txBox="1">
+            <a:spLocks noGrp="1"/>
+          </p:cNvSpPr>
           <p:nvPr>
             <p:ph type="title"/>
           </p:nvPr>
@@ -2857,7 +2928,7 @@
           </a:prstGeom>
         </p:spPr>
         <p:txBody>
-          <a:bodyPr anchorCtr="0" anchor="b" bIns="91425" lIns="91425" spcFirstLastPara="1" rIns="91425" wrap="square" tIns="91425">
+          <a:bodyPr spcFirstLastPara="1" wrap="square" lIns="91425" tIns="91425" rIns="91425" bIns="91425" anchor="b" anchorCtr="0">
             <a:normAutofit/>
           </a:bodyPr>
           <a:lstStyle>
@@ -2961,15 +3032,19 @@
               <a:defRPr sz="2400"/>
             </a:lvl9pPr>
           </a:lstStyle>
-          <a:p/>
+          <a:p>
+            <a:endParaRPr/>
+          </a:p>
         </p:txBody>
       </p:sp>
       <p:sp>
         <p:nvSpPr>
           <p:cNvPr id="30" name="Google Shape;30;p7"/>
-          <p:cNvSpPr txBox="1"/>
+          <p:cNvSpPr txBox="1">
+            <a:spLocks noGrp="1"/>
+          </p:cNvSpPr>
           <p:nvPr>
-            <p:ph idx="1" type="body"/>
+            <p:ph type="body" idx="1"/>
           </p:nvPr>
         </p:nvSpPr>
         <p:spPr>
@@ -2982,11 +3057,11 @@
           </a:prstGeom>
         </p:spPr>
         <p:txBody>
-          <a:bodyPr anchorCtr="0" anchor="t" bIns="91425" lIns="91425" spcFirstLastPara="1" rIns="91425" wrap="square" tIns="91425">
+          <a:bodyPr spcFirstLastPara="1" wrap="square" lIns="91425" tIns="91425" rIns="91425" bIns="91425" anchor="t" anchorCtr="0">
             <a:normAutofit/>
           </a:bodyPr>
           <a:lstStyle>
-            <a:lvl1pPr indent="-304800" lvl="0" marL="457200">
+            <a:lvl1pPr marL="457200" lvl="0" indent="-304800">
               <a:spcBef>
                 <a:spcPts val="0"/>
               </a:spcBef>
@@ -2997,7 +3072,7 @@
               <a:buChar char="●"/>
               <a:defRPr sz="1200"/>
             </a:lvl1pPr>
-            <a:lvl2pPr indent="-304800" lvl="1" marL="914400">
+            <a:lvl2pPr marL="914400" lvl="1" indent="-304800">
               <a:spcBef>
                 <a:spcPts val="0"/>
               </a:spcBef>
@@ -3008,7 +3083,7 @@
               <a:buChar char="○"/>
               <a:defRPr sz="1200"/>
             </a:lvl2pPr>
-            <a:lvl3pPr indent="-304800" lvl="2" marL="1371600">
+            <a:lvl3pPr marL="1371600" lvl="2" indent="-304800">
               <a:spcBef>
                 <a:spcPts val="0"/>
               </a:spcBef>
@@ -3019,7 +3094,7 @@
               <a:buChar char="■"/>
               <a:defRPr sz="1200"/>
             </a:lvl3pPr>
-            <a:lvl4pPr indent="-304800" lvl="3" marL="1828800">
+            <a:lvl4pPr marL="1828800" lvl="3" indent="-304800">
               <a:spcBef>
                 <a:spcPts val="0"/>
               </a:spcBef>
@@ -3030,7 +3105,7 @@
               <a:buChar char="●"/>
               <a:defRPr sz="1200"/>
             </a:lvl4pPr>
-            <a:lvl5pPr indent="-304800" lvl="4" marL="2286000">
+            <a:lvl5pPr marL="2286000" lvl="4" indent="-304800">
               <a:spcBef>
                 <a:spcPts val="0"/>
               </a:spcBef>
@@ -3041,7 +3116,7 @@
               <a:buChar char="○"/>
               <a:defRPr sz="1200"/>
             </a:lvl5pPr>
-            <a:lvl6pPr indent="-304800" lvl="5" marL="2743200">
+            <a:lvl6pPr marL="2743200" lvl="5" indent="-304800">
               <a:spcBef>
                 <a:spcPts val="0"/>
               </a:spcBef>
@@ -3052,7 +3127,7 @@
               <a:buChar char="■"/>
               <a:defRPr sz="1200"/>
             </a:lvl6pPr>
-            <a:lvl7pPr indent="-304800" lvl="6" marL="3200400">
+            <a:lvl7pPr marL="3200400" lvl="6" indent="-304800">
               <a:spcBef>
                 <a:spcPts val="0"/>
               </a:spcBef>
@@ -3063,7 +3138,7 @@
               <a:buChar char="●"/>
               <a:defRPr sz="1200"/>
             </a:lvl7pPr>
-            <a:lvl8pPr indent="-304800" lvl="7" marL="3657600">
+            <a:lvl8pPr marL="3657600" lvl="7" indent="-304800">
               <a:spcBef>
                 <a:spcPts val="0"/>
               </a:spcBef>
@@ -3074,7 +3149,7 @@
               <a:buChar char="○"/>
               <a:defRPr sz="1200"/>
             </a:lvl8pPr>
-            <a:lvl9pPr indent="-304800" lvl="8" marL="4114800">
+            <a:lvl9pPr marL="4114800" lvl="8" indent="-304800">
               <a:spcBef>
                 <a:spcPts val="0"/>
               </a:spcBef>
@@ -3086,15 +3161,19 @@
               <a:defRPr sz="1200"/>
             </a:lvl9pPr>
           </a:lstStyle>
-          <a:p/>
+          <a:p>
+            <a:endParaRPr/>
+          </a:p>
         </p:txBody>
       </p:sp>
       <p:sp>
         <p:nvSpPr>
           <p:cNvPr id="31" name="Google Shape;31;p7"/>
-          <p:cNvSpPr txBox="1"/>
+          <p:cNvSpPr txBox="1">
+            <a:spLocks noGrp="1"/>
+          </p:cNvSpPr>
           <p:nvPr>
-            <p:ph idx="12" type="sldNum"/>
+            <p:ph type="sldNum" idx="12"/>
           </p:nvPr>
         </p:nvSpPr>
         <p:spPr>
@@ -3107,7 +3186,7 @@
           </a:prstGeom>
         </p:spPr>
         <p:txBody>
-          <a:bodyPr anchorCtr="0" anchor="ctr" bIns="91425" lIns="91425" spcFirstLastPara="1" rIns="91425" wrap="square" tIns="91425">
+          <a:bodyPr spcFirstLastPara="1" wrap="square" lIns="91425" tIns="91425" rIns="91425" bIns="91425" anchor="ctr" anchorCtr="0">
             <a:normAutofit/>
           </a:bodyPr>
           <a:lstStyle>
@@ -3149,7 +3228,7 @@
             </a:lvl9pPr>
           </a:lstStyle>
           <a:p>
-            <a:pPr indent="0" lvl="0" marL="0" rtl="0" algn="r">
+            <a:pPr marL="0" lvl="0" indent="0" algn="r" rtl="0">
               <a:spcBef>
                 <a:spcPts val="0"/>
               </a:spcBef>
@@ -3175,11 +3254,11 @@
 </file>
 
 <file path=ppt/slideLayouts/slideLayout7.xml><?xml version="1.0" encoding="utf-8"?>
-<p:sldLayout xmlns:a="http://schemas.openxmlformats.org/drawingml/2006/main" xmlns:r="http://schemas.openxmlformats.org/officeDocument/2006/relationships" xmlns:mc="http://schemas.openxmlformats.org/markup-compatibility/2006" xmlns:mv="urn:schemas-microsoft-com:mac:vml" xmlns:p="http://schemas.openxmlformats.org/presentationml/2006/main" xmlns:c="http://schemas.openxmlformats.org/drawingml/2006/chart" xmlns:dgm="http://schemas.openxmlformats.org/drawingml/2006/diagram" xmlns:o="urn:schemas-microsoft-com:office:office" xmlns:v="urn:schemas-microsoft-com:vml" xmlns:pvml="urn:schemas-microsoft-com:office:powerpoint" xmlns:com="http://schemas.openxmlformats.org/drawingml/2006/compatibility" xmlns:p14="http://schemas.microsoft.com/office/powerpoint/2010/main" xmlns:p15="http://schemas.microsoft.com/office/powerpoint/2012/main" xmlns:ahyp="http://schemas.microsoft.com/office/drawing/2018/hyperlinkcolor" matchingName="Main point">
+<p:sldLayout xmlns:a="http://schemas.openxmlformats.org/drawingml/2006/main" xmlns:r="http://schemas.openxmlformats.org/officeDocument/2006/relationships" xmlns:p="http://schemas.openxmlformats.org/presentationml/2006/main" matchingName="Main point">
   <p:cSld name="MAIN_POINT">
     <p:spTree>
       <p:nvGrpSpPr>
-        <p:cNvPr id="32" name="Shape 32"/>
+        <p:cNvPr id="1" name="Shape 32"/>
         <p:cNvGrpSpPr/>
         <p:nvPr/>
       </p:nvGrpSpPr>
@@ -3194,7 +3273,9 @@
       <p:sp>
         <p:nvSpPr>
           <p:cNvPr id="33" name="Google Shape;33;p8"/>
-          <p:cNvSpPr txBox="1"/>
+          <p:cNvSpPr txBox="1">
+            <a:spLocks noGrp="1"/>
+          </p:cNvSpPr>
           <p:nvPr>
             <p:ph type="title"/>
           </p:nvPr>
@@ -3209,7 +3290,7 @@
           </a:prstGeom>
         </p:spPr>
         <p:txBody>
-          <a:bodyPr anchorCtr="0" anchor="ctr" bIns="91425" lIns="91425" spcFirstLastPara="1" rIns="91425" wrap="square" tIns="91425">
+          <a:bodyPr spcFirstLastPara="1" wrap="square" lIns="91425" tIns="91425" rIns="91425" bIns="91425" anchor="ctr" anchorCtr="0">
             <a:normAutofit/>
           </a:bodyPr>
           <a:lstStyle>
@@ -3313,15 +3394,19 @@
               <a:defRPr sz="4800"/>
             </a:lvl9pPr>
           </a:lstStyle>
-          <a:p/>
+          <a:p>
+            <a:endParaRPr/>
+          </a:p>
         </p:txBody>
       </p:sp>
       <p:sp>
         <p:nvSpPr>
           <p:cNvPr id="34" name="Google Shape;34;p8"/>
-          <p:cNvSpPr txBox="1"/>
+          <p:cNvSpPr txBox="1">
+            <a:spLocks noGrp="1"/>
+          </p:cNvSpPr>
           <p:nvPr>
-            <p:ph idx="12" type="sldNum"/>
+            <p:ph type="sldNum" idx="12"/>
           </p:nvPr>
         </p:nvSpPr>
         <p:spPr>
@@ -3334,7 +3419,7 @@
           </a:prstGeom>
         </p:spPr>
         <p:txBody>
-          <a:bodyPr anchorCtr="0" anchor="ctr" bIns="91425" lIns="91425" spcFirstLastPara="1" rIns="91425" wrap="square" tIns="91425">
+          <a:bodyPr spcFirstLastPara="1" wrap="square" lIns="91425" tIns="91425" rIns="91425" bIns="91425" anchor="ctr" anchorCtr="0">
             <a:normAutofit/>
           </a:bodyPr>
           <a:lstStyle>
@@ -3376,7 +3461,7 @@
             </a:lvl9pPr>
           </a:lstStyle>
           <a:p>
-            <a:pPr indent="0" lvl="0" marL="0" rtl="0" algn="r">
+            <a:pPr marL="0" lvl="0" indent="0" algn="r" rtl="0">
               <a:spcBef>
                 <a:spcPts val="0"/>
               </a:spcBef>
@@ -3402,11 +3487,11 @@
 </file>
 
 <file path=ppt/slideLayouts/slideLayout8.xml><?xml version="1.0" encoding="utf-8"?>
-<p:sldLayout xmlns:a="http://schemas.openxmlformats.org/drawingml/2006/main" xmlns:r="http://schemas.openxmlformats.org/officeDocument/2006/relationships" xmlns:mc="http://schemas.openxmlformats.org/markup-compatibility/2006" xmlns:mv="urn:schemas-microsoft-com:mac:vml" xmlns:p="http://schemas.openxmlformats.org/presentationml/2006/main" xmlns:c="http://schemas.openxmlformats.org/drawingml/2006/chart" xmlns:dgm="http://schemas.openxmlformats.org/drawingml/2006/diagram" xmlns:o="urn:schemas-microsoft-com:office:office" xmlns:v="urn:schemas-microsoft-com:vml" xmlns:pvml="urn:schemas-microsoft-com:office:powerpoint" xmlns:com="http://schemas.openxmlformats.org/drawingml/2006/compatibility" xmlns:p14="http://schemas.microsoft.com/office/powerpoint/2010/main" xmlns:p15="http://schemas.microsoft.com/office/powerpoint/2012/main" xmlns:ahyp="http://schemas.microsoft.com/office/drawing/2018/hyperlinkcolor" matchingName="Section title and description">
+<p:sldLayout xmlns:a="http://schemas.openxmlformats.org/drawingml/2006/main" xmlns:r="http://schemas.openxmlformats.org/officeDocument/2006/relationships" xmlns:p="http://schemas.openxmlformats.org/presentationml/2006/main" matchingName="Section title and description">
   <p:cSld name="SECTION_TITLE_AND_DESCRIPTION">
     <p:spTree>
       <p:nvGrpSpPr>
-        <p:cNvPr id="35" name="Shape 35"/>
+        <p:cNvPr id="1" name="Shape 35"/>
         <p:cNvGrpSpPr/>
         <p:nvPr/>
       </p:nvGrpSpPr>
@@ -3440,12 +3525,12 @@
           </a:ln>
         </p:spPr>
         <p:txBody>
-          <a:bodyPr anchorCtr="0" anchor="ctr" bIns="91425" lIns="91425" spcFirstLastPara="1" rIns="91425" wrap="square" tIns="91425">
+          <a:bodyPr spcFirstLastPara="1" wrap="square" lIns="91425" tIns="91425" rIns="91425" bIns="91425" anchor="ctr" anchorCtr="0">
             <a:noAutofit/>
           </a:bodyPr>
           <a:lstStyle/>
           <a:p>
-            <a:pPr indent="0" lvl="0" marL="0" rtl="0" algn="l">
+            <a:pPr marL="0" lvl="0" indent="0" algn="l" rtl="0">
               <a:spcBef>
                 <a:spcPts val="0"/>
               </a:spcBef>
@@ -3454,9 +3539,6 @@
               </a:spcAft>
               <a:buNone/>
             </a:pPr>
-            <a:r>
-              <a:t/>
-            </a:r>
             <a:endParaRPr/>
           </a:p>
         </p:txBody>
@@ -3464,7 +3546,9 @@
       <p:sp>
         <p:nvSpPr>
           <p:cNvPr id="37" name="Google Shape;37;p9"/>
-          <p:cNvSpPr txBox="1"/>
+          <p:cNvSpPr txBox="1">
+            <a:spLocks noGrp="1"/>
+          </p:cNvSpPr>
           <p:nvPr>
             <p:ph type="title"/>
           </p:nvPr>
@@ -3479,7 +3563,7 @@
           </a:prstGeom>
         </p:spPr>
         <p:txBody>
-          <a:bodyPr anchorCtr="0" anchor="b" bIns="91425" lIns="91425" spcFirstLastPara="1" rIns="91425" wrap="square" tIns="91425">
+          <a:bodyPr spcFirstLastPara="1" wrap="square" lIns="91425" tIns="91425" rIns="91425" bIns="91425" anchor="b" anchorCtr="0">
             <a:normAutofit/>
           </a:bodyPr>
           <a:lstStyle>
@@ -3583,15 +3667,19 @@
               <a:defRPr sz="4200"/>
             </a:lvl9pPr>
           </a:lstStyle>
-          <a:p/>
+          <a:p>
+            <a:endParaRPr/>
+          </a:p>
         </p:txBody>
       </p:sp>
       <p:sp>
         <p:nvSpPr>
           <p:cNvPr id="38" name="Google Shape;38;p9"/>
-          <p:cNvSpPr txBox="1"/>
+          <p:cNvSpPr txBox="1">
+            <a:spLocks noGrp="1"/>
+          </p:cNvSpPr>
           <p:nvPr>
-            <p:ph idx="1" type="subTitle"/>
+            <p:ph type="subTitle" idx="1"/>
           </p:nvPr>
         </p:nvSpPr>
         <p:spPr>
@@ -3604,7 +3692,7 @@
           </a:prstGeom>
         </p:spPr>
         <p:txBody>
-          <a:bodyPr anchorCtr="0" anchor="t" bIns="91425" lIns="91425" spcFirstLastPara="1" rIns="91425" wrap="square" tIns="91425">
+          <a:bodyPr spcFirstLastPara="1" wrap="square" lIns="91425" tIns="91425" rIns="91425" bIns="91425" anchor="t" anchorCtr="0">
             <a:normAutofit/>
           </a:bodyPr>
           <a:lstStyle>
@@ -3735,15 +3823,19 @@
               <a:defRPr sz="2100"/>
             </a:lvl9pPr>
           </a:lstStyle>
-          <a:p/>
+          <a:p>
+            <a:endParaRPr/>
+          </a:p>
         </p:txBody>
       </p:sp>
       <p:sp>
         <p:nvSpPr>
           <p:cNvPr id="39" name="Google Shape;39;p9"/>
-          <p:cNvSpPr txBox="1"/>
+          <p:cNvSpPr txBox="1">
+            <a:spLocks noGrp="1"/>
+          </p:cNvSpPr>
           <p:nvPr>
-            <p:ph idx="2" type="body"/>
+            <p:ph type="body" idx="2"/>
           </p:nvPr>
         </p:nvSpPr>
         <p:spPr>
@@ -3756,11 +3848,11 @@
           </a:prstGeom>
         </p:spPr>
         <p:txBody>
-          <a:bodyPr anchorCtr="0" anchor="ctr" bIns="91425" lIns="91425" spcFirstLastPara="1" rIns="91425" wrap="square" tIns="91425">
+          <a:bodyPr spcFirstLastPara="1" wrap="square" lIns="91425" tIns="91425" rIns="91425" bIns="91425" anchor="ctr" anchorCtr="0">
             <a:normAutofit/>
           </a:bodyPr>
           <a:lstStyle>
-            <a:lvl1pPr indent="-342900" lvl="0" marL="457200">
+            <a:lvl1pPr marL="457200" lvl="0" indent="-342900">
               <a:spcBef>
                 <a:spcPts val="0"/>
               </a:spcBef>
@@ -3771,7 +3863,7 @@
               <a:buChar char="●"/>
               <a:defRPr/>
             </a:lvl1pPr>
-            <a:lvl2pPr indent="-317500" lvl="1" marL="914400">
+            <a:lvl2pPr marL="914400" lvl="1" indent="-317500">
               <a:spcBef>
                 <a:spcPts val="0"/>
               </a:spcBef>
@@ -3782,7 +3874,7 @@
               <a:buChar char="○"/>
               <a:defRPr/>
             </a:lvl2pPr>
-            <a:lvl3pPr indent="-317500" lvl="2" marL="1371600">
+            <a:lvl3pPr marL="1371600" lvl="2" indent="-317500">
               <a:spcBef>
                 <a:spcPts val="0"/>
               </a:spcBef>
@@ -3793,7 +3885,7 @@
               <a:buChar char="■"/>
               <a:defRPr/>
             </a:lvl3pPr>
-            <a:lvl4pPr indent="-317500" lvl="3" marL="1828800">
+            <a:lvl4pPr marL="1828800" lvl="3" indent="-317500">
               <a:spcBef>
                 <a:spcPts val="0"/>
               </a:spcBef>
@@ -3804,7 +3896,7 @@
               <a:buChar char="●"/>
               <a:defRPr/>
             </a:lvl4pPr>
-            <a:lvl5pPr indent="-317500" lvl="4" marL="2286000">
+            <a:lvl5pPr marL="2286000" lvl="4" indent="-317500">
               <a:spcBef>
                 <a:spcPts val="0"/>
               </a:spcBef>
@@ -3815,7 +3907,7 @@
               <a:buChar char="○"/>
               <a:defRPr/>
             </a:lvl5pPr>
-            <a:lvl6pPr indent="-317500" lvl="5" marL="2743200">
+            <a:lvl6pPr marL="2743200" lvl="5" indent="-317500">
               <a:spcBef>
                 <a:spcPts val="0"/>
               </a:spcBef>
@@ -3826,7 +3918,7 @@
               <a:buChar char="■"/>
               <a:defRPr/>
             </a:lvl6pPr>
-            <a:lvl7pPr indent="-317500" lvl="6" marL="3200400">
+            <a:lvl7pPr marL="3200400" lvl="6" indent="-317500">
               <a:spcBef>
                 <a:spcPts val="0"/>
               </a:spcBef>
@@ -3837,7 +3929,7 @@
               <a:buChar char="●"/>
               <a:defRPr/>
             </a:lvl7pPr>
-            <a:lvl8pPr indent="-317500" lvl="7" marL="3657600">
+            <a:lvl8pPr marL="3657600" lvl="7" indent="-317500">
               <a:spcBef>
                 <a:spcPts val="0"/>
               </a:spcBef>
@@ -3848,7 +3940,7 @@
               <a:buChar char="○"/>
               <a:defRPr/>
             </a:lvl8pPr>
-            <a:lvl9pPr indent="-317500" lvl="8" marL="4114800">
+            <a:lvl9pPr marL="4114800" lvl="8" indent="-317500">
               <a:spcBef>
                 <a:spcPts val="0"/>
               </a:spcBef>
@@ -3860,15 +3952,19 @@
               <a:defRPr/>
             </a:lvl9pPr>
           </a:lstStyle>
-          <a:p/>
+          <a:p>
+            <a:endParaRPr/>
+          </a:p>
         </p:txBody>
       </p:sp>
       <p:sp>
         <p:nvSpPr>
           <p:cNvPr id="40" name="Google Shape;40;p9"/>
-          <p:cNvSpPr txBox="1"/>
+          <p:cNvSpPr txBox="1">
+            <a:spLocks noGrp="1"/>
+          </p:cNvSpPr>
           <p:nvPr>
-            <p:ph idx="12" type="sldNum"/>
+            <p:ph type="sldNum" idx="12"/>
           </p:nvPr>
         </p:nvSpPr>
         <p:spPr>
@@ -3881,7 +3977,7 @@
           </a:prstGeom>
         </p:spPr>
         <p:txBody>
-          <a:bodyPr anchorCtr="0" anchor="ctr" bIns="91425" lIns="91425" spcFirstLastPara="1" rIns="91425" wrap="square" tIns="91425">
+          <a:bodyPr spcFirstLastPara="1" wrap="square" lIns="91425" tIns="91425" rIns="91425" bIns="91425" anchor="ctr" anchorCtr="0">
             <a:normAutofit/>
           </a:bodyPr>
           <a:lstStyle>
@@ -3923,7 +4019,7 @@
             </a:lvl9pPr>
           </a:lstStyle>
           <a:p>
-            <a:pPr indent="0" lvl="0" marL="0" rtl="0" algn="r">
+            <a:pPr marL="0" lvl="0" indent="0" algn="r" rtl="0">
               <a:spcBef>
                 <a:spcPts val="0"/>
               </a:spcBef>
@@ -3949,11 +4045,11 @@
 </file>
 
 <file path=ppt/slideLayouts/slideLayout9.xml><?xml version="1.0" encoding="utf-8"?>
-<p:sldLayout xmlns:a="http://schemas.openxmlformats.org/drawingml/2006/main" xmlns:r="http://schemas.openxmlformats.org/officeDocument/2006/relationships" xmlns:mc="http://schemas.openxmlformats.org/markup-compatibility/2006" xmlns:mv="urn:schemas-microsoft-com:mac:vml" xmlns:p="http://schemas.openxmlformats.org/presentationml/2006/main" xmlns:c="http://schemas.openxmlformats.org/drawingml/2006/chart" xmlns:dgm="http://schemas.openxmlformats.org/drawingml/2006/diagram" xmlns:o="urn:schemas-microsoft-com:office:office" xmlns:v="urn:schemas-microsoft-com:vml" xmlns:pvml="urn:schemas-microsoft-com:office:powerpoint" xmlns:com="http://schemas.openxmlformats.org/drawingml/2006/compatibility" xmlns:p14="http://schemas.microsoft.com/office/powerpoint/2010/main" xmlns:p15="http://schemas.microsoft.com/office/powerpoint/2012/main" xmlns:ahyp="http://schemas.microsoft.com/office/drawing/2018/hyperlinkcolor" matchingName="Caption">
+<p:sldLayout xmlns:a="http://schemas.openxmlformats.org/drawingml/2006/main" xmlns:r="http://schemas.openxmlformats.org/officeDocument/2006/relationships" xmlns:p="http://schemas.openxmlformats.org/presentationml/2006/main" matchingName="Caption">
   <p:cSld name="CAPTION_ONLY">
     <p:spTree>
       <p:nvGrpSpPr>
-        <p:cNvPr id="41" name="Shape 41"/>
+        <p:cNvPr id="1" name="Shape 41"/>
         <p:cNvGrpSpPr/>
         <p:nvPr/>
       </p:nvGrpSpPr>
@@ -3968,9 +4064,11 @@
       <p:sp>
         <p:nvSpPr>
           <p:cNvPr id="42" name="Google Shape;42;p10"/>
-          <p:cNvSpPr txBox="1"/>
+          <p:cNvSpPr txBox="1">
+            <a:spLocks noGrp="1"/>
+          </p:cNvSpPr>
           <p:nvPr>
-            <p:ph idx="1" type="body"/>
+            <p:ph type="body" idx="1"/>
           </p:nvPr>
         </p:nvSpPr>
         <p:spPr>
@@ -3983,11 +4081,11 @@
           </a:prstGeom>
         </p:spPr>
         <p:txBody>
-          <a:bodyPr anchorCtr="0" anchor="ctr" bIns="91425" lIns="91425" spcFirstLastPara="1" rIns="91425" wrap="square" tIns="91425">
+          <a:bodyPr spcFirstLastPara="1" wrap="square" lIns="91425" tIns="91425" rIns="91425" bIns="91425" anchor="ctr" anchorCtr="0">
             <a:normAutofit/>
           </a:bodyPr>
           <a:lstStyle>
-            <a:lvl1pPr indent="-228600" lvl="0" marL="457200">
+            <a:lvl1pPr marL="457200" lvl="0" indent="-228600">
               <a:lnSpc>
                 <a:spcPct val="100000"/>
               </a:lnSpc>
@@ -4002,15 +4100,19 @@
               <a:defRPr/>
             </a:lvl1pPr>
           </a:lstStyle>
-          <a:p/>
+          <a:p>
+            <a:endParaRPr/>
+          </a:p>
         </p:txBody>
       </p:sp>
       <p:sp>
         <p:nvSpPr>
           <p:cNvPr id="43" name="Google Shape;43;p10"/>
-          <p:cNvSpPr txBox="1"/>
+          <p:cNvSpPr txBox="1">
+            <a:spLocks noGrp="1"/>
+          </p:cNvSpPr>
           <p:nvPr>
-            <p:ph idx="12" type="sldNum"/>
+            <p:ph type="sldNum" idx="12"/>
           </p:nvPr>
         </p:nvSpPr>
         <p:spPr>
@@ -4023,7 +4125,7 @@
           </a:prstGeom>
         </p:spPr>
         <p:txBody>
-          <a:bodyPr anchorCtr="0" anchor="ctr" bIns="91425" lIns="91425" spcFirstLastPara="1" rIns="91425" wrap="square" tIns="91425">
+          <a:bodyPr spcFirstLastPara="1" wrap="square" lIns="91425" tIns="91425" rIns="91425" bIns="91425" anchor="ctr" anchorCtr="0">
             <a:normAutofit/>
           </a:bodyPr>
           <a:lstStyle>
@@ -4065,7 +4167,7 @@
             </a:lvl9pPr>
           </a:lstStyle>
           <a:p>
-            <a:pPr indent="0" lvl="0" marL="0" rtl="0" algn="r">
+            <a:pPr marL="0" lvl="0" indent="0" algn="r" rtl="0">
               <a:spcBef>
                 <a:spcPts val="0"/>
               </a:spcBef>
@@ -4091,18 +4193,19 @@
 </file>
 
 <file path=ppt/slideMasters/slideMaster1.xml><?xml version="1.0" encoding="utf-8"?>
-<p:sldMaster xmlns:a="http://schemas.openxmlformats.org/drawingml/2006/main" xmlns:r="http://schemas.openxmlformats.org/officeDocument/2006/relationships" xmlns:mc="http://schemas.openxmlformats.org/markup-compatibility/2006" xmlns:mv="urn:schemas-microsoft-com:mac:vml" xmlns:p="http://schemas.openxmlformats.org/presentationml/2006/main" xmlns:c="http://schemas.openxmlformats.org/drawingml/2006/chart" xmlns:dgm="http://schemas.openxmlformats.org/drawingml/2006/diagram" xmlns:o="urn:schemas-microsoft-com:office:office" xmlns:v="urn:schemas-microsoft-com:vml" xmlns:pvml="urn:schemas-microsoft-com:office:powerpoint" xmlns:com="http://schemas.openxmlformats.org/drawingml/2006/compatibility" xmlns:p14="http://schemas.microsoft.com/office/powerpoint/2010/main" xmlns:p15="http://schemas.microsoft.com/office/powerpoint/2012/main" xmlns:ahyp="http://schemas.microsoft.com/office/drawing/2018/hyperlinkcolor">
+<p:sldMaster xmlns:a="http://schemas.openxmlformats.org/drawingml/2006/main" xmlns:r="http://schemas.openxmlformats.org/officeDocument/2006/relationships" xmlns:p="http://schemas.openxmlformats.org/presentationml/2006/main">
   <p:cSld name="simple-light-2">
     <p:bg>
       <p:bgPr>
         <a:solidFill>
           <a:schemeClr val="lt1"/>
         </a:solidFill>
+        <a:effectLst/>
       </p:bgPr>
     </p:bg>
     <p:spTree>
       <p:nvGrpSpPr>
-        <p:cNvPr id="5" name="Shape 5"/>
+        <p:cNvPr id="1" name="Shape 5"/>
         <p:cNvGrpSpPr/>
         <p:nvPr/>
       </p:nvGrpSpPr>
@@ -4117,7 +4220,9 @@
       <p:sp>
         <p:nvSpPr>
           <p:cNvPr id="6" name="Google Shape;6;p1"/>
-          <p:cNvSpPr txBox="1"/>
+          <p:cNvSpPr txBox="1">
+            <a:spLocks noGrp="1"/>
+          </p:cNvSpPr>
           <p:nvPr>
             <p:ph type="title"/>
           </p:nvPr>
@@ -4136,7 +4241,7 @@
           </a:ln>
         </p:spPr>
         <p:txBody>
-          <a:bodyPr anchorCtr="0" anchor="t" bIns="91425" lIns="91425" spcFirstLastPara="1" rIns="91425" wrap="square" tIns="91425">
+          <a:bodyPr spcFirstLastPara="1" wrap="square" lIns="91425" tIns="91425" rIns="91425" bIns="91425" anchor="t" anchorCtr="0">
             <a:normAutofit/>
           </a:bodyPr>
           <a:lstStyle>
@@ -4303,15 +4408,19 @@
               </a:defRPr>
             </a:lvl9pPr>
           </a:lstStyle>
-          <a:p/>
+          <a:p>
+            <a:endParaRPr/>
+          </a:p>
         </p:txBody>
       </p:sp>
       <p:sp>
         <p:nvSpPr>
           <p:cNvPr id="7" name="Google Shape;7;p1"/>
-          <p:cNvSpPr txBox="1"/>
+          <p:cNvSpPr txBox="1">
+            <a:spLocks noGrp="1"/>
+          </p:cNvSpPr>
           <p:nvPr>
-            <p:ph idx="1" type="body"/>
+            <p:ph type="body" idx="1"/>
           </p:nvPr>
         </p:nvSpPr>
         <p:spPr>
@@ -4328,11 +4437,11 @@
           </a:ln>
         </p:spPr>
         <p:txBody>
-          <a:bodyPr anchorCtr="0" anchor="t" bIns="91425" lIns="91425" spcFirstLastPara="1" rIns="91425" wrap="square" tIns="91425">
+          <a:bodyPr spcFirstLastPara="1" wrap="square" lIns="91425" tIns="91425" rIns="91425" bIns="91425" anchor="t" anchorCtr="0">
             <a:normAutofit/>
           </a:bodyPr>
           <a:lstStyle>
-            <a:lvl1pPr indent="-342900" lvl="0" marL="457200">
+            <a:lvl1pPr marL="457200" lvl="0" indent="-342900">
               <a:lnSpc>
                 <a:spcPct val="115000"/>
               </a:lnSpc>
@@ -4353,7 +4462,7 @@
                 </a:solidFill>
               </a:defRPr>
             </a:lvl1pPr>
-            <a:lvl2pPr indent="-317500" lvl="1" marL="914400">
+            <a:lvl2pPr marL="914400" lvl="1" indent="-317500">
               <a:lnSpc>
                 <a:spcPct val="115000"/>
               </a:lnSpc>
@@ -4374,7 +4483,7 @@
                 </a:solidFill>
               </a:defRPr>
             </a:lvl2pPr>
-            <a:lvl3pPr indent="-317500" lvl="2" marL="1371600">
+            <a:lvl3pPr marL="1371600" lvl="2" indent="-317500">
               <a:lnSpc>
                 <a:spcPct val="115000"/>
               </a:lnSpc>
@@ -4395,7 +4504,7 @@
                 </a:solidFill>
               </a:defRPr>
             </a:lvl3pPr>
-            <a:lvl4pPr indent="-317500" lvl="3" marL="1828800">
+            <a:lvl4pPr marL="1828800" lvl="3" indent="-317500">
               <a:lnSpc>
                 <a:spcPct val="115000"/>
               </a:lnSpc>
@@ -4416,7 +4525,7 @@
                 </a:solidFill>
               </a:defRPr>
             </a:lvl4pPr>
-            <a:lvl5pPr indent="-317500" lvl="4" marL="2286000">
+            <a:lvl5pPr marL="2286000" lvl="4" indent="-317500">
               <a:lnSpc>
                 <a:spcPct val="115000"/>
               </a:lnSpc>
@@ -4437,7 +4546,7 @@
                 </a:solidFill>
               </a:defRPr>
             </a:lvl5pPr>
-            <a:lvl6pPr indent="-317500" lvl="5" marL="2743200">
+            <a:lvl6pPr marL="2743200" lvl="5" indent="-317500">
               <a:lnSpc>
                 <a:spcPct val="115000"/>
               </a:lnSpc>
@@ -4458,7 +4567,7 @@
                 </a:solidFill>
               </a:defRPr>
             </a:lvl6pPr>
-            <a:lvl7pPr indent="-317500" lvl="6" marL="3200400">
+            <a:lvl7pPr marL="3200400" lvl="6" indent="-317500">
               <a:lnSpc>
                 <a:spcPct val="115000"/>
               </a:lnSpc>
@@ -4479,7 +4588,7 @@
                 </a:solidFill>
               </a:defRPr>
             </a:lvl7pPr>
-            <a:lvl8pPr indent="-317500" lvl="7" marL="3657600">
+            <a:lvl8pPr marL="3657600" lvl="7" indent="-317500">
               <a:lnSpc>
                 <a:spcPct val="115000"/>
               </a:lnSpc>
@@ -4500,7 +4609,7 @@
                 </a:solidFill>
               </a:defRPr>
             </a:lvl8pPr>
-            <a:lvl9pPr indent="-317500" lvl="8" marL="4114800">
+            <a:lvl9pPr marL="4114800" lvl="8" indent="-317500">
               <a:lnSpc>
                 <a:spcPct val="115000"/>
               </a:lnSpc>
@@ -4522,15 +4631,19 @@
               </a:defRPr>
             </a:lvl9pPr>
           </a:lstStyle>
-          <a:p/>
+          <a:p>
+            <a:endParaRPr/>
+          </a:p>
         </p:txBody>
       </p:sp>
       <p:sp>
         <p:nvSpPr>
           <p:cNvPr id="8" name="Google Shape;8;p1"/>
-          <p:cNvSpPr txBox="1"/>
+          <p:cNvSpPr txBox="1">
+            <a:spLocks noGrp="1"/>
+          </p:cNvSpPr>
           <p:nvPr>
-            <p:ph idx="12" type="sldNum"/>
+            <p:ph type="sldNum" idx="12"/>
           </p:nvPr>
         </p:nvSpPr>
         <p:spPr>
@@ -4547,7 +4660,7 @@
           </a:ln>
         </p:spPr>
         <p:txBody>
-          <a:bodyPr anchorCtr="0" anchor="ctr" bIns="91425" lIns="91425" spcFirstLastPara="1" rIns="91425" wrap="square" tIns="91425">
+          <a:bodyPr spcFirstLastPara="1" wrap="square" lIns="91425" tIns="91425" rIns="91425" bIns="91425" anchor="ctr" anchorCtr="0">
             <a:normAutofit/>
           </a:bodyPr>
           <a:lstStyle>
@@ -4625,7 +4738,7 @@
             </a:lvl9pPr>
           </a:lstStyle>
           <a:p>
-            <a:pPr indent="0" lvl="0" marL="0" rtl="0" algn="r">
+            <a:pPr marL="0" lvl="0" indent="0" algn="r" rtl="0">
               <a:spcBef>
                 <a:spcPts val="0"/>
               </a:spcBef>
@@ -4644,7 +4757,7 @@
       </p:sp>
     </p:spTree>
   </p:cSld>
-  <p:clrMap accent1="accent1" accent2="accent2" accent3="accent3" accent4="accent4" accent5="accent5" accent6="accent6" bg1="lt1" bg2="dk2" tx1="dk1" tx2="lt2" folHlink="folHlink" hlink="hlink"/>
+  <p:clrMap bg1="lt1" tx1="dk1" bg2="dk2" tx2="lt2" accent1="accent1" accent2="accent2" accent3="accent3" accent4="accent4" accent5="accent5" accent6="accent6" hlink="hlink" folHlink="folHlink"/>
   <p:sldLayoutIdLst>
     <p:sldLayoutId id="2147483648" r:id="rId1"/>
     <p:sldLayoutId id="2147483649" r:id="rId2"/>
@@ -4658,10 +4771,10 @@
     <p:sldLayoutId id="2147483657" r:id="rId10"/>
     <p:sldLayoutId id="2147483658" r:id="rId11"/>
   </p:sldLayoutIdLst>
-  <p:hf dt="0" ftr="0" hdr="0" sldNum="0"/>
+  <p:hf sldNum="0" hdr="0" ftr="0" dt="0"/>
   <p:txStyles>
     <p:titleStyle>
-      <a:defPPr lvl="0" marR="0" rtl="0" algn="l">
+      <a:defPPr marR="0" lvl="0" algn="l" rtl="0">
         <a:lnSpc>
           <a:spcPct val="100000"/>
         </a:lnSpc>
@@ -4672,7 +4785,7 @@
           <a:spcPts val="0"/>
         </a:spcAft>
       </a:defPPr>
-      <a:lvl1pPr lvl="0" marR="0" rtl="0" algn="l">
+      <a:lvl1pPr marR="0" lvl="0" algn="l" rtl="0">
         <a:lnSpc>
           <a:spcPct val="100000"/>
         </a:lnSpc>
@@ -4686,7 +4799,7 @@
           <a:srgbClr val="000000"/>
         </a:buClr>
         <a:buFont typeface="Arial"/>
-        <a:defRPr b="0" i="0" sz="1400" u="none" cap="none" strike="noStrike">
+        <a:defRPr sz="1400" b="0" i="0" u="none" strike="noStrike" cap="none">
           <a:solidFill>
             <a:srgbClr val="000000"/>
           </a:solidFill>
@@ -4696,7 +4809,7 @@
           <a:sym typeface="Arial"/>
         </a:defRPr>
       </a:lvl1pPr>
-      <a:lvl2pPr lvl="1" marR="0" rtl="0" algn="l">
+      <a:lvl2pPr marR="0" lvl="1" algn="l" rtl="0">
         <a:lnSpc>
           <a:spcPct val="100000"/>
         </a:lnSpc>
@@ -4710,7 +4823,7 @@
           <a:srgbClr val="000000"/>
         </a:buClr>
         <a:buFont typeface="Arial"/>
-        <a:defRPr b="0" i="0" sz="1400" u="none" cap="none" strike="noStrike">
+        <a:defRPr sz="1400" b="0" i="0" u="none" strike="noStrike" cap="none">
           <a:solidFill>
             <a:srgbClr val="000000"/>
           </a:solidFill>
@@ -4720,7 +4833,7 @@
           <a:sym typeface="Arial"/>
         </a:defRPr>
       </a:lvl2pPr>
-      <a:lvl3pPr lvl="2" marR="0" rtl="0" algn="l">
+      <a:lvl3pPr marR="0" lvl="2" algn="l" rtl="0">
         <a:lnSpc>
           <a:spcPct val="100000"/>
         </a:lnSpc>
@@ -4734,7 +4847,7 @@
           <a:srgbClr val="000000"/>
         </a:buClr>
         <a:buFont typeface="Arial"/>
-        <a:defRPr b="0" i="0" sz="1400" u="none" cap="none" strike="noStrike">
+        <a:defRPr sz="1400" b="0" i="0" u="none" strike="noStrike" cap="none">
           <a:solidFill>
             <a:srgbClr val="000000"/>
           </a:solidFill>
@@ -4744,7 +4857,7 @@
           <a:sym typeface="Arial"/>
         </a:defRPr>
       </a:lvl3pPr>
-      <a:lvl4pPr lvl="3" marR="0" rtl="0" algn="l">
+      <a:lvl4pPr marR="0" lvl="3" algn="l" rtl="0">
         <a:lnSpc>
           <a:spcPct val="100000"/>
         </a:lnSpc>
@@ -4758,7 +4871,7 @@
           <a:srgbClr val="000000"/>
         </a:buClr>
         <a:buFont typeface="Arial"/>
-        <a:defRPr b="0" i="0" sz="1400" u="none" cap="none" strike="noStrike">
+        <a:defRPr sz="1400" b="0" i="0" u="none" strike="noStrike" cap="none">
           <a:solidFill>
             <a:srgbClr val="000000"/>
           </a:solidFill>
@@ -4768,7 +4881,7 @@
           <a:sym typeface="Arial"/>
         </a:defRPr>
       </a:lvl4pPr>
-      <a:lvl5pPr lvl="4" marR="0" rtl="0" algn="l">
+      <a:lvl5pPr marR="0" lvl="4" algn="l" rtl="0">
         <a:lnSpc>
           <a:spcPct val="100000"/>
         </a:lnSpc>
@@ -4782,7 +4895,7 @@
           <a:srgbClr val="000000"/>
         </a:buClr>
         <a:buFont typeface="Arial"/>
-        <a:defRPr b="0" i="0" sz="1400" u="none" cap="none" strike="noStrike">
+        <a:defRPr sz="1400" b="0" i="0" u="none" strike="noStrike" cap="none">
           <a:solidFill>
             <a:srgbClr val="000000"/>
           </a:solidFill>
@@ -4792,7 +4905,7 @@
           <a:sym typeface="Arial"/>
         </a:defRPr>
       </a:lvl5pPr>
-      <a:lvl6pPr lvl="5" marR="0" rtl="0" algn="l">
+      <a:lvl6pPr marR="0" lvl="5" algn="l" rtl="0">
         <a:lnSpc>
           <a:spcPct val="100000"/>
         </a:lnSpc>
@@ -4806,7 +4919,7 @@
           <a:srgbClr val="000000"/>
         </a:buClr>
         <a:buFont typeface="Arial"/>
-        <a:defRPr b="0" i="0" sz="1400" u="none" cap="none" strike="noStrike">
+        <a:defRPr sz="1400" b="0" i="0" u="none" strike="noStrike" cap="none">
           <a:solidFill>
             <a:srgbClr val="000000"/>
           </a:solidFill>
@@ -4816,7 +4929,7 @@
           <a:sym typeface="Arial"/>
         </a:defRPr>
       </a:lvl6pPr>
-      <a:lvl7pPr lvl="6" marR="0" rtl="0" algn="l">
+      <a:lvl7pPr marR="0" lvl="6" algn="l" rtl="0">
         <a:lnSpc>
           <a:spcPct val="100000"/>
         </a:lnSpc>
@@ -4830,7 +4943,7 @@
           <a:srgbClr val="000000"/>
         </a:buClr>
         <a:buFont typeface="Arial"/>
-        <a:defRPr b="0" i="0" sz="1400" u="none" cap="none" strike="noStrike">
+        <a:defRPr sz="1400" b="0" i="0" u="none" strike="noStrike" cap="none">
           <a:solidFill>
             <a:srgbClr val="000000"/>
           </a:solidFill>
@@ -4840,7 +4953,7 @@
           <a:sym typeface="Arial"/>
         </a:defRPr>
       </a:lvl7pPr>
-      <a:lvl8pPr lvl="7" marR="0" rtl="0" algn="l">
+      <a:lvl8pPr marR="0" lvl="7" algn="l" rtl="0">
         <a:lnSpc>
           <a:spcPct val="100000"/>
         </a:lnSpc>
@@ -4854,7 +4967,7 @@
           <a:srgbClr val="000000"/>
         </a:buClr>
         <a:buFont typeface="Arial"/>
-        <a:defRPr b="0" i="0" sz="1400" u="none" cap="none" strike="noStrike">
+        <a:defRPr sz="1400" b="0" i="0" u="none" strike="noStrike" cap="none">
           <a:solidFill>
             <a:srgbClr val="000000"/>
           </a:solidFill>
@@ -4864,7 +4977,7 @@
           <a:sym typeface="Arial"/>
         </a:defRPr>
       </a:lvl8pPr>
-      <a:lvl9pPr lvl="8" marR="0" rtl="0" algn="l">
+      <a:lvl9pPr marR="0" lvl="8" algn="l" rtl="0">
         <a:lnSpc>
           <a:spcPct val="100000"/>
         </a:lnSpc>
@@ -4878,7 +4991,7 @@
           <a:srgbClr val="000000"/>
         </a:buClr>
         <a:buFont typeface="Arial"/>
-        <a:defRPr b="0" i="0" sz="1400" u="none" cap="none" strike="noStrike">
+        <a:defRPr sz="1400" b="0" i="0" u="none" strike="noStrike" cap="none">
           <a:solidFill>
             <a:srgbClr val="000000"/>
           </a:solidFill>
@@ -4890,7 +5003,7 @@
       </a:lvl9pPr>
     </p:titleStyle>
     <p:bodyStyle>
-      <a:defPPr lvl="0" marR="0" rtl="0" algn="l">
+      <a:defPPr marR="0" lvl="0" algn="l" rtl="0">
         <a:lnSpc>
           <a:spcPct val="100000"/>
         </a:lnSpc>
@@ -4901,7 +5014,7 @@
           <a:spcPts val="0"/>
         </a:spcAft>
       </a:defPPr>
-      <a:lvl1pPr lvl="0" marR="0" rtl="0" algn="l">
+      <a:lvl1pPr marR="0" lvl="0" algn="l" rtl="0">
         <a:lnSpc>
           <a:spcPct val="100000"/>
         </a:lnSpc>
@@ -4915,7 +5028,7 @@
           <a:srgbClr val="000000"/>
         </a:buClr>
         <a:buFont typeface="Arial"/>
-        <a:defRPr b="0" i="0" sz="1400" u="none" cap="none" strike="noStrike">
+        <a:defRPr sz="1400" b="0" i="0" u="none" strike="noStrike" cap="none">
           <a:solidFill>
             <a:srgbClr val="000000"/>
           </a:solidFill>
@@ -4925,7 +5038,7 @@
           <a:sym typeface="Arial"/>
         </a:defRPr>
       </a:lvl1pPr>
-      <a:lvl2pPr lvl="1" marR="0" rtl="0" algn="l">
+      <a:lvl2pPr marR="0" lvl="1" algn="l" rtl="0">
         <a:lnSpc>
           <a:spcPct val="100000"/>
         </a:lnSpc>
@@ -4939,7 +5052,7 @@
           <a:srgbClr val="000000"/>
         </a:buClr>
         <a:buFont typeface="Arial"/>
-        <a:defRPr b="0" i="0" sz="1400" u="none" cap="none" strike="noStrike">
+        <a:defRPr sz="1400" b="0" i="0" u="none" strike="noStrike" cap="none">
           <a:solidFill>
             <a:srgbClr val="000000"/>
           </a:solidFill>
@@ -4949,7 +5062,7 @@
           <a:sym typeface="Arial"/>
         </a:defRPr>
       </a:lvl2pPr>
-      <a:lvl3pPr lvl="2" marR="0" rtl="0" algn="l">
+      <a:lvl3pPr marR="0" lvl="2" algn="l" rtl="0">
         <a:lnSpc>
           <a:spcPct val="100000"/>
         </a:lnSpc>
@@ -4963,7 +5076,7 @@
           <a:srgbClr val="000000"/>
         </a:buClr>
         <a:buFont typeface="Arial"/>
-        <a:defRPr b="0" i="0" sz="1400" u="none" cap="none" strike="noStrike">
+        <a:defRPr sz="1400" b="0" i="0" u="none" strike="noStrike" cap="none">
           <a:solidFill>
             <a:srgbClr val="000000"/>
           </a:solidFill>
@@ -4973,7 +5086,7 @@
           <a:sym typeface="Arial"/>
         </a:defRPr>
       </a:lvl3pPr>
-      <a:lvl4pPr lvl="3" marR="0" rtl="0" algn="l">
+      <a:lvl4pPr marR="0" lvl="3" algn="l" rtl="0">
         <a:lnSpc>
           <a:spcPct val="100000"/>
         </a:lnSpc>
@@ -4987,7 +5100,7 @@
           <a:srgbClr val="000000"/>
         </a:buClr>
         <a:buFont typeface="Arial"/>
-        <a:defRPr b="0" i="0" sz="1400" u="none" cap="none" strike="noStrike">
+        <a:defRPr sz="1400" b="0" i="0" u="none" strike="noStrike" cap="none">
           <a:solidFill>
             <a:srgbClr val="000000"/>
           </a:solidFill>
@@ -4997,7 +5110,7 @@
           <a:sym typeface="Arial"/>
         </a:defRPr>
       </a:lvl4pPr>
-      <a:lvl5pPr lvl="4" marR="0" rtl="0" algn="l">
+      <a:lvl5pPr marR="0" lvl="4" algn="l" rtl="0">
         <a:lnSpc>
           <a:spcPct val="100000"/>
         </a:lnSpc>
@@ -5011,7 +5124,7 @@
           <a:srgbClr val="000000"/>
         </a:buClr>
         <a:buFont typeface="Arial"/>
-        <a:defRPr b="0" i="0" sz="1400" u="none" cap="none" strike="noStrike">
+        <a:defRPr sz="1400" b="0" i="0" u="none" strike="noStrike" cap="none">
           <a:solidFill>
             <a:srgbClr val="000000"/>
           </a:solidFill>
@@ -5021,7 +5134,7 @@
           <a:sym typeface="Arial"/>
         </a:defRPr>
       </a:lvl5pPr>
-      <a:lvl6pPr lvl="5" marR="0" rtl="0" algn="l">
+      <a:lvl6pPr marR="0" lvl="5" algn="l" rtl="0">
         <a:lnSpc>
           <a:spcPct val="100000"/>
         </a:lnSpc>
@@ -5035,7 +5148,7 @@
           <a:srgbClr val="000000"/>
         </a:buClr>
         <a:buFont typeface="Arial"/>
-        <a:defRPr b="0" i="0" sz="1400" u="none" cap="none" strike="noStrike">
+        <a:defRPr sz="1400" b="0" i="0" u="none" strike="noStrike" cap="none">
           <a:solidFill>
             <a:srgbClr val="000000"/>
           </a:solidFill>
@@ -5045,7 +5158,7 @@
           <a:sym typeface="Arial"/>
         </a:defRPr>
       </a:lvl6pPr>
-      <a:lvl7pPr lvl="6" marR="0" rtl="0" algn="l">
+      <a:lvl7pPr marR="0" lvl="6" algn="l" rtl="0">
         <a:lnSpc>
           <a:spcPct val="100000"/>
         </a:lnSpc>
@@ -5059,7 +5172,7 @@
           <a:srgbClr val="000000"/>
         </a:buClr>
         <a:buFont typeface="Arial"/>
-        <a:defRPr b="0" i="0" sz="1400" u="none" cap="none" strike="noStrike">
+        <a:defRPr sz="1400" b="0" i="0" u="none" strike="noStrike" cap="none">
           <a:solidFill>
             <a:srgbClr val="000000"/>
           </a:solidFill>
@@ -5069,7 +5182,7 @@
           <a:sym typeface="Arial"/>
         </a:defRPr>
       </a:lvl7pPr>
-      <a:lvl8pPr lvl="7" marR="0" rtl="0" algn="l">
+      <a:lvl8pPr marR="0" lvl="7" algn="l" rtl="0">
         <a:lnSpc>
           <a:spcPct val="100000"/>
         </a:lnSpc>
@@ -5083,7 +5196,7 @@
           <a:srgbClr val="000000"/>
         </a:buClr>
         <a:buFont typeface="Arial"/>
-        <a:defRPr b="0" i="0" sz="1400" u="none" cap="none" strike="noStrike">
+        <a:defRPr sz="1400" b="0" i="0" u="none" strike="noStrike" cap="none">
           <a:solidFill>
             <a:srgbClr val="000000"/>
           </a:solidFill>
@@ -5093,7 +5206,7 @@
           <a:sym typeface="Arial"/>
         </a:defRPr>
       </a:lvl8pPr>
-      <a:lvl9pPr lvl="8" marR="0" rtl="0" algn="l">
+      <a:lvl9pPr marR="0" lvl="8" algn="l" rtl="0">
         <a:lnSpc>
           <a:spcPct val="100000"/>
         </a:lnSpc>
@@ -5107,7 +5220,7 @@
           <a:srgbClr val="000000"/>
         </a:buClr>
         <a:buFont typeface="Arial"/>
-        <a:defRPr b="0" i="0" sz="1400" u="none" cap="none" strike="noStrike">
+        <a:defRPr sz="1400" b="0" i="0" u="none" strike="noStrike" cap="none">
           <a:solidFill>
             <a:srgbClr val="000000"/>
           </a:solidFill>
@@ -5119,7 +5232,7 @@
       </a:lvl9pPr>
     </p:bodyStyle>
     <p:otherStyle>
-      <a:defPPr lvl="0" marR="0" rtl="0" algn="l">
+      <a:defPPr marR="0" lvl="0" algn="l" rtl="0">
         <a:lnSpc>
           <a:spcPct val="100000"/>
         </a:lnSpc>
@@ -5130,7 +5243,7 @@
           <a:spcPts val="0"/>
         </a:spcAft>
       </a:defPPr>
-      <a:lvl1pPr lvl="0" marR="0" rtl="0" algn="l">
+      <a:lvl1pPr marR="0" lvl="0" algn="l" rtl="0">
         <a:lnSpc>
           <a:spcPct val="100000"/>
         </a:lnSpc>
@@ -5144,7 +5257,7 @@
           <a:srgbClr val="000000"/>
         </a:buClr>
         <a:buFont typeface="Arial"/>
-        <a:defRPr b="0" i="0" sz="1400" u="none" cap="none" strike="noStrike">
+        <a:defRPr sz="1400" b="0" i="0" u="none" strike="noStrike" cap="none">
           <a:solidFill>
             <a:srgbClr val="000000"/>
           </a:solidFill>
@@ -5154,7 +5267,7 @@
           <a:sym typeface="Arial"/>
         </a:defRPr>
       </a:lvl1pPr>
-      <a:lvl2pPr lvl="1" marR="0" rtl="0" algn="l">
+      <a:lvl2pPr marR="0" lvl="1" algn="l" rtl="0">
         <a:lnSpc>
           <a:spcPct val="100000"/>
         </a:lnSpc>
@@ -5168,7 +5281,7 @@
           <a:srgbClr val="000000"/>
         </a:buClr>
         <a:buFont typeface="Arial"/>
-        <a:defRPr b="0" i="0" sz="1400" u="none" cap="none" strike="noStrike">
+        <a:defRPr sz="1400" b="0" i="0" u="none" strike="noStrike" cap="none">
           <a:solidFill>
             <a:srgbClr val="000000"/>
           </a:solidFill>
@@ -5178,7 +5291,7 @@
           <a:sym typeface="Arial"/>
         </a:defRPr>
       </a:lvl2pPr>
-      <a:lvl3pPr lvl="2" marR="0" rtl="0" algn="l">
+      <a:lvl3pPr marR="0" lvl="2" algn="l" rtl="0">
         <a:lnSpc>
           <a:spcPct val="100000"/>
         </a:lnSpc>
@@ -5192,7 +5305,7 @@
           <a:srgbClr val="000000"/>
         </a:buClr>
         <a:buFont typeface="Arial"/>
-        <a:defRPr b="0" i="0" sz="1400" u="none" cap="none" strike="noStrike">
+        <a:defRPr sz="1400" b="0" i="0" u="none" strike="noStrike" cap="none">
           <a:solidFill>
             <a:srgbClr val="000000"/>
           </a:solidFill>
@@ -5202,7 +5315,7 @@
           <a:sym typeface="Arial"/>
         </a:defRPr>
       </a:lvl3pPr>
-      <a:lvl4pPr lvl="3" marR="0" rtl="0" algn="l">
+      <a:lvl4pPr marR="0" lvl="3" algn="l" rtl="0">
         <a:lnSpc>
           <a:spcPct val="100000"/>
         </a:lnSpc>
@@ -5216,7 +5329,7 @@
           <a:srgbClr val="000000"/>
         </a:buClr>
         <a:buFont typeface="Arial"/>
-        <a:defRPr b="0" i="0" sz="1400" u="none" cap="none" strike="noStrike">
+        <a:defRPr sz="1400" b="0" i="0" u="none" strike="noStrike" cap="none">
           <a:solidFill>
             <a:srgbClr val="000000"/>
           </a:solidFill>
@@ -5226,7 +5339,7 @@
           <a:sym typeface="Arial"/>
         </a:defRPr>
       </a:lvl4pPr>
-      <a:lvl5pPr lvl="4" marR="0" rtl="0" algn="l">
+      <a:lvl5pPr marR="0" lvl="4" algn="l" rtl="0">
         <a:lnSpc>
           <a:spcPct val="100000"/>
         </a:lnSpc>
@@ -5240,7 +5353,7 @@
           <a:srgbClr val="000000"/>
         </a:buClr>
         <a:buFont typeface="Arial"/>
-        <a:defRPr b="0" i="0" sz="1400" u="none" cap="none" strike="noStrike">
+        <a:defRPr sz="1400" b="0" i="0" u="none" strike="noStrike" cap="none">
           <a:solidFill>
             <a:srgbClr val="000000"/>
           </a:solidFill>
@@ -5250,7 +5363,7 @@
           <a:sym typeface="Arial"/>
         </a:defRPr>
       </a:lvl5pPr>
-      <a:lvl6pPr lvl="5" marR="0" rtl="0" algn="l">
+      <a:lvl6pPr marR="0" lvl="5" algn="l" rtl="0">
         <a:lnSpc>
           <a:spcPct val="100000"/>
         </a:lnSpc>
@@ -5264,7 +5377,7 @@
           <a:srgbClr val="000000"/>
         </a:buClr>
         <a:buFont typeface="Arial"/>
-        <a:defRPr b="0" i="0" sz="1400" u="none" cap="none" strike="noStrike">
+        <a:defRPr sz="1400" b="0" i="0" u="none" strike="noStrike" cap="none">
           <a:solidFill>
             <a:srgbClr val="000000"/>
           </a:solidFill>
@@ -5274,7 +5387,7 @@
           <a:sym typeface="Arial"/>
         </a:defRPr>
       </a:lvl6pPr>
-      <a:lvl7pPr lvl="6" marR="0" rtl="0" algn="l">
+      <a:lvl7pPr marR="0" lvl="6" algn="l" rtl="0">
         <a:lnSpc>
           <a:spcPct val="100000"/>
         </a:lnSpc>
@@ -5288,7 +5401,7 @@
           <a:srgbClr val="000000"/>
         </a:buClr>
         <a:buFont typeface="Arial"/>
-        <a:defRPr b="0" i="0" sz="1400" u="none" cap="none" strike="noStrike">
+        <a:defRPr sz="1400" b="0" i="0" u="none" strike="noStrike" cap="none">
           <a:solidFill>
             <a:srgbClr val="000000"/>
           </a:solidFill>
@@ -5298,7 +5411,7 @@
           <a:sym typeface="Arial"/>
         </a:defRPr>
       </a:lvl7pPr>
-      <a:lvl8pPr lvl="7" marR="0" rtl="0" algn="l">
+      <a:lvl8pPr marR="0" lvl="7" algn="l" rtl="0">
         <a:lnSpc>
           <a:spcPct val="100000"/>
         </a:lnSpc>
@@ -5312,7 +5425,7 @@
           <a:srgbClr val="000000"/>
         </a:buClr>
         <a:buFont typeface="Arial"/>
-        <a:defRPr b="0" i="0" sz="1400" u="none" cap="none" strike="noStrike">
+        <a:defRPr sz="1400" b="0" i="0" u="none" strike="noStrike" cap="none">
           <a:solidFill>
             <a:srgbClr val="000000"/>
           </a:solidFill>
@@ -5322,7 +5435,7 @@
           <a:sym typeface="Arial"/>
         </a:defRPr>
       </a:lvl8pPr>
-      <a:lvl9pPr lvl="8" marR="0" rtl="0" algn="l">
+      <a:lvl9pPr marR="0" lvl="8" algn="l" rtl="0">
         <a:lnSpc>
           <a:spcPct val="100000"/>
         </a:lnSpc>
@@ -5336,7 +5449,7 @@
           <a:srgbClr val="000000"/>
         </a:buClr>
         <a:buFont typeface="Arial"/>
-        <a:defRPr b="0" i="0" sz="1400" u="none" cap="none" strike="noStrike">
+        <a:defRPr sz="1400" b="0" i="0" u="none" strike="noStrike" cap="none">
           <a:solidFill>
             <a:srgbClr val="000000"/>
           </a:solidFill>
@@ -5352,7 +5465,7 @@
 </file>
 
 <file path=ppt/slides/slide1.xml><?xml version="1.0" encoding="utf-8"?>
-<p:sld xmlns:a="http://schemas.openxmlformats.org/drawingml/2006/main" xmlns:p="http://schemas.openxmlformats.org/presentationml/2006/main" xmlns:r="http://schemas.openxmlformats.org/officeDocument/2006/relationships">
+<p:sld xmlns:a="http://schemas.openxmlformats.org/drawingml/2006/main" xmlns:r="http://schemas.openxmlformats.org/officeDocument/2006/relationships" xmlns:p="http://schemas.openxmlformats.org/presentationml/2006/main">
   <p:cSld>
     <p:spTree>
       <p:nvGrpSpPr>
@@ -5360,7 +5473,14 @@
         <p:cNvGrpSpPr/>
         <p:nvPr/>
       </p:nvGrpSpPr>
-      <p:grpSpPr/>
+      <p:grpSpPr>
+        <a:xfrm>
+          <a:off x="0" y="0"/>
+          <a:ext cx="0" cy="0"/>
+          <a:chOff x="0" y="0"/>
+          <a:chExt cx="0" cy="0"/>
+        </a:xfrm>
+      </p:grpSpPr>
       <p:sp>
         <p:nvSpPr>
           <p:cNvPr id="2" name="Title 1"/>
@@ -5398,17 +5518,27 @@
           <a:lstStyle/>
           <a:p>
             <a:r>
+              <a:rPr dirty="0"/>
               <a:t>Information Retrieval over Episodic Memory:</a:t>
             </a:r>
           </a:p>
           <a:p>
             <a:r>
-              <a:t>BM25, Dense, Hybrid, Field-Aware, Knowledge Graph, Cross-Encoder, and a Novel Graph-Augmented Reranker</a:t>
-            </a:r>
-          </a:p>
-          <a:p/>
-          <a:p>
-            <a:r>
+              <a:rPr dirty="0"/>
+              <a:t>BM25, Dense, Hybrid, Field-Aware, Knowledge Graph, Cross-Encoder, and a Novel Graph-Augmented </a:t>
+            </a:r>
+            <a:r>
+              <a:rPr dirty="0" err="1"/>
+              <a:t>Reranker</a:t>
+            </a:r>
+            <a:endParaRPr dirty="0"/>
+          </a:p>
+          <a:p>
+            <a:endParaRPr dirty="0"/>
+          </a:p>
+          <a:p>
+            <a:r>
+              <a:rPr dirty="0"/>
               <a:t>GROUP 8</a:t>
             </a:r>
           </a:p>
@@ -5423,7 +5553,7 @@
 </file>
 
 <file path=ppt/slides/slide10.xml><?xml version="1.0" encoding="utf-8"?>
-<p:sld xmlns:a="http://schemas.openxmlformats.org/drawingml/2006/main" xmlns:p="http://schemas.openxmlformats.org/presentationml/2006/main" xmlns:r="http://schemas.openxmlformats.org/officeDocument/2006/relationships">
+<p:sld xmlns:a="http://schemas.openxmlformats.org/drawingml/2006/main" xmlns:r="http://schemas.openxmlformats.org/officeDocument/2006/relationships" xmlns:p="http://schemas.openxmlformats.org/presentationml/2006/main">
   <p:cSld>
     <p:spTree>
       <p:nvGrpSpPr>
@@ -5431,7 +5561,14 @@
         <p:cNvGrpSpPr/>
         <p:nvPr/>
       </p:nvGrpSpPr>
-      <p:grpSpPr/>
+      <p:grpSpPr>
+        <a:xfrm>
+          <a:off x="0" y="0"/>
+          <a:ext cx="0" cy="0"/>
+          <a:chOff x="0" y="0"/>
+          <a:chExt cx="0" cy="0"/>
+        </a:xfrm>
+      </p:grpSpPr>
       <p:sp>
         <p:nvSpPr>
           <p:cNvPr id="2" name="Title 1"/>
@@ -5468,14 +5605,12 @@
           <a:bodyPr wrap="square"/>
           <a:lstStyle/>
           <a:p>
-            <a:pPr/>
             <a:r>
               <a:rPr b="1"/>
               <a:t>Two-stage retrieve-then-rerank pattern.</a:t>
             </a:r>
           </a:p>
           <a:p>
-            <a:pPr/>
             <a:r>
               <a:rPr b="1"/>
               <a:t>Stage 1 - cheap recall:</a:t>
@@ -5485,7 +5620,6 @@
             </a:r>
           </a:p>
           <a:p>
-            <a:pPr/>
             <a:r>
               <a:rPr b="1"/>
               <a:t>Stage 2 - expensive rerank:</a:t>
@@ -5495,7 +5629,6 @@
             </a:r>
           </a:p>
           <a:p>
-            <a:pPr/>
             <a:r>
               <a:rPr b="1"/>
               <a:t>Why it works:</a:t>
@@ -5505,7 +5638,6 @@
             </a:r>
           </a:p>
           <a:p>
-            <a:pPr/>
             <a:r>
               <a:rPr b="1"/>
               <a:t>Cost:</a:t>
@@ -5525,7 +5657,7 @@
 </file>
 
 <file path=ppt/slides/slide11.xml><?xml version="1.0" encoding="utf-8"?>
-<p:sld xmlns:a="http://schemas.openxmlformats.org/drawingml/2006/main" xmlns:p="http://schemas.openxmlformats.org/presentationml/2006/main" xmlns:r="http://schemas.openxmlformats.org/officeDocument/2006/relationships">
+<p:sld xmlns:a="http://schemas.openxmlformats.org/drawingml/2006/main" xmlns:r="http://schemas.openxmlformats.org/officeDocument/2006/relationships" xmlns:p="http://schemas.openxmlformats.org/presentationml/2006/main">
   <p:cSld>
     <p:spTree>
       <p:nvGrpSpPr>
@@ -5533,7 +5665,14 @@
         <p:cNvGrpSpPr/>
         <p:nvPr/>
       </p:nvGrpSpPr>
-      <p:grpSpPr/>
+      <p:grpSpPr>
+        <a:xfrm>
+          <a:off x="0" y="0"/>
+          <a:ext cx="0" cy="0"/>
+          <a:chOff x="0" y="0"/>
+          <a:chExt cx="0" cy="0"/>
+        </a:xfrm>
+      </p:grpSpPr>
       <p:sp>
         <p:nvSpPr>
           <p:cNvPr id="2" name="Title 1"/>
@@ -5550,7 +5689,156 @@
           <a:lstStyle/>
           <a:p>
             <a:r>
-              <a:t>Novel Method: Graph-Augmented Reranker (GAR)</a:t>
+              <a:rPr dirty="0"/>
+              <a:t>Novel Method: Graph-Augmented </a:t>
+            </a:r>
+            <a:r>
+              <a:rPr dirty="0" err="1"/>
+              <a:t>Reranker</a:t>
+            </a:r>
+            <a:r>
+              <a:rPr dirty="0"/>
+              <a:t> (GAR)</a:t>
+            </a:r>
+          </a:p>
+        </p:txBody>
+      </p:sp>
+      <p:sp>
+        <p:nvSpPr>
+          <p:cNvPr id="3" name="Text Placeholder 2"/>
+          <p:cNvSpPr>
+            <a:spLocks noGrp="1"/>
+          </p:cNvSpPr>
+          <p:nvPr>
+            <p:ph type="body" idx="1"/>
+          </p:nvPr>
+        </p:nvSpPr>
+        <p:spPr/>
+        <p:txBody>
+          <a:bodyPr wrap="square">
+            <a:normAutofit lnSpcReduction="10000"/>
+          </a:bodyPr>
+          <a:lstStyle/>
+          <a:p>
+            <a:r>
+              <a:rPr b="1" dirty="0"/>
+              <a:t>A 5-stage pipeline that fuses every signal type we built.</a:t>
+            </a:r>
+          </a:p>
+          <a:p>
+            <a:r>
+              <a:rPr b="1" dirty="0"/>
+              <a:t>Stage 1 - Reciprocal Rank Fusion</a:t>
+            </a:r>
+            <a:r>
+              <a:rPr dirty="0"/>
+              <a:t> over [</a:t>
+            </a:r>
+            <a:r>
+              <a:rPr dirty="0">
+                <a:solidFill>
+                  <a:srgbClr val="FF0000"/>
+                </a:solidFill>
+              </a:rPr>
+              <a:t>BM25</a:t>
+            </a:r>
+            <a:r>
+              <a:rPr dirty="0"/>
+              <a:t>, Dense, KG-PPR]. Combines diverse retrievers without needing comparable score scales.</a:t>
+            </a:r>
+          </a:p>
+          <a:p>
+            <a:r>
+              <a:rPr b="1" dirty="0"/>
+              <a:t>Stage 2 - Cross-encoder pairwise scoring</a:t>
+            </a:r>
+            <a:r>
+              <a:rPr dirty="0"/>
+              <a:t> of (query, </a:t>
+            </a:r>
+            <a:r>
+              <a:rPr dirty="0" err="1"/>
+              <a:t>full_doc</a:t>
+            </a:r>
+            <a:r>
+              <a:rPr dirty="0"/>
+              <a:t>) on the union pool. Strongest single relevance signal.</a:t>
+            </a:r>
+          </a:p>
+          <a:p>
+            <a:r>
+              <a:rPr b="1" dirty="0"/>
+              <a:t>Stage 3 - Graph features per candidate:</a:t>
+            </a:r>
+            <a:r>
+              <a:rPr dirty="0"/>
+              <a:t> PPR mass under the same query seeds (graph centrality) and query-vs-episode tool Jaccard (symbolic match).</a:t>
+            </a:r>
+          </a:p>
+          <a:p>
+            <a:r>
+              <a:rPr b="1" dirty="0"/>
+              <a:t>Stage 4 - Min-max normalized weighted fusion:</a:t>
+            </a:r>
+            <a:r>
+              <a:rPr dirty="0"/>
+              <a:t> 0.65 * CE + 0.20 * PPR + 0.10 * tool + 0.05 * RRF.</a:t>
+            </a:r>
+          </a:p>
+          <a:p>
+            <a:r>
+              <a:rPr b="1" dirty="0"/>
+              <a:t>Stage 5 - MMR diversification</a:t>
+            </a:r>
+            <a:r>
+              <a:rPr dirty="0"/>
+              <a:t> over dense embeddings (lambda=1.0 default = pure relevance; tunable for diverse top-k).</a:t>
+            </a:r>
+          </a:p>
+        </p:txBody>
+      </p:sp>
+    </p:spTree>
+  </p:cSld>
+  <p:clrMapOvr>
+    <a:masterClrMapping/>
+  </p:clrMapOvr>
+</p:sld>
+</file>
+
+<file path=ppt/slides/slide12.xml><?xml version="1.0" encoding="utf-8"?>
+<p:sld xmlns:a="http://schemas.openxmlformats.org/drawingml/2006/main" xmlns:r="http://schemas.openxmlformats.org/officeDocument/2006/relationships" xmlns:p="http://schemas.openxmlformats.org/presentationml/2006/main">
+  <p:cSld>
+    <p:spTree>
+      <p:nvGrpSpPr>
+        <p:cNvPr id="1" name=""/>
+        <p:cNvGrpSpPr/>
+        <p:nvPr/>
+      </p:nvGrpSpPr>
+      <p:grpSpPr>
+        <a:xfrm>
+          <a:off x="0" y="0"/>
+          <a:ext cx="0" cy="0"/>
+          <a:chOff x="0" y="0"/>
+          <a:chExt cx="0" cy="0"/>
+        </a:xfrm>
+      </p:grpSpPr>
+      <p:sp>
+        <p:nvSpPr>
+          <p:cNvPr id="2" name="Title 1"/>
+          <p:cNvSpPr>
+            <a:spLocks noGrp="1"/>
+          </p:cNvSpPr>
+          <p:nvPr>
+            <p:ph type="title"/>
+          </p:nvPr>
+        </p:nvSpPr>
+        <p:spPr/>
+        <p:txBody>
+          <a:bodyPr/>
+          <a:lstStyle/>
+          <a:p>
+            <a:r>
+              <a:t>Evaluation Mechanisms</a:t>
             </a:r>
           </a:p>
         </p:txBody>
@@ -5570,185 +5858,108 @@
           <a:bodyPr wrap="square"/>
           <a:lstStyle/>
           <a:p>
-            <a:pPr/>
-            <a:r>
-              <a:rPr b="1"/>
-              <a:t>A 5-stage pipeline that fuses every signal type we built.</a:t>
-            </a:r>
-          </a:p>
-          <a:p>
-            <a:pPr/>
-            <a:r>
-              <a:rPr b="1"/>
-              <a:t>Stage 1 - Reciprocal Rank Fusion</a:t>
-            </a:r>
-            <a:r>
-              <a:t> over [BM25, Dense, KG-PPR]. Combines diverse retrievers without needing comparable score scales.</a:t>
-            </a:r>
-          </a:p>
-          <a:p>
-            <a:pPr/>
-            <a:r>
-              <a:rPr b="1"/>
-              <a:t>Stage 2 - Cross-encoder pairwise scoring</a:t>
-            </a:r>
-            <a:r>
-              <a:t> of (query, full_doc) on the union pool. Strongest single relevance signal.</a:t>
-            </a:r>
-          </a:p>
-          <a:p>
-            <a:pPr/>
-            <a:r>
-              <a:rPr b="1"/>
-              <a:t>Stage 3 - Graph features per candidate:</a:t>
-            </a:r>
-            <a:r>
-              <a:t> PPR mass under the same query seeds (graph centrality) and query-vs-episode tool Jaccard (symbolic match).</a:t>
-            </a:r>
-          </a:p>
-          <a:p>
-            <a:pPr/>
-            <a:r>
-              <a:rPr b="1"/>
-              <a:t>Stage 4 - Min-max normalized weighted fusion:</a:t>
-            </a:r>
-            <a:r>
-              <a:t> 0.65 * CE + 0.20 * PPR + 0.10 * tool + 0.05 * RRF.</a:t>
-            </a:r>
-          </a:p>
-          <a:p>
-            <a:pPr/>
-            <a:r>
-              <a:rPr b="1"/>
-              <a:t>Stage 5 - MMR diversification</a:t>
-            </a:r>
-            <a:r>
-              <a:t> over dense embeddings (lambda=1.0 default = pure relevance; tunable for diverse top-k).</a:t>
-            </a:r>
-          </a:p>
-        </p:txBody>
-      </p:sp>
-    </p:spTree>
-  </p:cSld>
-  <p:clrMapOvr>
-    <a:masterClrMapping/>
-  </p:clrMapOvr>
-</p:sld>
-</file>
-
-<file path=ppt/slides/slide12.xml><?xml version="1.0" encoding="utf-8"?>
-<p:sld xmlns:a="http://schemas.openxmlformats.org/drawingml/2006/main" xmlns:p="http://schemas.openxmlformats.org/presentationml/2006/main" xmlns:r="http://schemas.openxmlformats.org/officeDocument/2006/relationships">
-  <p:cSld>
-    <p:spTree>
-      <p:nvGrpSpPr>
-        <p:cNvPr id="1" name=""/>
-        <p:cNvGrpSpPr/>
-        <p:nvPr/>
-      </p:nvGrpSpPr>
-      <p:grpSpPr/>
-      <p:sp>
-        <p:nvSpPr>
-          <p:cNvPr id="2" name="Title 1"/>
-          <p:cNvSpPr>
-            <a:spLocks noGrp="1"/>
-          </p:cNvSpPr>
-          <p:nvPr>
-            <p:ph type="title"/>
-          </p:nvPr>
-        </p:nvSpPr>
-        <p:spPr/>
-        <p:txBody>
-          <a:bodyPr/>
-          <a:lstStyle/>
-          <a:p>
-            <a:r>
-              <a:t>Evaluation Mechanisms</a:t>
-            </a:r>
-          </a:p>
-        </p:txBody>
-      </p:sp>
-      <p:sp>
-        <p:nvSpPr>
-          <p:cNvPr id="3" name="Text Placeholder 2"/>
-          <p:cNvSpPr>
-            <a:spLocks noGrp="1"/>
-          </p:cNvSpPr>
-          <p:nvPr>
-            <p:ph type="body" idx="1"/>
-          </p:nvPr>
-        </p:nvSpPr>
-        <p:spPr/>
-        <p:txBody>
-          <a:bodyPr wrap="square"/>
-          <a:lstStyle/>
-          <a:p>
-            <a:pPr/>
-            <a:r>
-              <a:rPr b="1"/>
+            <a:r>
+              <a:rPr b="1" dirty="0"/>
               <a:t>Held-out IR evaluation</a:t>
             </a:r>
           </a:p>
           <a:p>
             <a:pPr lvl="1"/>
             <a:r>
+              <a:rPr dirty="0"/>
               <a:t>10% held-out queries with seeded random split</a:t>
             </a:r>
           </a:p>
           <a:p>
             <a:pPr lvl="1"/>
             <a:r>
+              <a:rPr dirty="0"/>
               <a:t>Train-only indices (no leakage of held-out into BM25/FAISS/KG)</a:t>
             </a:r>
           </a:p>
           <a:p>
             <a:pPr lvl="1"/>
             <a:r>
+              <a:rPr dirty="0"/>
               <a:t>Graded relevance via tool-Jaccard with held-out gold tools: 2.0 if Jaccard&gt;=0.5, 1.0 if any overlap, 0.5 if same task type</a:t>
             </a:r>
           </a:p>
           <a:p>
-            <a:pPr/>
-            <a:r>
-              <a:rPr b="1"/>
+            <a:r>
+              <a:rPr b="1" dirty="0"/>
               <a:t>IR metrics</a:t>
             </a:r>
           </a:p>
           <a:p>
             <a:pPr lvl="1"/>
             <a:r>
-              <a:t>P@k, R@k, MRR, nDCG@k for k in {1, 3, 5, 10}</a:t>
+              <a:rPr dirty="0" err="1"/>
+              <a:t>P@k</a:t>
+            </a:r>
+            <a:r>
+              <a:rPr dirty="0"/>
+              <a:t>, </a:t>
+            </a:r>
+            <a:r>
+              <a:rPr dirty="0" err="1"/>
+              <a:t>R@k</a:t>
+            </a:r>
+            <a:r>
+              <a:rPr dirty="0"/>
+              <a:t>, MRR, </a:t>
+            </a:r>
+            <a:r>
+              <a:rPr dirty="0" err="1"/>
+              <a:t>nDCG@k</a:t>
+            </a:r>
+            <a:r>
+              <a:rPr dirty="0"/>
+              <a:t> for k in {1, 3, 5, 10}</a:t>
             </a:r>
           </a:p>
           <a:p>
             <a:pPr lvl="1"/>
             <a:r>
+              <a:rPr dirty="0"/>
               <a:t>P/R/MRR threshold = 2.0 (highly relevant only)</a:t>
             </a:r>
           </a:p>
           <a:p>
             <a:pPr lvl="1"/>
             <a:r>
-              <a:t>nDCG uses the full graded scale</a:t>
-            </a:r>
-          </a:p>
-          <a:p>
-            <a:pPr/>
-            <a:r>
-              <a:rPr b="1"/>
+              <a:rPr dirty="0" err="1"/>
+              <a:t>nDCG</a:t>
+            </a:r>
+            <a:r>
+              <a:rPr dirty="0"/>
+              <a:t> uses the full graded scale</a:t>
+            </a:r>
+          </a:p>
+          <a:p>
+            <a:r>
+              <a:rPr b="1" dirty="0"/>
               <a:t>Downstream metrics (simulated agent)</a:t>
             </a:r>
           </a:p>
           <a:p>
             <a:pPr lvl="1"/>
             <a:r>
-              <a:t>Task success rate, failure repetition rate, tool-distribution KL</a:t>
-            </a:r>
+              <a:rPr dirty="0"/>
+              <a:t>Task success rate, failure repetition rate</a:t>
+            </a:r>
+            <a:endParaRPr lang="en-IN" dirty="0"/>
           </a:p>
           <a:p>
             <a:pPr lvl="1"/>
             <a:r>
+              <a:rPr dirty="0"/>
               <a:t>Comparison vs. no-retrieval baseline</a:t>
             </a:r>
+            <a:r>
+              <a:rPr lang="en-IN" dirty="0"/>
+              <a:t> (0.2)</a:t>
+            </a:r>
+            <a:endParaRPr dirty="0"/>
           </a:p>
         </p:txBody>
       </p:sp>
@@ -5761,7 +5972,7 @@
 </file>
 
 <file path=ppt/slides/slide13.xml><?xml version="1.0" encoding="utf-8"?>
-<p:sld xmlns:a="http://schemas.openxmlformats.org/drawingml/2006/main" xmlns:p="http://schemas.openxmlformats.org/presentationml/2006/main" xmlns:r="http://schemas.openxmlformats.org/officeDocument/2006/relationships">
+<p:sld xmlns:a="http://schemas.openxmlformats.org/drawingml/2006/main" xmlns:r="http://schemas.openxmlformats.org/officeDocument/2006/relationships" xmlns:p="http://schemas.openxmlformats.org/presentationml/2006/main">
   <p:cSld>
     <p:spTree>
       <p:nvGrpSpPr>
@@ -5769,7 +5980,14 @@
         <p:cNvGrpSpPr/>
         <p:nvPr/>
       </p:nvGrpSpPr>
-      <p:grpSpPr/>
+      <p:grpSpPr>
+        <a:xfrm>
+          <a:off x="0" y="0"/>
+          <a:ext cx="0" cy="0"/>
+          <a:chOff x="0" y="0"/>
+          <a:chExt cx="0" cy="0"/>
+        </a:xfrm>
+      </p:grpSpPr>
       <p:sp>
         <p:nvSpPr>
           <p:cNvPr id="2" name="Title 1"/>
@@ -5826,11 +6044,17 @@
           <p:cNvGraphicFramePr>
             <a:graphicFrameLocks noGrp="1"/>
           </p:cNvGraphicFramePr>
-          <p:nvPr/>
+          <p:nvPr>
+            <p:extLst>
+              <p:ext uri="{D42A27DB-BD31-4B8C-83A1-F6EECF244321}">
+                <p14:modId xmlns:p14="http://schemas.microsoft.com/office/powerpoint/2010/main" val="2214225913"/>
+              </p:ext>
+            </p:extLst>
+          </p:nvPr>
         </p:nvGraphicFramePr>
         <p:xfrm>
           <a:off x="365760" y="1325880"/>
-          <a:ext cx="8412480" cy="2880360"/>
+          <a:ext cx="8071662" cy="2880360"/>
         </p:xfrm>
         <a:graphic>
           <a:graphicData uri="http://schemas.openxmlformats.org/drawingml/2006/table">
@@ -5839,11 +6063,48 @@
                 <a:tableStyleId>{5C22544A-7EE6-4342-B048-85BDC9FD1C3A}</a:tableStyleId>
               </a:tblPr>
               <a:tblGrid>
-                <a:gridCol w="1682496"/>
-                <a:gridCol w="1682496"/>
-                <a:gridCol w="1682496"/>
-                <a:gridCol w="1682496"/>
-                <a:gridCol w="1682496"/>
+                <a:gridCol w="1449185">
+                  <a:extLst>
+                    <a:ext uri="{9D8B030D-6E8A-4147-A177-3AD203B41FA5}">
+                      <a16:colId xmlns:a16="http://schemas.microsoft.com/office/drawing/2014/main" val="20000"/>
+                    </a:ext>
+                  </a:extLst>
+                </a:gridCol>
+                <a:gridCol w="1241369">
+                  <a:extLst>
+                    <a:ext uri="{9D8B030D-6E8A-4147-A177-3AD203B41FA5}">
+                      <a16:colId xmlns:a16="http://schemas.microsoft.com/office/drawing/2014/main" val="20001"/>
+                    </a:ext>
+                  </a:extLst>
+                </a:gridCol>
+                <a:gridCol w="1345277">
+                  <a:extLst>
+                    <a:ext uri="{9D8B030D-6E8A-4147-A177-3AD203B41FA5}">
+                      <a16:colId xmlns:a16="http://schemas.microsoft.com/office/drawing/2014/main" val="20002"/>
+                    </a:ext>
+                  </a:extLst>
+                </a:gridCol>
+                <a:gridCol w="1345277">
+                  <a:extLst>
+                    <a:ext uri="{9D8B030D-6E8A-4147-A177-3AD203B41FA5}">
+                      <a16:colId xmlns:a16="http://schemas.microsoft.com/office/drawing/2014/main" val="20003"/>
+                    </a:ext>
+                  </a:extLst>
+                </a:gridCol>
+                <a:gridCol w="1345277">
+                  <a:extLst>
+                    <a:ext uri="{9D8B030D-6E8A-4147-A177-3AD203B41FA5}">
+                      <a16:colId xmlns:a16="http://schemas.microsoft.com/office/drawing/2014/main" val="20004"/>
+                    </a:ext>
+                  </a:extLst>
+                </a:gridCol>
+                <a:gridCol w="1345277">
+                  <a:extLst>
+                    <a:ext uri="{9D8B030D-6E8A-4147-A177-3AD203B41FA5}">
+                      <a16:colId xmlns:a16="http://schemas.microsoft.com/office/drawing/2014/main" val="2920974630"/>
+                    </a:ext>
+                  </a:extLst>
+                </a:gridCol>
               </a:tblGrid>
               <a:tr h="320040">
                 <a:tc>
@@ -5853,7 +6114,7 @@
                     <a:p>
                       <a:pPr algn="ctr"/>
                       <a:r>
-                        <a:rPr b="1" sz="1100">
+                        <a:rPr sz="1100" b="1" dirty="0">
                           <a:solidFill>
                             <a:srgbClr val="FFFFFF"/>
                           </a:solidFill>
@@ -5875,7 +6136,7 @@
                     <a:p>
                       <a:pPr algn="ctr"/>
                       <a:r>
-                        <a:rPr b="1" sz="1100">
+                        <a:rPr sz="1100" b="1" dirty="0">
                           <a:solidFill>
                             <a:srgbClr val="FFFFFF"/>
                           </a:solidFill>
@@ -5897,7 +6158,7 @@
                     <a:p>
                       <a:pPr algn="ctr"/>
                       <a:r>
-                        <a:rPr b="1" sz="1100">
+                        <a:rPr sz="1100" b="1">
                           <a:solidFill>
                             <a:srgbClr val="FFFFFF"/>
                           </a:solidFill>
@@ -5919,7 +6180,7 @@
                     <a:p>
                       <a:pPr algn="ctr"/>
                       <a:r>
-                        <a:rPr b="1" sz="1100">
+                        <a:rPr sz="1100" b="1">
                           <a:solidFill>
                             <a:srgbClr val="FFFFFF"/>
                           </a:solidFill>
@@ -5941,7 +6202,7 @@
                     <a:p>
                       <a:pPr algn="ctr"/>
                       <a:r>
-                        <a:rPr b="1" sz="1100">
+                        <a:rPr sz="1100" b="1" dirty="0">
                           <a:solidFill>
                             <a:srgbClr val="FFFFFF"/>
                           </a:solidFill>
@@ -5956,6 +6217,33 @@
                     </a:solidFill>
                   </a:tcPr>
                 </a:tc>
+                <a:tc>
+                  <a:txBody>
+                    <a:bodyPr/>
+                    <a:lstStyle/>
+                    <a:p>
+                      <a:pPr algn="ctr"/>
+                      <a:r>
+                        <a:rPr lang="en-IN" sz="1100" b="1" dirty="0">
+                          <a:solidFill>
+                            <a:srgbClr val="FFFFFF"/>
+                          </a:solidFill>
+                        </a:rPr>
+                        <a:t>Task Success </a:t>
+                      </a:r>
+                    </a:p>
+                  </a:txBody>
+                  <a:tcPr>
+                    <a:solidFill>
+                      <a:srgbClr val="2E4E8C"/>
+                    </a:solidFill>
+                  </a:tcPr>
+                </a:tc>
+                <a:extLst>
+                  <a:ext uri="{0D108BD9-81ED-4DB2-BD59-A6C34878D82A}">
+                    <a16:rowId xmlns:a16="http://schemas.microsoft.com/office/drawing/2014/main" val="10000"/>
+                  </a:ext>
+                </a:extLst>
               </a:tr>
               <a:tr h="320040">
                 <a:tc>
@@ -5965,7 +6253,7 @@
                     <a:p>
                       <a:pPr algn="l"/>
                       <a:r>
-                        <a:rPr sz="1100"/>
+                        <a:rPr sz="1100" dirty="0"/>
                         <a:t>BM25</a:t>
                       </a:r>
                     </a:p>
@@ -6028,6 +6316,25 @@
                   </a:txBody>
                   <a:tcPr/>
                 </a:tc>
+                <a:tc>
+                  <a:txBody>
+                    <a:bodyPr/>
+                    <a:lstStyle/>
+                    <a:p>
+                      <a:pPr algn="ctr"/>
+                      <a:r>
+                        <a:rPr lang="en-IN" sz="1100" dirty="0"/>
+                        <a:t>0.3</a:t>
+                      </a:r>
+                    </a:p>
+                  </a:txBody>
+                  <a:tcPr/>
+                </a:tc>
+                <a:extLst>
+                  <a:ext uri="{0D108BD9-81ED-4DB2-BD59-A6C34878D82A}">
+                    <a16:rowId xmlns:a16="http://schemas.microsoft.com/office/drawing/2014/main" val="10001"/>
+                  </a:ext>
+                </a:extLst>
               </a:tr>
               <a:tr h="320040">
                 <a:tc>
@@ -6037,7 +6344,7 @@
                     <a:p>
                       <a:pPr algn="l"/>
                       <a:r>
-                        <a:rPr sz="1100"/>
+                        <a:rPr sz="1100" dirty="0"/>
                         <a:t>Dense (state)</a:t>
                       </a:r>
                     </a:p>
@@ -6100,6 +6407,26 @@
                   </a:txBody>
                   <a:tcPr/>
                 </a:tc>
+                <a:tc>
+                  <a:txBody>
+                    <a:bodyPr/>
+                    <a:lstStyle/>
+                    <a:p>
+                      <a:pPr algn="ctr"/>
+                      <a:r>
+                        <a:rPr lang="en-IN" sz="1100" dirty="0"/>
+                        <a:t>0.4</a:t>
+                      </a:r>
+                      <a:endParaRPr sz="1100" dirty="0"/>
+                    </a:p>
+                  </a:txBody>
+                  <a:tcPr/>
+                </a:tc>
+                <a:extLst>
+                  <a:ext uri="{0D108BD9-81ED-4DB2-BD59-A6C34878D82A}">
+                    <a16:rowId xmlns:a16="http://schemas.microsoft.com/office/drawing/2014/main" val="10002"/>
+                  </a:ext>
+                </a:extLst>
               </a:tr>
               <a:tr h="320040">
                 <a:tc>
@@ -6109,8 +6436,16 @@
                     <a:p>
                       <a:pPr algn="l"/>
                       <a:r>
-                        <a:rPr sz="1100"/>
-                        <a:t>Dense (state+plan)</a:t>
+                        <a:rPr sz="1100" dirty="0"/>
+                        <a:t>Dense (</a:t>
+                      </a:r>
+                      <a:r>
+                        <a:rPr sz="1100" dirty="0" err="1"/>
+                        <a:t>state+plan</a:t>
+                      </a:r>
+                      <a:r>
+                        <a:rPr sz="1100" dirty="0"/>
+                        <a:t>)</a:t>
                       </a:r>
                     </a:p>
                   </a:txBody>
@@ -6172,6 +6507,26 @@
                   </a:txBody>
                   <a:tcPr/>
                 </a:tc>
+                <a:tc>
+                  <a:txBody>
+                    <a:bodyPr/>
+                    <a:lstStyle/>
+                    <a:p>
+                      <a:pPr algn="ctr"/>
+                      <a:r>
+                        <a:rPr lang="en-IN" sz="1100" dirty="0"/>
+                        <a:t>0.4</a:t>
+                      </a:r>
+                      <a:endParaRPr sz="1100" dirty="0"/>
+                    </a:p>
+                  </a:txBody>
+                  <a:tcPr/>
+                </a:tc>
+                <a:extLst>
+                  <a:ext uri="{0D108BD9-81ED-4DB2-BD59-A6C34878D82A}">
+                    <a16:rowId xmlns:a16="http://schemas.microsoft.com/office/drawing/2014/main" val="10003"/>
+                  </a:ext>
+                </a:extLst>
               </a:tr>
               <a:tr h="320040">
                 <a:tc>
@@ -6181,7 +6536,7 @@
                     <a:p>
                       <a:pPr algn="l"/>
                       <a:r>
-                        <a:rPr sz="1100"/>
+                        <a:rPr sz="1100" dirty="0"/>
                         <a:t>Hybrid (alpha=0.5)</a:t>
                       </a:r>
                     </a:p>
@@ -6244,6 +6599,26 @@
                   </a:txBody>
                   <a:tcPr/>
                 </a:tc>
+                <a:tc>
+                  <a:txBody>
+                    <a:bodyPr/>
+                    <a:lstStyle/>
+                    <a:p>
+                      <a:pPr algn="ctr"/>
+                      <a:r>
+                        <a:rPr lang="en-IN" sz="1100" dirty="0"/>
+                        <a:t>0.4</a:t>
+                      </a:r>
+                      <a:endParaRPr sz="1100" dirty="0"/>
+                    </a:p>
+                  </a:txBody>
+                  <a:tcPr/>
+                </a:tc>
+                <a:extLst>
+                  <a:ext uri="{0D108BD9-81ED-4DB2-BD59-A6C34878D82A}">
+                    <a16:rowId xmlns:a16="http://schemas.microsoft.com/office/drawing/2014/main" val="10004"/>
+                  </a:ext>
+                </a:extLst>
               </a:tr>
               <a:tr h="320040">
                 <a:tc>
@@ -6253,7 +6628,7 @@
                     <a:p>
                       <a:pPr algn="l"/>
                       <a:r>
-                        <a:rPr sz="1100"/>
+                        <a:rPr sz="1100" dirty="0"/>
                         <a:t>Field-aware</a:t>
                       </a:r>
                     </a:p>
@@ -6316,6 +6691,26 @@
                   </a:txBody>
                   <a:tcPr/>
                 </a:tc>
+                <a:tc>
+                  <a:txBody>
+                    <a:bodyPr/>
+                    <a:lstStyle/>
+                    <a:p>
+                      <a:pPr algn="ctr"/>
+                      <a:r>
+                        <a:rPr lang="en-IN" sz="1100" dirty="0"/>
+                        <a:t>0.4 – 0.5</a:t>
+                      </a:r>
+                      <a:endParaRPr sz="1100" dirty="0"/>
+                    </a:p>
+                  </a:txBody>
+                  <a:tcPr/>
+                </a:tc>
+                <a:extLst>
+                  <a:ext uri="{0D108BD9-81ED-4DB2-BD59-A6C34878D82A}">
+                    <a16:rowId xmlns:a16="http://schemas.microsoft.com/office/drawing/2014/main" val="10005"/>
+                  </a:ext>
+                </a:extLst>
               </a:tr>
               <a:tr h="320040">
                 <a:tc>
@@ -6325,7 +6720,7 @@
                     <a:p>
                       <a:pPr algn="l"/>
                       <a:r>
-                        <a:rPr sz="1100"/>
+                        <a:rPr sz="1100" dirty="0"/>
                         <a:t>KG-PPR</a:t>
                       </a:r>
                     </a:p>
@@ -6388,6 +6783,26 @@
                   </a:txBody>
                   <a:tcPr/>
                 </a:tc>
+                <a:tc>
+                  <a:txBody>
+                    <a:bodyPr/>
+                    <a:lstStyle/>
+                    <a:p>
+                      <a:pPr algn="ctr"/>
+                      <a:r>
+                        <a:rPr lang="en-IN" sz="1100" dirty="0"/>
+                        <a:t>0.5</a:t>
+                      </a:r>
+                      <a:endParaRPr sz="1100" dirty="0"/>
+                    </a:p>
+                  </a:txBody>
+                  <a:tcPr/>
+                </a:tc>
+                <a:extLst>
+                  <a:ext uri="{0D108BD9-81ED-4DB2-BD59-A6C34878D82A}">
+                    <a16:rowId xmlns:a16="http://schemas.microsoft.com/office/drawing/2014/main" val="10006"/>
+                  </a:ext>
+                </a:extLst>
               </a:tr>
               <a:tr h="320040">
                 <a:tc>
@@ -6460,6 +6875,26 @@
                   </a:txBody>
                   <a:tcPr/>
                 </a:tc>
+                <a:tc>
+                  <a:txBody>
+                    <a:bodyPr/>
+                    <a:lstStyle/>
+                    <a:p>
+                      <a:pPr algn="ctr"/>
+                      <a:r>
+                        <a:rPr lang="en-IN" sz="1100" dirty="0"/>
+                        <a:t>0.5</a:t>
+                      </a:r>
+                      <a:endParaRPr sz="1100" dirty="0"/>
+                    </a:p>
+                  </a:txBody>
+                  <a:tcPr/>
+                </a:tc>
+                <a:extLst>
+                  <a:ext uri="{0D108BD9-81ED-4DB2-BD59-A6C34878D82A}">
+                    <a16:rowId xmlns:a16="http://schemas.microsoft.com/office/drawing/2014/main" val="10007"/>
+                  </a:ext>
+                </a:extLst>
               </a:tr>
               <a:tr h="320040">
                 <a:tc>
@@ -6505,7 +6940,7 @@
                     <a:p>
                       <a:pPr algn="ctr"/>
                       <a:r>
-                        <a:rPr sz="1100" b="1"/>
+                        <a:rPr sz="1100" b="1" dirty="0"/>
                         <a:t>0.061</a:t>
                       </a:r>
                     </a:p>
@@ -6541,7 +6976,7 @@
                     <a:p>
                       <a:pPr algn="ctr"/>
                       <a:r>
-                        <a:rPr sz="1100" b="1"/>
+                        <a:rPr sz="1100" b="1" dirty="0"/>
                         <a:t>0.411</a:t>
                       </a:r>
                     </a:p>
@@ -6552,6 +6987,30 @@
                     </a:solidFill>
                   </a:tcPr>
                 </a:tc>
+                <a:tc>
+                  <a:txBody>
+                    <a:bodyPr/>
+                    <a:lstStyle/>
+                    <a:p>
+                      <a:pPr algn="ctr"/>
+                      <a:r>
+                        <a:rPr lang="en-IN" sz="1100" b="1" dirty="0"/>
+                        <a:t>0.8</a:t>
+                      </a:r>
+                      <a:endParaRPr sz="1100" b="1" dirty="0"/>
+                    </a:p>
+                  </a:txBody>
+                  <a:tcPr>
+                    <a:solidFill>
+                      <a:srgbClr val="FFF4CC"/>
+                    </a:solidFill>
+                  </a:tcPr>
+                </a:tc>
+                <a:extLst>
+                  <a:ext uri="{0D108BD9-81ED-4DB2-BD59-A6C34878D82A}">
+                    <a16:rowId xmlns:a16="http://schemas.microsoft.com/office/drawing/2014/main" val="10008"/>
+                  </a:ext>
+                </a:extLst>
               </a:tr>
             </a:tbl>
           </a:graphicData>
@@ -6566,7 +7025,7 @@
 </file>
 
 <file path=ppt/slides/slide14.xml><?xml version="1.0" encoding="utf-8"?>
-<p:sld xmlns:a="http://schemas.openxmlformats.org/drawingml/2006/main" xmlns:p="http://schemas.openxmlformats.org/presentationml/2006/main" xmlns:r="http://schemas.openxmlformats.org/officeDocument/2006/relationships">
+<p:sld xmlns:a="http://schemas.openxmlformats.org/drawingml/2006/main" xmlns:r="http://schemas.openxmlformats.org/officeDocument/2006/relationships" xmlns:p="http://schemas.openxmlformats.org/presentationml/2006/main">
   <p:cSld>
     <p:spTree>
       <p:nvGrpSpPr>
@@ -6574,7 +7033,14 @@
         <p:cNvGrpSpPr/>
         <p:nvPr/>
       </p:nvGrpSpPr>
-      <p:grpSpPr/>
+      <p:grpSpPr>
+        <a:xfrm>
+          <a:off x="0" y="0"/>
+          <a:ext cx="0" cy="0"/>
+          <a:chOff x="0" y="0"/>
+          <a:chExt cx="0" cy="0"/>
+        </a:xfrm>
+      </p:grpSpPr>
       <p:sp>
         <p:nvSpPr>
           <p:cNvPr id="2" name="Title 1"/>
@@ -6591,6 +7057,7 @@
           <a:lstStyle/>
           <a:p>
             <a:r>
+              <a:rPr dirty="0"/>
               <a:t>Results: Why GAR Wins</a:t>
             </a:r>
           </a:p>
@@ -6611,76 +7078,112 @@
           <a:bodyPr wrap="square"/>
           <a:lstStyle/>
           <a:p>
-            <a:pPr/>
-            <a:r>
-              <a:rPr b="1"/>
+            <a:r>
+              <a:rPr b="1" dirty="0"/>
               <a:t>GAR is the only method in the top tier on every metric.</a:t>
             </a:r>
           </a:p>
           <a:p>
-            <a:pPr/>
-            <a:r>
+            <a:r>
+              <a:rPr dirty="0"/>
               <a:t>Other methods each excel in one dimension but trade off others:</a:t>
             </a:r>
           </a:p>
           <a:p>
             <a:pPr lvl="1"/>
             <a:r>
+              <a:rPr dirty="0"/>
               <a:t>BM25 - strong P@5 (sharp lexical hits) but weakest MRR (no semantics)</a:t>
             </a:r>
           </a:p>
           <a:p>
             <a:pPr lvl="1"/>
             <a:r>
+              <a:rPr dirty="0"/>
               <a:t>Dense bi-encoder - good MRR but loses to BM25 on P@5 (paraphrase-only)</a:t>
             </a:r>
           </a:p>
           <a:p>
             <a:pPr lvl="1"/>
             <a:r>
+              <a:rPr dirty="0"/>
               <a:t>Hybrid - balances lexical and semantic but no structural signal</a:t>
             </a:r>
           </a:p>
           <a:p>
             <a:pPr lvl="1"/>
             <a:r>
-              <a:t>KG-PPR - second-best nDCG via multi-hop walks but weak top-1 ranking</a:t>
+              <a:rPr dirty="0"/>
+              <a:t>KG-PPR - second-best </a:t>
+            </a:r>
+            <a:r>
+              <a:rPr dirty="0" err="1"/>
+              <a:t>nDCG</a:t>
+            </a:r>
+            <a:r>
+              <a:rPr dirty="0"/>
+              <a:t> via multi-hop walks but weak top-1 ranking</a:t>
             </a:r>
           </a:p>
           <a:p>
             <a:pPr lvl="1"/>
             <a:r>
-              <a:t>CE-rerank - very strong on MRR / nDCG but a single-signal reranker</a:t>
-            </a:r>
-          </a:p>
-          <a:p>
-            <a:pPr/>
-            <a:r>
-              <a:rPr b="1"/>
+              <a:rPr dirty="0"/>
+              <a:t>CE-</a:t>
+            </a:r>
+            <a:r>
+              <a:rPr dirty="0" err="1"/>
+              <a:t>rerank</a:t>
+            </a:r>
+            <a:r>
+              <a:rPr dirty="0"/>
+              <a:t> - very strong on MRR / </a:t>
+            </a:r>
+            <a:r>
+              <a:rPr dirty="0" err="1"/>
+              <a:t>nDCG</a:t>
+            </a:r>
+            <a:r>
+              <a:rPr dirty="0"/>
+              <a:t> but a single-signal </a:t>
+            </a:r>
+            <a:r>
+              <a:rPr dirty="0" err="1"/>
+              <a:t>reranker</a:t>
+            </a:r>
+            <a:endParaRPr dirty="0"/>
+          </a:p>
+          <a:p>
+            <a:r>
+              <a:rPr b="1" dirty="0"/>
               <a:t>Why GAR's stack works:</a:t>
             </a:r>
           </a:p>
           <a:p>
             <a:pPr lvl="1"/>
             <a:r>
+              <a:rPr dirty="0"/>
               <a:t>RRF feeds the cross-encoder a more diverse candidate pool than any single first-stage retriever produces</a:t>
             </a:r>
           </a:p>
           <a:p>
             <a:pPr lvl="1"/>
             <a:r>
+              <a:rPr dirty="0"/>
               <a:t>Graph features (PPR mass, tool overlap) add signal that the CE alone cannot extract from text</a:t>
             </a:r>
           </a:p>
           <a:p>
             <a:pPr lvl="1"/>
             <a:r>
+              <a:rPr dirty="0"/>
               <a:t>Weighted fusion lets the CE dominate (0.65) while graph features act as principled tiebreakers (0.20 + 0.10)</a:t>
             </a:r>
           </a:p>
           <a:p>
             <a:pPr lvl="1"/>
             <a:r>
+              <a:rPr dirty="0"/>
               <a:t>MMR slot is preserved for diverse top-k use cases (e.g. LLM prompts)</a:t>
             </a:r>
           </a:p>
@@ -6695,7 +7198,7 @@
 </file>
 
 <file path=ppt/slides/slide15.xml><?xml version="1.0" encoding="utf-8"?>
-<p:sld xmlns:a="http://schemas.openxmlformats.org/drawingml/2006/main" xmlns:p="http://schemas.openxmlformats.org/presentationml/2006/main" xmlns:r="http://schemas.openxmlformats.org/officeDocument/2006/relationships">
+<p:sld xmlns:a="http://schemas.openxmlformats.org/drawingml/2006/main" xmlns:r="http://schemas.openxmlformats.org/officeDocument/2006/relationships" xmlns:p="http://schemas.openxmlformats.org/presentationml/2006/main">
   <p:cSld>
     <p:spTree>
       <p:nvGrpSpPr>
@@ -6703,7 +7206,14 @@
         <p:cNvGrpSpPr/>
         <p:nvPr/>
       </p:nvGrpSpPr>
-      <p:grpSpPr/>
+      <p:grpSpPr>
+        <a:xfrm>
+          <a:off x="0" y="0"/>
+          <a:ext cx="0" cy="0"/>
+          <a:chOff x="0" y="0"/>
+          <a:chExt cx="0" cy="0"/>
+        </a:xfrm>
+      </p:grpSpPr>
       <p:sp>
         <p:nvSpPr>
           <p:cNvPr id="2" name="Title 1"/>
@@ -6720,7 +7230,7 @@
           <a:lstStyle/>
           <a:p>
             <a:r>
-              <a:t>Additional Experiments</a:t>
+              <a:t>Conclusions &amp; Deliverables</a:t>
             </a:r>
           </a:p>
         </p:txBody>
@@ -6740,79 +7250,69 @@
           <a:bodyPr wrap="square"/>
           <a:lstStyle/>
           <a:p>
-            <a:pPr/>
             <a:r>
               <a:rPr b="1"/>
-              <a:t>Exp 2 - Document representation (dense)</a:t>
+              <a:t>Implemented:</a:t>
             </a:r>
           </a:p>
           <a:p>
             <a:pPr lvl="1"/>
             <a:r>
-              <a:t>state-only beats state+plan beats full_document</a:t>
+              <a:t>8 retrievers behind a common protocol (BM25 - GAR)</a:t>
             </a:r>
           </a:p>
           <a:p>
             <a:pPr lvl="1"/>
             <a:r>
-              <a:t>Insight: query is a state; matching state-to-state is sharpest</a:t>
-            </a:r>
-          </a:p>
-          <a:p>
-            <a:pPr/>
+              <a:t>Dataset loaders (ACE + MSC) with reproducible synthetic fallback</a:t>
+            </a:r>
+          </a:p>
+          <a:p>
+            <a:pPr lvl="1"/>
+            <a:r>
+              <a:t>Held-out evaluation framework with graded qrels</a:t>
+            </a:r>
+          </a:p>
+          <a:p>
+            <a:pPr lvl="1"/>
+            <a:r>
+              <a:t>Simulated tool-using agent with retrieval-driven tool bias</a:t>
+            </a:r>
+          </a:p>
+          <a:p>
+            <a:pPr lvl="1"/>
+            <a:r>
+              <a:t>27 unit tests, all green; full HANDOVER doc for the next contributor</a:t>
+            </a:r>
+          </a:p>
+          <a:p>
             <a:r>
               <a:rPr b="1"/>
-              <a:t>Exp 3 - Success vs failure retrieval (downstream)</a:t>
+              <a:t>Headline result:</a:t>
+            </a:r>
+            <a:r>
+              <a:t> GAR is the strongest method overall on the held-out set:</a:t>
             </a:r>
           </a:p>
           <a:p>
             <a:pPr lvl="1"/>
             <a:r>
-              <a:t>Retrieval-augmented agent: 25% success vs 17.5% no-retrieval baseline</a:t>
+              <a:t>best P@5, R@5, MRR, and nDCG@5 of all 8 methods</a:t>
             </a:r>
           </a:p>
           <a:p>
             <a:pPr lvl="1"/>
             <a:r>
-              <a:t>Both-mode (success and failure) gives the largest lift (+7.5pp)</a:t>
-            </a:r>
-          </a:p>
-          <a:p>
-            <a:pPr/>
+              <a:t>downstream agent: +7.5pp success rate vs. no-retrieval baseline</a:t>
+            </a:r>
+          </a:p>
+          <a:p>
             <a:r>
               <a:rPr b="1"/>
-              <a:t>Exp 4 - Top-k sensitivity (hybrid)</a:t>
-            </a:r>
-          </a:p>
-          <a:p>
-            <a:pPr lvl="1"/>
-            <a:r>
-              <a:t>P@1 = 0.233, P@5 = 0.140, P@10 = 0.127 (clean precision/recall tradeoff)</a:t>
-            </a:r>
-          </a:p>
-          <a:p>
-            <a:pPr lvl="1"/>
-            <a:r>
-              <a:t>R@10 = 0.084 - more relevant docs are reachable with larger pools</a:t>
-            </a:r>
-          </a:p>
-          <a:p>
-            <a:pPr/>
-            <a:r>
-              <a:rPr b="1"/>
-              <a:t>Exp 5 - Hybrid alpha sweep</a:t>
-            </a:r>
-          </a:p>
-          <a:p>
-            <a:pPr lvl="1"/>
-            <a:r>
-              <a:t>alpha = 0.3: nDCG@5 = 0.369</a:t>
-            </a:r>
-          </a:p>
-          <a:p>
-            <a:pPr lvl="1"/>
-            <a:r>
-              <a:t>alpha = 0.5: 0.370,   alpha = 0.7: 0.378 (BM25-leaning wins)</a:t>
+              <a:t>Future work:</a:t>
+            </a:r>
+            <a:r>
+              <a:t> real LLM agent integration, learning-to-rank over GAR's feature streams, online memory updates during agent rollouts.</a:t>
             </a:r>
           </a:p>
         </p:txBody>
@@ -6825,8 +7325,8 @@
 </p:sld>
 </file>
 
-<file path=ppt/slides/slide16.xml><?xml version="1.0" encoding="utf-8"?>
-<p:sld xmlns:a="http://schemas.openxmlformats.org/drawingml/2006/main" xmlns:p="http://schemas.openxmlformats.org/presentationml/2006/main" xmlns:r="http://schemas.openxmlformats.org/officeDocument/2006/relationships">
+<file path=ppt/slides/slide2.xml><?xml version="1.0" encoding="utf-8"?>
+<p:sld xmlns:a="http://schemas.openxmlformats.org/drawingml/2006/main" xmlns:r="http://schemas.openxmlformats.org/officeDocument/2006/relationships" xmlns:p="http://schemas.openxmlformats.org/presentationml/2006/main">
   <p:cSld>
     <p:spTree>
       <p:nvGrpSpPr>
@@ -6834,7 +7334,14 @@
         <p:cNvGrpSpPr/>
         <p:nvPr/>
       </p:nvGrpSpPr>
-      <p:grpSpPr/>
+      <p:grpSpPr>
+        <a:xfrm>
+          <a:off x="0" y="0"/>
+          <a:ext cx="0" cy="0"/>
+          <a:chOff x="0" y="0"/>
+          <a:chExt cx="0" cy="0"/>
+        </a:xfrm>
+      </p:grpSpPr>
       <p:sp>
         <p:nvSpPr>
           <p:cNvPr id="2" name="Title 1"/>
@@ -6851,7 +7358,7 @@
           <a:lstStyle/>
           <a:p>
             <a:r>
-              <a:t>Novelty</a:t>
+              <a:t>Project Motivation</a:t>
             </a:r>
           </a:p>
         </p:txBody>
@@ -6871,40 +7378,54 @@
           <a:bodyPr wrap="square"/>
           <a:lstStyle/>
           <a:p>
-            <a:pPr/>
-            <a:r>
-              <a:rPr b="1"/>
-              <a:t>Three concrete novel contributions in this work:</a:t>
-            </a:r>
-          </a:p>
-          <a:p>
-            <a:pPr/>
-            <a:r>
-              <a:rPr b="1"/>
-              <a:t>1. Knowledge-graph storage for episodic memory.</a:t>
-            </a:r>
-            <a:r>
-              <a:t> Heterogeneous graph over episodes, tools, task types, outcomes, and content entities. Personalized PageRank captures multi-hop tool/entity relationships no lexical or dense retriever can.</a:t>
-            </a:r>
-          </a:p>
-          <a:p>
-            <a:pPr/>
-            <a:r>
-              <a:rPr b="1"/>
-              <a:t>2. Tool-Jaccard graded relevance.</a:t>
-            </a:r>
-            <a:r>
-              <a:t> Most IR setups grade by topical match. We grade by overlap with the held-out episode's gold tool set - directly meaningful for tool-using agents.</a:t>
-            </a:r>
-          </a:p>
-          <a:p>
-            <a:pPr/>
-            <a:r>
-              <a:rPr b="1"/>
-              <a:t>3. Graph-Augmented Reranker (GAR).</a:t>
-            </a:r>
-            <a:r>
-              <a:t> A single reranker that fuses RRF over diverse first stages, cross-encoder pairwise scoring, structured KG features, and optional MMR. To our knowledge no prior episodic-memory IR system unifies symbolic graph signals with neural reranking inside one fusion layer.</a:t>
+            <a:r>
+              <a:t>Current LLM agents use tools but:</a:t>
+            </a:r>
+          </a:p>
+          <a:p>
+            <a:pPr lvl="1"/>
+            <a:r>
+              <a:t>Repeat past mistakes</a:t>
+            </a:r>
+          </a:p>
+          <a:p>
+            <a:pPr lvl="1"/>
+            <a:r>
+              <a:t>Forget which tools failed for which task type</a:t>
+            </a:r>
+          </a:p>
+          <a:p>
+            <a:pPr lvl="1"/>
+            <a:r>
+              <a:t>Cannot adapt their tool selection over time</a:t>
+            </a:r>
+          </a:p>
+          <a:p>
+            <a:r>
+              <a:t>An adaptive agent should:</a:t>
+            </a:r>
+          </a:p>
+          <a:p>
+            <a:pPr lvl="1"/>
+            <a:r>
+              <a:t>Learn from past successes</a:t>
+            </a:r>
+          </a:p>
+          <a:p>
+            <a:pPr lvl="1"/>
+            <a:r>
+              <a:t>Avoid previously failing strategies</a:t>
+            </a:r>
+          </a:p>
+          <a:p>
+            <a:pPr lvl="1"/>
+            <a:r>
+              <a:t>Bias action selection toward proven plans</a:t>
+            </a:r>
+          </a:p>
+          <a:p>
+            <a:r>
+              <a:t>The bottleneck is the retrieval system over episodic memory: what we retrieve directly shapes what the agent does.</a:t>
             </a:r>
           </a:p>
         </p:txBody>
@@ -6917,8 +7438,8 @@
 </p:sld>
 </file>
 
-<file path=ppt/slides/slide17.xml><?xml version="1.0" encoding="utf-8"?>
-<p:sld xmlns:a="http://schemas.openxmlformats.org/drawingml/2006/main" xmlns:p="http://schemas.openxmlformats.org/presentationml/2006/main" xmlns:r="http://schemas.openxmlformats.org/officeDocument/2006/relationships">
+<file path=ppt/slides/slide3.xml><?xml version="1.0" encoding="utf-8"?>
+<p:sld xmlns:a="http://schemas.openxmlformats.org/drawingml/2006/main" xmlns:r="http://schemas.openxmlformats.org/officeDocument/2006/relationships" xmlns:p="http://schemas.openxmlformats.org/presentationml/2006/main">
   <p:cSld>
     <p:spTree>
       <p:nvGrpSpPr>
@@ -6926,7 +7447,14 @@
         <p:cNvGrpSpPr/>
         <p:nvPr/>
       </p:nvGrpSpPr>
-      <p:grpSpPr/>
+      <p:grpSpPr>
+        <a:xfrm>
+          <a:off x="0" y="0"/>
+          <a:ext cx="0" cy="0"/>
+          <a:chOff x="0" y="0"/>
+          <a:chExt cx="0" cy="0"/>
+        </a:xfrm>
+      </p:grpSpPr>
       <p:sp>
         <p:nvSpPr>
           <p:cNvPr id="2" name="Title 1"/>
@@ -6943,7 +7471,7 @@
           <a:lstStyle/>
           <a:p>
             <a:r>
-              <a:t>Conclusions &amp; Deliverables</a:t>
+              <a:t>Problem Statement &amp; Objectives</a:t>
             </a:r>
           </a:p>
         </p:txBody>
@@ -6963,72 +7491,57 @@
           <a:bodyPr wrap="square"/>
           <a:lstStyle/>
           <a:p>
-            <a:pPr/>
             <a:r>
               <a:rPr b="1"/>
-              <a:t>Implemented:</a:t>
+              <a:t>Problem</a:t>
             </a:r>
           </a:p>
           <a:p>
             <a:pPr lvl="1"/>
             <a:r>
-              <a:t>8 retrievers behind a common protocol (BM25 - GAR)</a:t>
+              <a:t>Existing retrieval-augmented systems retrieve facts to enrich responses.</a:t>
             </a:r>
           </a:p>
           <a:p>
             <a:pPr lvl="1"/>
             <a:r>
-              <a:t>Dataset loaders (ACE + MSC) with reproducible synthetic fallback</a:t>
+              <a:t>They do not influence the agent's action-selection policy.</a:t>
             </a:r>
           </a:p>
           <a:p>
             <a:pPr lvl="1"/>
             <a:r>
-              <a:t>Held-out evaluation framework with graded qrels</a:t>
+              <a:t>How do we design retrieval over episodic memory that actively shapes future planning and tool choice?</a:t>
+            </a:r>
+          </a:p>
+          <a:p>
+            <a:r>
+              <a:rPr b="1"/>
+              <a:t>Objectives</a:t>
             </a:r>
           </a:p>
           <a:p>
             <a:pPr lvl="1"/>
             <a:r>
-              <a:t>Simulated tool-using agent with retrieval-driven tool bias</a:t>
+              <a:t>Store structured agent experiences (state, plan, tools used, outcome)</a:t>
             </a:r>
           </a:p>
           <a:p>
             <a:pPr lvl="1"/>
             <a:r>
-              <a:t>27 unit tests, all green; full HANDOVER doc for the next contributor</a:t>
-            </a:r>
-          </a:p>
-          <a:p>
-            <a:pPr/>
-            <a:r>
-              <a:rPr b="1"/>
-              <a:t>Headline result:</a:t>
-            </a:r>
-            <a:r>
-              <a:t> GAR is the strongest method overall on the held-out set:</a:t>
+              <a:t>Build and rigorously compare multiple retrieval systems over them</a:t>
             </a:r>
           </a:p>
           <a:p>
             <a:pPr lvl="1"/>
             <a:r>
-              <a:t>best P@5, R@5, MRR, and nDCG@5 of all 8 methods</a:t>
+              <a:t>Design a novel multi-signal reranker that fuses lexical, dense, graph, and neural evidence</a:t>
             </a:r>
           </a:p>
           <a:p>
             <a:pPr lvl="1"/>
             <a:r>
-              <a:t>downstream agent: +7.5pp success rate vs. no-retrieval baseline</a:t>
-            </a:r>
-          </a:p>
-          <a:p>
-            <a:pPr/>
-            <a:r>
-              <a:rPr b="1"/>
-              <a:t>Future work:</a:t>
-            </a:r>
-            <a:r>
-              <a:t> real LLM agent integration, learning-to-rank over GAR's feature streams, online memory updates during agent rollouts.</a:t>
+              <a:t>Evaluate with both IR metrics and downstream agent-task metrics</a:t>
             </a:r>
           </a:p>
         </p:txBody>
@@ -7041,8 +7554,8 @@
 </p:sld>
 </file>
 
-<file path=ppt/slides/slide2.xml><?xml version="1.0" encoding="utf-8"?>
-<p:sld xmlns:a="http://schemas.openxmlformats.org/drawingml/2006/main" xmlns:p="http://schemas.openxmlformats.org/presentationml/2006/main" xmlns:r="http://schemas.openxmlformats.org/officeDocument/2006/relationships">
+<file path=ppt/slides/slide4.xml><?xml version="1.0" encoding="utf-8"?>
+<p:sld xmlns:a="http://schemas.openxmlformats.org/drawingml/2006/main" xmlns:r="http://schemas.openxmlformats.org/officeDocument/2006/relationships" xmlns:p="http://schemas.openxmlformats.org/presentationml/2006/main">
   <p:cSld>
     <p:spTree>
       <p:nvGrpSpPr>
@@ -7050,7 +7563,14 @@
         <p:cNvGrpSpPr/>
         <p:nvPr/>
       </p:nvGrpSpPr>
-      <p:grpSpPr/>
+      <p:grpSpPr>
+        <a:xfrm>
+          <a:off x="0" y="0"/>
+          <a:ext cx="0" cy="0"/>
+          <a:chOff x="0" y="0"/>
+          <a:chExt cx="0" cy="0"/>
+        </a:xfrm>
+      </p:grpSpPr>
       <p:sp>
         <p:nvSpPr>
           <p:cNvPr id="2" name="Title 1"/>
@@ -7067,7 +7587,7 @@
           <a:lstStyle/>
           <a:p>
             <a:r>
-              <a:t>Project Motivation</a:t>
+              <a:t>System Overview</a:t>
             </a:r>
           </a:p>
         </p:txBody>
@@ -7087,57 +7607,63 @@
           <a:bodyPr wrap="square"/>
           <a:lstStyle/>
           <a:p>
-            <a:pPr/>
-            <a:r>
-              <a:t>Current LLM agents use tools but:</a:t>
+            <a:r>
+              <a:rPr b="1"/>
+              <a:t>Pipeline (left to right):</a:t>
             </a:r>
           </a:p>
           <a:p>
             <a:pPr lvl="1"/>
             <a:r>
-              <a:t>Repeat past mistakes</a:t>
+              <a:t>Datasets (ACE + MSC, HuggingFace)  -&gt;  Episode JSONL</a:t>
             </a:r>
           </a:p>
           <a:p>
             <a:pPr lvl="1"/>
             <a:r>
-              <a:t>Forget which tools failed for which task type</a:t>
+              <a:t>Episode JSONL  -&gt;  4 Indices (BM25, dense state, dense state+plan, KG)</a:t>
             </a:r>
           </a:p>
           <a:p>
             <a:pPr lvl="1"/>
             <a:r>
-              <a:t>Cannot adapt their tool selection over time</a:t>
-            </a:r>
-          </a:p>
-          <a:p>
-            <a:pPr/>
-            <a:r>
-              <a:t>An adaptive agent should:</a:t>
+              <a:t>Indices  -&gt;  8 Retrievers (common Retriever protocol)</a:t>
             </a:r>
           </a:p>
           <a:p>
             <a:pPr lvl="1"/>
             <a:r>
-              <a:t>Learn from past successes</a:t>
+              <a:t>Retrievers  -&gt;  Eval (P@k, R@k, MRR, nDCG)</a:t>
             </a:r>
           </a:p>
           <a:p>
             <a:pPr lvl="1"/>
             <a:r>
-              <a:t>Avoid previously failing strategies</a:t>
+              <a:t>Retrievers  -&gt;  Simulated Agent  -&gt;  downstream metrics</a:t>
+            </a:r>
+          </a:p>
+          <a:p>
+            <a:r>
+              <a:rPr b="1"/>
+              <a:t>Key design decisions:</a:t>
             </a:r>
           </a:p>
           <a:p>
             <a:pPr lvl="1"/>
             <a:r>
-              <a:t>Bias action selection toward proven plans</a:t>
-            </a:r>
-          </a:p>
-          <a:p>
-            <a:pPr/>
-            <a:r>
-              <a:t>The bottleneck is the retrieval system over episodic memory: what we retrieve directly shapes what the agent does.</a:t>
+              <a:t>Heterogeneous storage: BM25 + dense FAISS + scipy-sparse KG</a:t>
+            </a:r>
+          </a:p>
+          <a:p>
+            <a:pPr lvl="1"/>
+            <a:r>
+              <a:t>Outcome-aware filtering for success/failure pipelines</a:t>
+            </a:r>
+          </a:p>
+          <a:p>
+            <a:pPr lvl="1"/>
+            <a:r>
+              <a:t>Held-out IR evaluation with tool-Jaccard graded relevance</a:t>
             </a:r>
           </a:p>
         </p:txBody>
@@ -7150,8 +7676,8 @@
 </p:sld>
 </file>
 
-<file path=ppt/slides/slide3.xml><?xml version="1.0" encoding="utf-8"?>
-<p:sld xmlns:a="http://schemas.openxmlformats.org/drawingml/2006/main" xmlns:p="http://schemas.openxmlformats.org/presentationml/2006/main" xmlns:r="http://schemas.openxmlformats.org/officeDocument/2006/relationships">
+<file path=ppt/slides/slide5.xml><?xml version="1.0" encoding="utf-8"?>
+<p:sld xmlns:a="http://schemas.openxmlformats.org/drawingml/2006/main" xmlns:r="http://schemas.openxmlformats.org/officeDocument/2006/relationships" xmlns:p="http://schemas.openxmlformats.org/presentationml/2006/main">
   <p:cSld>
     <p:spTree>
       <p:nvGrpSpPr>
@@ -7159,7 +7685,14 @@
         <p:cNvGrpSpPr/>
         <p:nvPr/>
       </p:nvGrpSpPr>
-      <p:grpSpPr/>
+      <p:grpSpPr>
+        <a:xfrm>
+          <a:off x="0" y="0"/>
+          <a:ext cx="0" cy="0"/>
+          <a:chOff x="0" y="0"/>
+          <a:chExt cx="0" cy="0"/>
+        </a:xfrm>
+      </p:grpSpPr>
       <p:sp>
         <p:nvSpPr>
           <p:cNvPr id="2" name="Title 1"/>
@@ -7176,7 +7709,8 @@
           <a:lstStyle/>
           <a:p>
             <a:r>
-              <a:t>Problem Statement &amp; Objectives</a:t>
+              <a:rPr dirty="0"/>
+              <a:t>Datasets &amp; Episode Schema</a:t>
             </a:r>
           </a:p>
         </p:txBody>
@@ -7196,59 +7730,122 @@
           <a:bodyPr wrap="square"/>
           <a:lstStyle/>
           <a:p>
-            <a:pPr/>
-            <a:r>
-              <a:rPr b="1"/>
-              <a:t>Problem</a:t>
+            <a:r>
+              <a:rPr b="1" dirty="0"/>
+              <a:t>Datasets (</a:t>
+            </a:r>
+            <a:r>
+              <a:rPr b="1" dirty="0" err="1"/>
+              <a:t>HuggingFace</a:t>
+            </a:r>
+            <a:r>
+              <a:rPr b="1" dirty="0"/>
+              <a:t>, with reproducible synthetic fallback)</a:t>
             </a:r>
           </a:p>
           <a:p>
             <a:pPr lvl="1"/>
             <a:r>
-              <a:t>Existing retrieval-augmented systems retrieve facts to enrich responses.</a:t>
+              <a:rPr dirty="0"/>
+              <a:t>ACE: agent-capability episodic-retrieval dataset (~800 episodes)</a:t>
             </a:r>
           </a:p>
           <a:p>
             <a:pPr lvl="1"/>
             <a:r>
-              <a:t>They do not influence the agent's action-selection policy.</a:t>
-            </a:r>
+              <a:rPr dirty="0"/>
+              <a:t>MSC: multi-session chat memory dataset (~400 episodes)</a:t>
+            </a:r>
+            <a:endParaRPr lang="en-IN" dirty="0"/>
           </a:p>
           <a:p>
             <a:pPr lvl="1"/>
-            <a:r>
-              <a:t>How do we design retrieval over episodic memory that actively shapes future planning and tool choice?</a:t>
-            </a:r>
-          </a:p>
-          <a:p>
-            <a:pPr/>
-            <a:r>
-              <a:rPr b="1"/>
-              <a:t>Objectives</a:t>
-            </a:r>
+            <a:endParaRPr lang="en-IN" dirty="0"/>
           </a:p>
           <a:p>
             <a:pPr lvl="1"/>
-            <a:r>
-              <a:t>Store structured agent experiences (state, plan, tools used, outcome)</a:t>
+            <a:endParaRPr lang="en-IN" dirty="0"/>
+          </a:p>
+          <a:p>
+            <a:pPr marL="596900" lvl="1" indent="0">
+              <a:buNone/>
+            </a:pPr>
+            <a:endParaRPr dirty="0"/>
+          </a:p>
+          <a:p>
+            <a:r>
+              <a:rPr b="1" dirty="0"/>
+              <a:t>Episode </a:t>
+            </a:r>
+            <a:r>
+              <a:rPr b="1" dirty="0" err="1"/>
+              <a:t>dataclass</a:t>
+            </a:r>
+            <a:r>
+              <a:rPr b="1" dirty="0"/>
+              <a:t> (single source of truth)</a:t>
             </a:r>
           </a:p>
           <a:p>
             <a:pPr lvl="1"/>
             <a:r>
-              <a:t>Build and rigorously compare multiple retrieval systems over them</a:t>
-            </a:r>
+              <a:rPr dirty="0" err="1"/>
+              <a:t>state_text</a:t>
+            </a:r>
+            <a:r>
+              <a:rPr dirty="0"/>
+              <a:t>, </a:t>
+            </a:r>
+            <a:r>
+              <a:rPr dirty="0" err="1"/>
+              <a:t>plan_text</a:t>
+            </a:r>
+            <a:r>
+              <a:rPr dirty="0"/>
+              <a:t>, </a:t>
+            </a:r>
+            <a:r>
+              <a:rPr dirty="0" err="1"/>
+              <a:t>tools_used</a:t>
+            </a:r>
+            <a:r>
+              <a:rPr dirty="0"/>
+              <a:t>, </a:t>
+            </a:r>
+            <a:r>
+              <a:rPr dirty="0" err="1"/>
+              <a:t>outcome_label</a:t>
+            </a:r>
+            <a:r>
+              <a:rPr dirty="0"/>
+              <a:t>, </a:t>
+            </a:r>
+            <a:r>
+              <a:rPr dirty="0" err="1"/>
+              <a:t>outcome_text</a:t>
+            </a:r>
+            <a:endParaRPr dirty="0"/>
           </a:p>
           <a:p>
             <a:pPr lvl="1"/>
             <a:r>
-              <a:t>Design a novel multi-signal reranker that fuses lexical, dense, graph, and neural evidence</a:t>
+              <a:rPr dirty="0" err="1"/>
+              <a:t>task_type</a:t>
+            </a:r>
+            <a:r>
+              <a:rPr dirty="0"/>
+              <a:t>, timestamp, source</a:t>
             </a:r>
           </a:p>
           <a:p>
             <a:pPr lvl="1"/>
             <a:r>
-              <a:t>Evaluate with both IR metrics and downstream agent-task metrics</a:t>
+              <a:rPr dirty="0" err="1"/>
+              <a:t>full_document</a:t>
+            </a:r>
+            <a:r>
+              <a:rPr dirty="0"/>
+              <a:t> = state + plan + tools + outcome (for BM25)</a:t>
             </a:r>
           </a:p>
         </p:txBody>
@@ -7261,8 +7858,8 @@
 </p:sld>
 </file>
 
-<file path=ppt/slides/slide4.xml><?xml version="1.0" encoding="utf-8"?>
-<p:sld xmlns:a="http://schemas.openxmlformats.org/drawingml/2006/main" xmlns:p="http://schemas.openxmlformats.org/presentationml/2006/main" xmlns:r="http://schemas.openxmlformats.org/officeDocument/2006/relationships">
+<file path=ppt/slides/slide6.xml><?xml version="1.0" encoding="utf-8"?>
+<p:sld xmlns:a="http://schemas.openxmlformats.org/drawingml/2006/main" xmlns:r="http://schemas.openxmlformats.org/officeDocument/2006/relationships" xmlns:p="http://schemas.openxmlformats.org/presentationml/2006/main">
   <p:cSld>
     <p:spTree>
       <p:nvGrpSpPr>
@@ -7270,7 +7867,14 @@
         <p:cNvGrpSpPr/>
         <p:nvPr/>
       </p:nvGrpSpPr>
-      <p:grpSpPr/>
+      <p:grpSpPr>
+        <a:xfrm>
+          <a:off x="0" y="0"/>
+          <a:ext cx="0" cy="0"/>
+          <a:chOff x="0" y="0"/>
+          <a:chExt cx="0" cy="0"/>
+        </a:xfrm>
+      </p:grpSpPr>
       <p:sp>
         <p:nvSpPr>
           <p:cNvPr id="2" name="Title 1"/>
@@ -7287,7 +7891,7 @@
           <a:lstStyle/>
           <a:p>
             <a:r>
-              <a:t>System Overview</a:t>
+              <a:t>Storage / Indexing Layer</a:t>
             </a:r>
           </a:p>
         </p:txBody>
@@ -7307,65 +7911,75 @@
           <a:bodyPr wrap="square"/>
           <a:lstStyle/>
           <a:p>
-            <a:pPr/>
             <a:r>
               <a:rPr b="1"/>
-              <a:t>Pipeline (left to right):</a:t>
+              <a:t>BM25 index (rank_bm25)</a:t>
             </a:r>
           </a:p>
           <a:p>
             <a:pPr lvl="1"/>
             <a:r>
-              <a:t>Datasets (ACE + MSC, HuggingFace)  -&gt;  Episode JSONL</a:t>
+              <a:t>Tokenized inverted index over full_document</a:t>
             </a:r>
           </a:p>
           <a:p>
             <a:pPr lvl="1"/>
             <a:r>
-              <a:t>Episode JSONL  -&gt;  4 Indices (BM25, dense state, dense state+plan, KG)</a:t>
+              <a:t>Pure-Python, in-process, persisted as pickle</a:t>
+            </a:r>
+          </a:p>
+          <a:p>
+            <a:r>
+              <a:rPr b="1"/>
+              <a:t>Dense indices (sentence-transformers + FAISS)</a:t>
             </a:r>
           </a:p>
           <a:p>
             <a:pPr lvl="1"/>
             <a:r>
-              <a:t>Indices  -&gt;  8 Retrievers (common Retriever protocol)</a:t>
+              <a:t>all-MiniLM-L6-v2, 384-dim, L2-normalized -&gt; cosine via inner product</a:t>
             </a:r>
           </a:p>
           <a:p>
             <a:pPr lvl="1"/>
             <a:r>
-              <a:t>Retrievers  -&gt;  Eval (P@k, R@k, MRR, nDCG)</a:t>
+              <a:t>Three variants: state, state+plan, plan-only (for field-aware)</a:t>
+            </a:r>
+          </a:p>
+          <a:p>
+            <a:r>
+              <a:rPr b="1"/>
+              <a:t>Knowledge-graph index (scipy.sparse)</a:t>
             </a:r>
           </a:p>
           <a:p>
             <a:pPr lvl="1"/>
             <a:r>
-              <a:t>Retrievers  -&gt;  Simulated Agent  -&gt;  downstream metrics</a:t>
-            </a:r>
-          </a:p>
-          <a:p>
-            <a:pPr/>
+              <a:t>Heterogeneous nodes: episode, tool, tasktype, outcome, entity</a:t>
+            </a:r>
+          </a:p>
+          <a:p>
+            <a:pPr lvl="1"/>
+            <a:r>
+              <a:t>Edges weighted (entity edges idf-scored)</a:t>
+            </a:r>
+          </a:p>
+          <a:p>
+            <a:pPr lvl="1"/>
+            <a:r>
+              <a:t>Stored as one row-normalized CSR transition matrix</a:t>
+            </a:r>
+          </a:p>
+          <a:p>
             <a:r>
               <a:rPr b="1"/>
-              <a:t>Key design decisions:</a:t>
+              <a:t>Metadata store</a:t>
             </a:r>
           </a:p>
           <a:p>
             <a:pPr lvl="1"/>
             <a:r>
-              <a:t>Heterogeneous storage: BM25 + dense FAISS + scipy-sparse KG</a:t>
-            </a:r>
-          </a:p>
-          <a:p>
-            <a:pPr lvl="1"/>
-            <a:r>
-              <a:t>Outcome-aware filtering for success/failure pipelines</a:t>
-            </a:r>
-          </a:p>
-          <a:p>
-            <a:pPr lvl="1"/>
-            <a:r>
-              <a:t>Held-out IR evaluation with tool-Jaccard graded relevance</a:t>
+              <a:t>episode_id -&gt; Episode lookup, plus outcome filter</a:t>
             </a:r>
           </a:p>
         </p:txBody>
@@ -7378,8 +7992,8 @@
 </p:sld>
 </file>
 
-<file path=ppt/slides/slide5.xml><?xml version="1.0" encoding="utf-8"?>
-<p:sld xmlns:a="http://schemas.openxmlformats.org/drawingml/2006/main" xmlns:p="http://schemas.openxmlformats.org/presentationml/2006/main" xmlns:r="http://schemas.openxmlformats.org/officeDocument/2006/relationships">
+<file path=ppt/slides/slide7.xml><?xml version="1.0" encoding="utf-8"?>
+<p:sld xmlns:a="http://schemas.openxmlformats.org/drawingml/2006/main" xmlns:r="http://schemas.openxmlformats.org/officeDocument/2006/relationships" xmlns:p="http://schemas.openxmlformats.org/presentationml/2006/main">
   <p:cSld>
     <p:spTree>
       <p:nvGrpSpPr>
@@ -7387,7 +8001,14 @@
         <p:cNvGrpSpPr/>
         <p:nvPr/>
       </p:nvGrpSpPr>
-      <p:grpSpPr/>
+      <p:grpSpPr>
+        <a:xfrm>
+          <a:off x="0" y="0"/>
+          <a:ext cx="0" cy="0"/>
+          <a:chOff x="0" y="0"/>
+          <a:chExt cx="0" cy="0"/>
+        </a:xfrm>
+      </p:grpSpPr>
       <p:sp>
         <p:nvSpPr>
           <p:cNvPr id="2" name="Title 1"/>
@@ -7404,7 +8025,8 @@
           <a:lstStyle/>
           <a:p>
             <a:r>
-              <a:t>Datasets &amp; Episode Schema</a:t>
+              <a:rPr dirty="0"/>
+              <a:t>Retrieval Methods (8 total)</a:t>
             </a:r>
           </a:p>
         </p:txBody>
@@ -7424,53 +8046,136 @@
           <a:bodyPr wrap="square"/>
           <a:lstStyle/>
           <a:p>
-            <a:pPr/>
-            <a:r>
-              <a:rPr b="1"/>
-              <a:t>Datasets (HuggingFace, with reproducible synthetic fallback)</a:t>
+            <a:r>
+              <a:rPr dirty="0"/>
+              <a:t>All implement a common Retriever protocol with optional </a:t>
+            </a:r>
+            <a:r>
+              <a:rPr dirty="0" err="1"/>
+              <a:t>filter_outcome</a:t>
+            </a:r>
+            <a:r>
+              <a:rPr dirty="0"/>
+              <a:t>=</a:t>
+            </a:r>
+            <a:r>
+              <a:rPr dirty="0" err="1"/>
+              <a:t>success|failure</a:t>
+            </a:r>
+            <a:r>
+              <a:rPr dirty="0"/>
+              <a:t> post-filtering.</a:t>
+            </a:r>
+          </a:p>
+          <a:p>
+            <a:r>
+              <a:rPr b="1" dirty="0"/>
+              <a:t>Single-signal:</a:t>
             </a:r>
           </a:p>
           <a:p>
             <a:pPr lvl="1"/>
             <a:r>
-              <a:t>ACE: agent-capability episodic-retrieval dataset (~800 episodes)</a:t>
+              <a:rPr dirty="0"/>
+              <a:t>BM25 - lexical inverted index</a:t>
             </a:r>
           </a:p>
           <a:p>
             <a:pPr lvl="1"/>
             <a:r>
-              <a:t>MSC: multi-session chat memory dataset (~400 episodes)</a:t>
+              <a:rPr dirty="0"/>
+              <a:t>Dense (state) - bi-encoder cosine</a:t>
             </a:r>
           </a:p>
           <a:p>
             <a:pPr lvl="1"/>
             <a:r>
-              <a:t>Synthetic fallback uses task-type templates with 18% lexical distractors so retrieval is non-trivial</a:t>
-            </a:r>
-          </a:p>
-          <a:p>
-            <a:pPr/>
-            <a:r>
-              <a:rPr b="1"/>
-              <a:t>Episode dataclass (single source of truth)</a:t>
+              <a:rPr dirty="0"/>
+              <a:t>Dense (state + plan) - same, richer document</a:t>
+            </a:r>
+          </a:p>
+          <a:p>
+            <a:r>
+              <a:rPr b="1" dirty="0"/>
+              <a:t>Multi-signal:</a:t>
             </a:r>
           </a:p>
           <a:p>
             <a:pPr lvl="1"/>
             <a:r>
-              <a:t>state_text, plan_text, tools_used, outcome_label, outcome_text</a:t>
+              <a:rPr dirty="0"/>
+              <a:t>Hybrid - alpha * BM25 + (1-alpha) * dense (per-query min-max)</a:t>
             </a:r>
           </a:p>
           <a:p>
             <a:pPr lvl="1"/>
             <a:r>
-              <a:t>task_type, timestamp, source</a:t>
+              <a:rPr dirty="0"/>
+              <a:t>Field-Aware - weighted state + plan + tool overlap + outcome</a:t>
             </a:r>
           </a:p>
           <a:p>
             <a:pPr lvl="1"/>
             <a:r>
-              <a:t>full_document = state + plan + tools + outcome (for BM25)</a:t>
+              <a:rPr dirty="0"/>
+              <a:t>KG-PPR - Personalized PageRank over heterogeneous graph</a:t>
+            </a:r>
+          </a:p>
+          <a:p>
+            <a:r>
+              <a:rPr b="1" dirty="0"/>
+              <a:t>Two-stage / multi-stage neural:</a:t>
+            </a:r>
+          </a:p>
+          <a:p>
+            <a:pPr lvl="1"/>
+            <a:r>
+              <a:rPr dirty="0"/>
+              <a:t>Cross-Encoder </a:t>
+            </a:r>
+            <a:r>
+              <a:rPr dirty="0" err="1"/>
+              <a:t>Rerank</a:t>
+            </a:r>
+            <a:r>
+              <a:rPr dirty="0"/>
+              <a:t> - hybrid recall + </a:t>
+            </a:r>
+            <a:r>
+              <a:rPr dirty="0" err="1"/>
+              <a:t>ms-marco</a:t>
+            </a:r>
+            <a:r>
+              <a:rPr dirty="0"/>
+              <a:t> </a:t>
+            </a:r>
+            <a:r>
+              <a:rPr dirty="0" err="1"/>
+              <a:t>MiniLM</a:t>
+            </a:r>
+            <a:r>
+              <a:rPr dirty="0"/>
+              <a:t> </a:t>
+            </a:r>
+            <a:r>
+              <a:rPr dirty="0" err="1"/>
+              <a:t>rerank</a:t>
+            </a:r>
+            <a:endParaRPr dirty="0"/>
+          </a:p>
+          <a:p>
+            <a:pPr lvl="1"/>
+            <a:r>
+              <a:rPr dirty="0"/>
+              <a:t>Graph-Augmented </a:t>
+            </a:r>
+            <a:r>
+              <a:rPr dirty="0" err="1"/>
+              <a:t>Reranker</a:t>
+            </a:r>
+            <a:r>
+              <a:rPr dirty="0"/>
+              <a:t> (GAR) - 5-stage: RRF + CE + graph features + MMR  [NOVEL]</a:t>
             </a:r>
           </a:p>
         </p:txBody>
@@ -7483,8 +8188,8 @@
 </p:sld>
 </file>
 
-<file path=ppt/slides/slide6.xml><?xml version="1.0" encoding="utf-8"?>
-<p:sld xmlns:a="http://schemas.openxmlformats.org/drawingml/2006/main" xmlns:p="http://schemas.openxmlformats.org/presentationml/2006/main" xmlns:r="http://schemas.openxmlformats.org/officeDocument/2006/relationships">
+<file path=ppt/slides/slide8.xml><?xml version="1.0" encoding="utf-8"?>
+<p:sld xmlns:a="http://schemas.openxmlformats.org/drawingml/2006/main" xmlns:r="http://schemas.openxmlformats.org/officeDocument/2006/relationships" xmlns:p="http://schemas.openxmlformats.org/presentationml/2006/main">
   <p:cSld>
     <p:spTree>
       <p:nvGrpSpPr>
@@ -7492,7 +8197,14 @@
         <p:cNvGrpSpPr/>
         <p:nvPr/>
       </p:nvGrpSpPr>
-      <p:grpSpPr/>
+      <p:grpSpPr>
+        <a:xfrm>
+          <a:off x="0" y="0"/>
+          <a:ext cx="0" cy="0"/>
+          <a:chOff x="0" y="0"/>
+          <a:chExt cx="0" cy="0"/>
+        </a:xfrm>
+      </p:grpSpPr>
       <p:sp>
         <p:nvSpPr>
           <p:cNvPr id="2" name="Title 1"/>
@@ -7509,7 +8221,7 @@
           <a:lstStyle/>
           <a:p>
             <a:r>
-              <a:t>Storage / Indexing Layer</a:t>
+              <a:t>Methods 1: Lexical, Dense, Hybrid</a:t>
             </a:r>
           </a:p>
         </p:txBody>
@@ -7529,79 +8241,63 @@
           <a:bodyPr wrap="square"/>
           <a:lstStyle/>
           <a:p>
-            <a:pPr/>
             <a:r>
               <a:rPr b="1"/>
-              <a:t>BM25 index (rank_bm25)</a:t>
+              <a:t>BM25</a:t>
             </a:r>
           </a:p>
           <a:p>
             <a:pPr lvl="1"/>
             <a:r>
-              <a:t>Tokenized inverted index over full_document</a:t>
+              <a:t>Score = sum over query terms of idf * tf-saturated(term, doc)</a:t>
             </a:r>
           </a:p>
           <a:p>
             <a:pPr lvl="1"/>
             <a:r>
-              <a:t>Pure-Python, in-process, persisted as pickle</a:t>
-            </a:r>
-          </a:p>
-          <a:p>
-            <a:pPr/>
+              <a:t>Strong on exact-keyword overlap; misses paraphrase</a:t>
+            </a:r>
+          </a:p>
+          <a:p>
             <a:r>
               <a:rPr b="1"/>
-              <a:t>Dense indices (sentence-transformers + FAISS)</a:t>
+              <a:t>Dense bi-encoder</a:t>
             </a:r>
           </a:p>
           <a:p>
             <a:pPr lvl="1"/>
             <a:r>
-              <a:t>all-MiniLM-L6-v2, 384-dim, L2-normalized -&gt; cosine via inner product</a:t>
+              <a:t>Encode query and doc independently, score by cosine</a:t>
             </a:r>
           </a:p>
           <a:p>
             <a:pPr lvl="1"/>
             <a:r>
-              <a:t>Three variants: state, state+plan, plan-only (for field-aware)</a:t>
-            </a:r>
-          </a:p>
-          <a:p>
-            <a:pPr/>
+              <a:t>Catches paraphrase; loses fine token-level signal</a:t>
+            </a:r>
+          </a:p>
+          <a:p>
             <a:r>
               <a:rPr b="1"/>
-              <a:t>Knowledge-graph index (scipy.sparse)</a:t>
+              <a:t>Hybrid</a:t>
             </a:r>
           </a:p>
           <a:p>
             <a:pPr lvl="1"/>
             <a:r>
-              <a:t>Heterogeneous nodes: episode, tool, tasktype, outcome, entity</a:t>
+              <a:t>Min-max normalize both score lists per query</a:t>
             </a:r>
           </a:p>
           <a:p>
             <a:pPr lvl="1"/>
             <a:r>
-              <a:t>Edges weighted (entity edges idf-scored)</a:t>
+              <a:t>score = alpha * BM25_norm + (1 - alpha) * cos_norm</a:t>
             </a:r>
           </a:p>
           <a:p>
             <a:pPr lvl="1"/>
             <a:r>
-              <a:t>Stored as one row-normalized CSR transition matrix</a:t>
-            </a:r>
-          </a:p>
-          <a:p>
-            <a:pPr/>
-            <a:r>
-              <a:rPr b="1"/>
-              <a:t>Metadata store</a:t>
-            </a:r>
-          </a:p>
-          <a:p>
-            <a:pPr lvl="1"/>
-            <a:r>
-              <a:t>episode_id -&gt; Episode lookup, plus outcome filter</a:t>
+              <a:t>alpha = 0.5 default; alpha sweep in Exp 5</a:t>
             </a:r>
           </a:p>
         </p:txBody>
@@ -7614,8 +8310,8 @@
 </p:sld>
 </file>
 
-<file path=ppt/slides/slide7.xml><?xml version="1.0" encoding="utf-8"?>
-<p:sld xmlns:a="http://schemas.openxmlformats.org/drawingml/2006/main" xmlns:p="http://schemas.openxmlformats.org/presentationml/2006/main" xmlns:r="http://schemas.openxmlformats.org/officeDocument/2006/relationships">
+<file path=ppt/slides/slide9.xml><?xml version="1.0" encoding="utf-8"?>
+<p:sld xmlns:a="http://schemas.openxmlformats.org/drawingml/2006/main" xmlns:r="http://schemas.openxmlformats.org/officeDocument/2006/relationships" xmlns:p="http://schemas.openxmlformats.org/presentationml/2006/main">
   <p:cSld>
     <p:spTree>
       <p:nvGrpSpPr>
@@ -7623,7 +8319,14 @@
         <p:cNvGrpSpPr/>
         <p:nvPr/>
       </p:nvGrpSpPr>
-      <p:grpSpPr/>
+      <p:grpSpPr>
+        <a:xfrm>
+          <a:off x="0" y="0"/>
+          <a:ext cx="0" cy="0"/>
+          <a:chOff x="0" y="0"/>
+          <a:chExt cx="0" cy="0"/>
+        </a:xfrm>
+      </p:grpSpPr>
       <p:sp>
         <p:nvSpPr>
           <p:cNvPr id="2" name="Title 1"/>
@@ -7640,7 +8343,7 @@
           <a:lstStyle/>
           <a:p>
             <a:r>
-              <a:t>Retrieval Methods (8 total)</a:t>
+              <a:t>Methods 2: Field-Aware &amp; Knowledge Graph</a:t>
             </a:r>
           </a:p>
         </p:txBody>
@@ -7660,308 +8363,115 @@
           <a:bodyPr wrap="square"/>
           <a:lstStyle/>
           <a:p>
-            <a:pPr/>
-            <a:r>
-              <a:t>All implement a common Retriever protocol with optional filter_outcome=success|failure post-filtering.</a:t>
-            </a:r>
-          </a:p>
-          <a:p>
-            <a:pPr/>
-            <a:r>
-              <a:rPr b="1"/>
-              <a:t>Single-signal:</a:t>
+            <a:r>
+              <a:rPr b="1" dirty="0"/>
+              <a:t>Field-Aware</a:t>
             </a:r>
           </a:p>
           <a:p>
             <a:pPr lvl="1"/>
             <a:r>
-              <a:t>BM25 - lexical inverted index</a:t>
+              <a:rPr dirty="0"/>
+              <a:t>Recall pool from BM25 union dense-state</a:t>
             </a:r>
           </a:p>
           <a:p>
             <a:pPr lvl="1"/>
             <a:r>
-              <a:t>Dense (state) - bi-encoder cosine</a:t>
-            </a:r>
+              <a:rPr dirty="0"/>
+              <a:t>Re-score: w1*sim(state) + w2*sim(plan) + w3*</a:t>
+            </a:r>
+            <a:r>
+              <a:rPr dirty="0" err="1"/>
+              <a:t>tool_jaccard</a:t>
+            </a:r>
+            <a:r>
+              <a:rPr dirty="0"/>
+              <a:t> + w4*</a:t>
+            </a:r>
+            <a:r>
+              <a:rPr dirty="0" err="1"/>
+              <a:t>outcome_match</a:t>
+            </a:r>
+            <a:endParaRPr dirty="0"/>
           </a:p>
           <a:p>
             <a:pPr lvl="1"/>
             <a:r>
-              <a:t>Dense (state + plan) - same, richer document</a:t>
-            </a:r>
-          </a:p>
-          <a:p>
-            <a:pPr/>
-            <a:r>
-              <a:rPr b="1"/>
-              <a:t>Multi-signal:</a:t>
+              <a:rPr dirty="0"/>
+              <a:t>Default weights (0.5, 0.2, 0.2, 0.1)</a:t>
+            </a:r>
+          </a:p>
+          <a:p>
+            <a:r>
+              <a:rPr b="1" dirty="0"/>
+              <a:t>Knowledge-Graph PPR (novel storage)</a:t>
             </a:r>
           </a:p>
           <a:p>
             <a:pPr lvl="1"/>
             <a:r>
-              <a:t>Hybrid - alpha * BM25 + (1-alpha) * dense (per-query min-max)</a:t>
+              <a:rPr dirty="0"/>
+              <a:t>Build heterogeneous undirected graph over episodes/tools/types/entities</a:t>
             </a:r>
           </a:p>
           <a:p>
             <a:pPr lvl="1"/>
             <a:r>
-              <a:t>Field-Aware - weighted state + plan + tool overlap + outcome</a:t>
+              <a:rPr dirty="0"/>
+              <a:t>Entity vocab from content tokens with </a:t>
+            </a:r>
+            <a:r>
+              <a:rPr dirty="0" err="1"/>
+              <a:t>df</a:t>
+            </a:r>
+            <a:r>
+              <a:rPr dirty="0"/>
+              <a:t>&gt;=2; </a:t>
+            </a:r>
+            <a:r>
+              <a:rPr dirty="0" err="1"/>
+              <a:t>idf</a:t>
+            </a:r>
+            <a:r>
+              <a:rPr dirty="0"/>
+              <a:t>-weighted edges</a:t>
             </a:r>
           </a:p>
           <a:p>
             <a:pPr lvl="1"/>
             <a:r>
-              <a:t>KG-PPR - Personalized PageRank over heterogeneous graph</a:t>
-            </a:r>
-          </a:p>
-          <a:p>
-            <a:pPr/>
-            <a:r>
-              <a:rPr b="1"/>
-              <a:t>Two-stage / multi-stage neural:</a:t>
+              <a:rPr dirty="0"/>
+              <a:t>Retrieval = Personalized PageRank with restart, seeded by query entities + tool-vocab keyword hits</a:t>
             </a:r>
           </a:p>
           <a:p>
             <a:pPr lvl="1"/>
             <a:r>
-              <a:t>Cross-Encoder Rerank - hybrid recall + ms-marco MiniLM rerank</a:t>
-            </a:r>
-          </a:p>
-          <a:p>
-            <a:pPr lvl="1"/>
-            <a:r>
-              <a:t>Graph-Augmented Reranker (GAR) - 5-stage: RRF + CE + graph features + MMR  [NOVEL]</a:t>
-            </a:r>
-          </a:p>
-        </p:txBody>
-      </p:sp>
-    </p:spTree>
-  </p:cSld>
-  <p:clrMapOvr>
-    <a:masterClrMapping/>
-  </p:clrMapOvr>
-</p:sld>
-</file>
-
-<file path=ppt/slides/slide8.xml><?xml version="1.0" encoding="utf-8"?>
-<p:sld xmlns:a="http://schemas.openxmlformats.org/drawingml/2006/main" xmlns:p="http://schemas.openxmlformats.org/presentationml/2006/main" xmlns:r="http://schemas.openxmlformats.org/officeDocument/2006/relationships">
-  <p:cSld>
-    <p:spTree>
-      <p:nvGrpSpPr>
-        <p:cNvPr id="1" name=""/>
-        <p:cNvGrpSpPr/>
-        <p:nvPr/>
-      </p:nvGrpSpPr>
-      <p:grpSpPr/>
-      <p:sp>
-        <p:nvSpPr>
-          <p:cNvPr id="2" name="Title 1"/>
-          <p:cNvSpPr>
-            <a:spLocks noGrp="1"/>
-          </p:cNvSpPr>
-          <p:nvPr>
-            <p:ph type="title"/>
-          </p:nvPr>
-        </p:nvSpPr>
-        <p:spPr/>
-        <p:txBody>
-          <a:bodyPr/>
-          <a:lstStyle/>
-          <a:p>
-            <a:r>
-              <a:t>Methods 1: Lexical, Dense, Hybrid</a:t>
-            </a:r>
-          </a:p>
-        </p:txBody>
-      </p:sp>
-      <p:sp>
-        <p:nvSpPr>
-          <p:cNvPr id="3" name="Text Placeholder 2"/>
-          <p:cNvSpPr>
-            <a:spLocks noGrp="1"/>
-          </p:cNvSpPr>
-          <p:nvPr>
-            <p:ph type="body" idx="1"/>
-          </p:nvPr>
-        </p:nvSpPr>
-        <p:spPr/>
-        <p:txBody>
-          <a:bodyPr wrap="square"/>
-          <a:lstStyle/>
-          <a:p>
-            <a:pPr/>
-            <a:r>
-              <a:rPr b="1"/>
-              <a:t>BM25</a:t>
-            </a:r>
-          </a:p>
-          <a:p>
-            <a:pPr lvl="1"/>
-            <a:r>
-              <a:t>Score = sum over query terms of idf * tf-saturated(term, doc)</a:t>
-            </a:r>
-          </a:p>
-          <a:p>
-            <a:pPr lvl="1"/>
-            <a:r>
-              <a:t>Strong on exact-keyword overlap; misses paraphrase</a:t>
-            </a:r>
-          </a:p>
-          <a:p>
-            <a:pPr/>
-            <a:r>
-              <a:rPr b="1"/>
-              <a:t>Dense bi-encoder</a:t>
-            </a:r>
-          </a:p>
-          <a:p>
-            <a:pPr lvl="1"/>
-            <a:r>
-              <a:t>Encode query and doc independently, score by cosine</a:t>
-            </a:r>
-          </a:p>
-          <a:p>
-            <a:pPr lvl="1"/>
-            <a:r>
-              <a:t>Catches paraphrase; loses fine token-level signal</a:t>
-            </a:r>
-          </a:p>
-          <a:p>
-            <a:pPr/>
-            <a:r>
-              <a:rPr b="1"/>
-              <a:t>Hybrid</a:t>
-            </a:r>
-          </a:p>
-          <a:p>
-            <a:pPr lvl="1"/>
-            <a:r>
-              <a:t>Min-max normalize both score lists per query</a:t>
-            </a:r>
-          </a:p>
-          <a:p>
-            <a:pPr lvl="1"/>
-            <a:r>
-              <a:t>score = alpha * BM25_norm + (1 - alpha) * cos_norm</a:t>
-            </a:r>
-          </a:p>
-          <a:p>
-            <a:pPr lvl="1"/>
-            <a:r>
-              <a:t>alpha = 0.5 default; alpha sweep in Exp 5</a:t>
-            </a:r>
-          </a:p>
-        </p:txBody>
-      </p:sp>
-    </p:spTree>
-  </p:cSld>
-  <p:clrMapOvr>
-    <a:masterClrMapping/>
-  </p:clrMapOvr>
-</p:sld>
-</file>
-
-<file path=ppt/slides/slide9.xml><?xml version="1.0" encoding="utf-8"?>
-<p:sld xmlns:a="http://schemas.openxmlformats.org/drawingml/2006/main" xmlns:p="http://schemas.openxmlformats.org/presentationml/2006/main" xmlns:r="http://schemas.openxmlformats.org/officeDocument/2006/relationships">
-  <p:cSld>
-    <p:spTree>
-      <p:nvGrpSpPr>
-        <p:cNvPr id="1" name=""/>
-        <p:cNvGrpSpPr/>
-        <p:nvPr/>
-      </p:nvGrpSpPr>
-      <p:grpSpPr/>
-      <p:sp>
-        <p:nvSpPr>
-          <p:cNvPr id="2" name="Title 1"/>
-          <p:cNvSpPr>
-            <a:spLocks noGrp="1"/>
-          </p:cNvSpPr>
-          <p:nvPr>
-            <p:ph type="title"/>
-          </p:nvPr>
-        </p:nvSpPr>
-        <p:spPr/>
-        <p:txBody>
-          <a:bodyPr/>
-          <a:lstStyle/>
-          <a:p>
-            <a:r>
-              <a:t>Methods 2: Field-Aware &amp; Knowledge Graph</a:t>
-            </a:r>
-          </a:p>
-        </p:txBody>
-      </p:sp>
-      <p:sp>
-        <p:nvSpPr>
-          <p:cNvPr id="3" name="Text Placeholder 2"/>
-          <p:cNvSpPr>
-            <a:spLocks noGrp="1"/>
-          </p:cNvSpPr>
-          <p:nvPr>
-            <p:ph type="body" idx="1"/>
-          </p:nvPr>
-        </p:nvSpPr>
-        <p:spPr/>
-        <p:txBody>
-          <a:bodyPr wrap="square"/>
-          <a:lstStyle/>
-          <a:p>
-            <a:pPr/>
-            <a:r>
-              <a:rPr b="1"/>
-              <a:t>Field-Aware</a:t>
-            </a:r>
-          </a:p>
-          <a:p>
-            <a:pPr lvl="1"/>
-            <a:r>
-              <a:t>Recall pool from BM25 union dense-state</a:t>
-            </a:r>
-          </a:p>
-          <a:p>
-            <a:pPr lvl="1"/>
-            <a:r>
-              <a:t>Re-score: w1*sim(state) + w2*sim(plan) + w3*tool_jaccard + w4*outcome_match</a:t>
-            </a:r>
-          </a:p>
-          <a:p>
-            <a:pPr lvl="1"/>
-            <a:r>
-              <a:t>Default weights (0.5, 0.2, 0.2, 0.1)</a:t>
-            </a:r>
-          </a:p>
-          <a:p>
-            <a:pPr/>
-            <a:r>
-              <a:rPr b="1"/>
-              <a:t>Knowledge-Graph PPR (novel storage)</a:t>
-            </a:r>
-          </a:p>
-          <a:p>
-            <a:pPr lvl="1"/>
-            <a:r>
-              <a:t>Build heterogeneous undirected graph over episodes/tools/types/entities</a:t>
-            </a:r>
-          </a:p>
-          <a:p>
-            <a:pPr lvl="1"/>
-            <a:r>
-              <a:t>Entity vocab from content tokens with df&gt;=2; idf-weighted edges</a:t>
-            </a:r>
-          </a:p>
-          <a:p>
-            <a:pPr lvl="1"/>
-            <a:r>
-              <a:t>Retrieval = Personalized PageRank with restart, seeded by query entities + tool-vocab keyword hits</a:t>
-            </a:r>
-          </a:p>
-          <a:p>
-            <a:pPr lvl="1"/>
-            <a:r>
-              <a:t>Captures multi-hop connections: query -&gt; entity -&gt; ep_A -&gt; tool_X -&gt; ep_B</a:t>
-            </a:r>
+              <a:rPr dirty="0"/>
+              <a:t>Captures multi-hop connections: query -&gt; entity -&gt; </a:t>
+            </a:r>
+            <a:r>
+              <a:rPr dirty="0" err="1"/>
+              <a:t>ep_A</a:t>
+            </a:r>
+            <a:r>
+              <a:rPr dirty="0"/>
+              <a:t> -&gt; </a:t>
+            </a:r>
+            <a:r>
+              <a:rPr dirty="0" err="1"/>
+              <a:t>tool_X</a:t>
+            </a:r>
+            <a:r>
+              <a:rPr dirty="0"/>
+              <a:t> -&gt; </a:t>
+            </a:r>
+            <a:r>
+              <a:rPr dirty="0" err="1"/>
+              <a:t>ep_B</a:t>
+            </a:r>
+            <a:endParaRPr dirty="0"/>
           </a:p>
         </p:txBody>
       </p:sp>
@@ -7974,7 +8484,288 @@
 </file>
 
 <file path=ppt/theme/theme1.xml><?xml version="1.0" encoding="utf-8"?>
-<a:theme xmlns:a="http://schemas.openxmlformats.org/drawingml/2006/main" xmlns:r="http://schemas.openxmlformats.org/officeDocument/2006/relationships">
+<a:theme xmlns:a="http://schemas.openxmlformats.org/drawingml/2006/main" name="Simple Light">
+  <a:themeElements>
+    <a:clrScheme name="Simple Light">
+      <a:dk1>
+        <a:srgbClr val="000000"/>
+      </a:dk1>
+      <a:lt1>
+        <a:srgbClr val="FFFFFF"/>
+      </a:lt1>
+      <a:dk2>
+        <a:srgbClr val="595959"/>
+      </a:dk2>
+      <a:lt2>
+        <a:srgbClr val="EEEEEE"/>
+      </a:lt2>
+      <a:accent1>
+        <a:srgbClr val="4285F4"/>
+      </a:accent1>
+      <a:accent2>
+        <a:srgbClr val="212121"/>
+      </a:accent2>
+      <a:accent3>
+        <a:srgbClr val="78909C"/>
+      </a:accent3>
+      <a:accent4>
+        <a:srgbClr val="FFAB40"/>
+      </a:accent4>
+      <a:accent5>
+        <a:srgbClr val="0097A7"/>
+      </a:accent5>
+      <a:accent6>
+        <a:srgbClr val="EEFF41"/>
+      </a:accent6>
+      <a:hlink>
+        <a:srgbClr val="0097A7"/>
+      </a:hlink>
+      <a:folHlink>
+        <a:srgbClr val="0097A7"/>
+      </a:folHlink>
+    </a:clrScheme>
+    <a:fontScheme name="Office">
+      <a:majorFont>
+        <a:latin typeface="Arial"/>
+        <a:ea typeface=""/>
+        <a:cs typeface=""/>
+        <a:font script="Jpan" typeface="ＭＳ Ｐゴシック"/>
+        <a:font script="Hang" typeface="맑은 고딕"/>
+        <a:font script="Hans" typeface="宋体"/>
+        <a:font script="Hant" typeface="新細明體"/>
+        <a:font script="Arab" typeface="Times New Roman"/>
+        <a:font script="Hebr" typeface="Times New Roman"/>
+        <a:font script="Thai" typeface="Angsana New"/>
+        <a:font script="Ethi" typeface="Nyala"/>
+        <a:font script="Beng" typeface="Vrinda"/>
+        <a:font script="Gujr" typeface="Shruti"/>
+        <a:font script="Khmr" typeface="MoolBoran"/>
+        <a:font script="Knda" typeface="Tunga"/>
+        <a:font script="Guru" typeface="Raavi"/>
+        <a:font script="Cans" typeface="Euphemia"/>
+        <a:font script="Cher" typeface="Plantagenet Cherokee"/>
+        <a:font script="Yiii" typeface="Microsoft Yi Baiti"/>
+        <a:font script="Tibt" typeface="Microsoft Himalaya"/>
+        <a:font script="Thaa" typeface="MV Boli"/>
+        <a:font script="Deva" typeface="Mangal"/>
+        <a:font script="Telu" typeface="Gautami"/>
+        <a:font script="Taml" typeface="Latha"/>
+        <a:font script="Syrc" typeface="Estrangelo Edessa"/>
+        <a:font script="Orya" typeface="Kalinga"/>
+        <a:font script="Mlym" typeface="Kartika"/>
+        <a:font script="Laoo" typeface="DokChampa"/>
+        <a:font script="Sinh" typeface="Iskoola Pota"/>
+        <a:font script="Mong" typeface="Mongolian Baiti"/>
+        <a:font script="Viet" typeface="Times New Roman"/>
+        <a:font script="Uigh" typeface="Microsoft Uighur"/>
+        <a:font script="Geor" typeface="Sylfaen"/>
+      </a:majorFont>
+      <a:minorFont>
+        <a:latin typeface="Arial"/>
+        <a:ea typeface=""/>
+        <a:cs typeface=""/>
+        <a:font script="Jpan" typeface="ＭＳ Ｐゴシック"/>
+        <a:font script="Hang" typeface="맑은 고딕"/>
+        <a:font script="Hans" typeface="宋体"/>
+        <a:font script="Hant" typeface="新細明體"/>
+        <a:font script="Arab" typeface="Arial"/>
+        <a:font script="Hebr" typeface="Arial"/>
+        <a:font script="Thai" typeface="Cordia New"/>
+        <a:font script="Ethi" typeface="Nyala"/>
+        <a:font script="Beng" typeface="Vrinda"/>
+        <a:font script="Gujr" typeface="Shruti"/>
+        <a:font script="Khmr" typeface="DaunPenh"/>
+        <a:font script="Knda" typeface="Tunga"/>
+        <a:font script="Guru" typeface="Raavi"/>
+        <a:font script="Cans" typeface="Euphemia"/>
+        <a:font script="Cher" typeface="Plantagenet Cherokee"/>
+        <a:font script="Yiii" typeface="Microsoft Yi Baiti"/>
+        <a:font script="Tibt" typeface="Microsoft Himalaya"/>
+        <a:font script="Thaa" typeface="MV Boli"/>
+        <a:font script="Deva" typeface="Mangal"/>
+        <a:font script="Telu" typeface="Gautami"/>
+        <a:font script="Taml" typeface="Latha"/>
+        <a:font script="Syrc" typeface="Estrangelo Edessa"/>
+        <a:font script="Orya" typeface="Kalinga"/>
+        <a:font script="Mlym" typeface="Kartika"/>
+        <a:font script="Laoo" typeface="DokChampa"/>
+        <a:font script="Sinh" typeface="Iskoola Pota"/>
+        <a:font script="Mong" typeface="Mongolian Baiti"/>
+        <a:font script="Viet" typeface="Arial"/>
+        <a:font script="Uigh" typeface="Microsoft Uighur"/>
+        <a:font script="Geor" typeface="Sylfaen"/>
+      </a:minorFont>
+    </a:fontScheme>
+    <a:fmtScheme name="Office">
+      <a:fillStyleLst>
+        <a:solidFill>
+          <a:schemeClr val="phClr"/>
+        </a:solidFill>
+        <a:gradFill rotWithShape="1">
+          <a:gsLst>
+            <a:gs pos="0">
+              <a:schemeClr val="phClr">
+                <a:tint val="50000"/>
+                <a:satMod val="300000"/>
+              </a:schemeClr>
+            </a:gs>
+            <a:gs pos="35000">
+              <a:schemeClr val="phClr">
+                <a:tint val="37000"/>
+                <a:satMod val="300000"/>
+              </a:schemeClr>
+            </a:gs>
+            <a:gs pos="100000">
+              <a:schemeClr val="phClr">
+                <a:tint val="15000"/>
+                <a:satMod val="350000"/>
+              </a:schemeClr>
+            </a:gs>
+          </a:gsLst>
+          <a:lin ang="16200000" scaled="1"/>
+        </a:gradFill>
+        <a:gradFill rotWithShape="1">
+          <a:gsLst>
+            <a:gs pos="0">
+              <a:schemeClr val="phClr">
+                <a:tint val="100000"/>
+                <a:shade val="100000"/>
+                <a:satMod val="130000"/>
+              </a:schemeClr>
+            </a:gs>
+            <a:gs pos="100000">
+              <a:schemeClr val="phClr">
+                <a:tint val="50000"/>
+                <a:shade val="100000"/>
+                <a:satMod val="350000"/>
+              </a:schemeClr>
+            </a:gs>
+          </a:gsLst>
+          <a:lin ang="16200000" scaled="0"/>
+        </a:gradFill>
+      </a:fillStyleLst>
+      <a:lnStyleLst>
+        <a:ln w="9525" cap="flat" cmpd="sng" algn="ctr">
+          <a:solidFill>
+            <a:schemeClr val="phClr">
+              <a:shade val="95000"/>
+              <a:satMod val="105000"/>
+            </a:schemeClr>
+          </a:solidFill>
+          <a:prstDash val="solid"/>
+        </a:ln>
+        <a:ln w="25400" cap="flat" cmpd="sng" algn="ctr">
+          <a:solidFill>
+            <a:schemeClr val="phClr"/>
+          </a:solidFill>
+          <a:prstDash val="solid"/>
+        </a:ln>
+        <a:ln w="38100" cap="flat" cmpd="sng" algn="ctr">
+          <a:solidFill>
+            <a:schemeClr val="phClr"/>
+          </a:solidFill>
+          <a:prstDash val="solid"/>
+        </a:ln>
+      </a:lnStyleLst>
+      <a:effectStyleLst>
+        <a:effectStyle>
+          <a:effectLst>
+            <a:outerShdw blurRad="40000" dist="20000" dir="5400000" rotWithShape="0">
+              <a:srgbClr val="000000">
+                <a:alpha val="38000"/>
+              </a:srgbClr>
+            </a:outerShdw>
+          </a:effectLst>
+        </a:effectStyle>
+        <a:effectStyle>
+          <a:effectLst>
+            <a:outerShdw blurRad="40000" dist="23000" dir="5400000" rotWithShape="0">
+              <a:srgbClr val="000000">
+                <a:alpha val="35000"/>
+              </a:srgbClr>
+            </a:outerShdw>
+          </a:effectLst>
+        </a:effectStyle>
+        <a:effectStyle>
+          <a:effectLst>
+            <a:outerShdw blurRad="40000" dist="23000" dir="5400000" rotWithShape="0">
+              <a:srgbClr val="000000">
+                <a:alpha val="35000"/>
+              </a:srgbClr>
+            </a:outerShdw>
+          </a:effectLst>
+          <a:scene3d>
+            <a:camera prst="orthographicFront">
+              <a:rot lat="0" lon="0" rev="0"/>
+            </a:camera>
+            <a:lightRig rig="threePt" dir="t">
+              <a:rot lat="0" lon="0" rev="1200000"/>
+            </a:lightRig>
+          </a:scene3d>
+          <a:sp3d>
+            <a:bevelT w="63500" h="25400"/>
+          </a:sp3d>
+        </a:effectStyle>
+      </a:effectStyleLst>
+      <a:bgFillStyleLst>
+        <a:solidFill>
+          <a:schemeClr val="phClr"/>
+        </a:solidFill>
+        <a:gradFill rotWithShape="1">
+          <a:gsLst>
+            <a:gs pos="0">
+              <a:schemeClr val="phClr">
+                <a:tint val="40000"/>
+                <a:satMod val="350000"/>
+              </a:schemeClr>
+            </a:gs>
+            <a:gs pos="40000">
+              <a:schemeClr val="phClr">
+                <a:tint val="45000"/>
+                <a:shade val="99000"/>
+                <a:satMod val="350000"/>
+              </a:schemeClr>
+            </a:gs>
+            <a:gs pos="100000">
+              <a:schemeClr val="phClr">
+                <a:shade val="20000"/>
+                <a:satMod val="255000"/>
+              </a:schemeClr>
+            </a:gs>
+          </a:gsLst>
+          <a:path path="circle">
+            <a:fillToRect l="50000" t="-80000" r="50000" b="180000"/>
+          </a:path>
+        </a:gradFill>
+        <a:gradFill rotWithShape="1">
+          <a:gsLst>
+            <a:gs pos="0">
+              <a:schemeClr val="phClr">
+                <a:tint val="80000"/>
+                <a:satMod val="300000"/>
+              </a:schemeClr>
+            </a:gs>
+            <a:gs pos="100000">
+              <a:schemeClr val="phClr">
+                <a:shade val="30000"/>
+                <a:satMod val="200000"/>
+              </a:schemeClr>
+            </a:gs>
+          </a:gsLst>
+          <a:path path="circle">
+            <a:fillToRect l="50000" t="50000" r="50000" b="50000"/>
+          </a:path>
+        </a:gradFill>
+      </a:bgFillStyleLst>
+    </a:fmtScheme>
+  </a:themeElements>
+  <a:objectDefaults/>
+  <a:extraClrSchemeLst/>
+</a:theme>
+</file>
+
+<file path=ppt/theme/theme2.xml><?xml version="1.0" encoding="utf-8"?>
+<a:theme xmlns:a="http://schemas.openxmlformats.org/drawingml/2006/main">
   <a:themeElements>
     <a:clrScheme name="Default">
       <a:dk1>
@@ -8249,284 +9040,7 @@
       </a:bgFillStyleLst>
     </a:fmtScheme>
   </a:themeElements>
-</a:theme>
-</file>
-
-<file path=ppt/theme/theme2.xml><?xml version="1.0" encoding="utf-8"?>
-<a:theme xmlns:a="http://schemas.openxmlformats.org/drawingml/2006/main" xmlns:r="http://schemas.openxmlformats.org/officeDocument/2006/relationships" name="Simple Light">
-  <a:themeElements>
-    <a:clrScheme name="Simple Light">
-      <a:dk1>
-        <a:srgbClr val="000000"/>
-      </a:dk1>
-      <a:lt1>
-        <a:srgbClr val="FFFFFF"/>
-      </a:lt1>
-      <a:dk2>
-        <a:srgbClr val="595959"/>
-      </a:dk2>
-      <a:lt2>
-        <a:srgbClr val="EEEEEE"/>
-      </a:lt2>
-      <a:accent1>
-        <a:srgbClr val="4285F4"/>
-      </a:accent1>
-      <a:accent2>
-        <a:srgbClr val="212121"/>
-      </a:accent2>
-      <a:accent3>
-        <a:srgbClr val="78909C"/>
-      </a:accent3>
-      <a:accent4>
-        <a:srgbClr val="FFAB40"/>
-      </a:accent4>
-      <a:accent5>
-        <a:srgbClr val="0097A7"/>
-      </a:accent5>
-      <a:accent6>
-        <a:srgbClr val="EEFF41"/>
-      </a:accent6>
-      <a:hlink>
-        <a:srgbClr val="0097A7"/>
-      </a:hlink>
-      <a:folHlink>
-        <a:srgbClr val="0097A7"/>
-      </a:folHlink>
-    </a:clrScheme>
-    <a:fontScheme name="Office">
-      <a:majorFont>
-        <a:latin typeface="Arial"/>
-        <a:ea typeface=""/>
-        <a:cs typeface=""/>
-        <a:font script="Jpan" typeface="ＭＳ Ｐゴシック"/>
-        <a:font script="Hang" typeface="맑은 고딕"/>
-        <a:font script="Hans" typeface="宋体"/>
-        <a:font script="Hant" typeface="新細明體"/>
-        <a:font script="Arab" typeface="Times New Roman"/>
-        <a:font script="Hebr" typeface="Times New Roman"/>
-        <a:font script="Thai" typeface="Angsana New"/>
-        <a:font script="Ethi" typeface="Nyala"/>
-        <a:font script="Beng" typeface="Vrinda"/>
-        <a:font script="Gujr" typeface="Shruti"/>
-        <a:font script="Khmr" typeface="MoolBoran"/>
-        <a:font script="Knda" typeface="Tunga"/>
-        <a:font script="Guru" typeface="Raavi"/>
-        <a:font script="Cans" typeface="Euphemia"/>
-        <a:font script="Cher" typeface="Plantagenet Cherokee"/>
-        <a:font script="Yiii" typeface="Microsoft Yi Baiti"/>
-        <a:font script="Tibt" typeface="Microsoft Himalaya"/>
-        <a:font script="Thaa" typeface="MV Boli"/>
-        <a:font script="Deva" typeface="Mangal"/>
-        <a:font script="Telu" typeface="Gautami"/>
-        <a:font script="Taml" typeface="Latha"/>
-        <a:font script="Syrc" typeface="Estrangelo Edessa"/>
-        <a:font script="Orya" typeface="Kalinga"/>
-        <a:font script="Mlym" typeface="Kartika"/>
-        <a:font script="Laoo" typeface="DokChampa"/>
-        <a:font script="Sinh" typeface="Iskoola Pota"/>
-        <a:font script="Mong" typeface="Mongolian Baiti"/>
-        <a:font script="Viet" typeface="Times New Roman"/>
-        <a:font script="Uigh" typeface="Microsoft Uighur"/>
-        <a:font script="Geor" typeface="Sylfaen"/>
-      </a:majorFont>
-      <a:minorFont>
-        <a:latin typeface="Arial"/>
-        <a:ea typeface=""/>
-        <a:cs typeface=""/>
-        <a:font script="Jpan" typeface="ＭＳ Ｐゴシック"/>
-        <a:font script="Hang" typeface="맑은 고딕"/>
-        <a:font script="Hans" typeface="宋体"/>
-        <a:font script="Hant" typeface="新細明體"/>
-        <a:font script="Arab" typeface="Arial"/>
-        <a:font script="Hebr" typeface="Arial"/>
-        <a:font script="Thai" typeface="Cordia New"/>
-        <a:font script="Ethi" typeface="Nyala"/>
-        <a:font script="Beng" typeface="Vrinda"/>
-        <a:font script="Gujr" typeface="Shruti"/>
-        <a:font script="Khmr" typeface="DaunPenh"/>
-        <a:font script="Knda" typeface="Tunga"/>
-        <a:font script="Guru" typeface="Raavi"/>
-        <a:font script="Cans" typeface="Euphemia"/>
-        <a:font script="Cher" typeface="Plantagenet Cherokee"/>
-        <a:font script="Yiii" typeface="Microsoft Yi Baiti"/>
-        <a:font script="Tibt" typeface="Microsoft Himalaya"/>
-        <a:font script="Thaa" typeface="MV Boli"/>
-        <a:font script="Deva" typeface="Mangal"/>
-        <a:font script="Telu" typeface="Gautami"/>
-        <a:font script="Taml" typeface="Latha"/>
-        <a:font script="Syrc" typeface="Estrangelo Edessa"/>
-        <a:font script="Orya" typeface="Kalinga"/>
-        <a:font script="Mlym" typeface="Kartika"/>
-        <a:font script="Laoo" typeface="DokChampa"/>
-        <a:font script="Sinh" typeface="Iskoola Pota"/>
-        <a:font script="Mong" typeface="Mongolian Baiti"/>
-        <a:font script="Viet" typeface="Arial"/>
-        <a:font script="Uigh" typeface="Microsoft Uighur"/>
-        <a:font script="Geor" typeface="Sylfaen"/>
-      </a:minorFont>
-    </a:fontScheme>
-    <a:fmtScheme name="Office">
-      <a:fillStyleLst>
-        <a:solidFill>
-          <a:schemeClr val="phClr"/>
-        </a:solidFill>
-        <a:gradFill rotWithShape="1">
-          <a:gsLst>
-            <a:gs pos="0">
-              <a:schemeClr val="phClr">
-                <a:tint val="50000"/>
-                <a:satMod val="300000"/>
-              </a:schemeClr>
-            </a:gs>
-            <a:gs pos="35000">
-              <a:schemeClr val="phClr">
-                <a:tint val="37000"/>
-                <a:satMod val="300000"/>
-              </a:schemeClr>
-            </a:gs>
-            <a:gs pos="100000">
-              <a:schemeClr val="phClr">
-                <a:tint val="15000"/>
-                <a:satMod val="350000"/>
-              </a:schemeClr>
-            </a:gs>
-          </a:gsLst>
-          <a:lin ang="16200000" scaled="1"/>
-        </a:gradFill>
-        <a:gradFill rotWithShape="1">
-          <a:gsLst>
-            <a:gs pos="0">
-              <a:schemeClr val="phClr">
-                <a:tint val="100000"/>
-                <a:shade val="100000"/>
-                <a:satMod val="130000"/>
-              </a:schemeClr>
-            </a:gs>
-            <a:gs pos="100000">
-              <a:schemeClr val="phClr">
-                <a:tint val="50000"/>
-                <a:shade val="100000"/>
-                <a:satMod val="350000"/>
-              </a:schemeClr>
-            </a:gs>
-          </a:gsLst>
-          <a:lin ang="16200000" scaled="0"/>
-        </a:gradFill>
-      </a:fillStyleLst>
-      <a:lnStyleLst>
-        <a:ln w="9525" cap="flat" cmpd="sng" algn="ctr">
-          <a:solidFill>
-            <a:schemeClr val="phClr">
-              <a:shade val="95000"/>
-              <a:satMod val="105000"/>
-            </a:schemeClr>
-          </a:solidFill>
-          <a:prstDash val="solid"/>
-        </a:ln>
-        <a:ln w="25400" cap="flat" cmpd="sng" algn="ctr">
-          <a:solidFill>
-            <a:schemeClr val="phClr"/>
-          </a:solidFill>
-          <a:prstDash val="solid"/>
-        </a:ln>
-        <a:ln w="38100" cap="flat" cmpd="sng" algn="ctr">
-          <a:solidFill>
-            <a:schemeClr val="phClr"/>
-          </a:solidFill>
-          <a:prstDash val="solid"/>
-        </a:ln>
-      </a:lnStyleLst>
-      <a:effectStyleLst>
-        <a:effectStyle>
-          <a:effectLst>
-            <a:outerShdw blurRad="40000" dist="20000" dir="5400000" rotWithShape="0">
-              <a:srgbClr val="000000">
-                <a:alpha val="38000"/>
-              </a:srgbClr>
-            </a:outerShdw>
-          </a:effectLst>
-        </a:effectStyle>
-        <a:effectStyle>
-          <a:effectLst>
-            <a:outerShdw blurRad="40000" dist="23000" dir="5400000" rotWithShape="0">
-              <a:srgbClr val="000000">
-                <a:alpha val="35000"/>
-              </a:srgbClr>
-            </a:outerShdw>
-          </a:effectLst>
-        </a:effectStyle>
-        <a:effectStyle>
-          <a:effectLst>
-            <a:outerShdw blurRad="40000" dist="23000" dir="5400000" rotWithShape="0">
-              <a:srgbClr val="000000">
-                <a:alpha val="35000"/>
-              </a:srgbClr>
-            </a:outerShdw>
-          </a:effectLst>
-          <a:scene3d>
-            <a:camera prst="orthographicFront">
-              <a:rot lat="0" lon="0" rev="0"/>
-            </a:camera>
-            <a:lightRig rig="threePt" dir="t">
-              <a:rot lat="0" lon="0" rev="1200000"/>
-            </a:lightRig>
-          </a:scene3d>
-          <a:sp3d>
-            <a:bevelT w="63500" h="25400"/>
-          </a:sp3d>
-        </a:effectStyle>
-      </a:effectStyleLst>
-      <a:bgFillStyleLst>
-        <a:solidFill>
-          <a:schemeClr val="phClr"/>
-        </a:solidFill>
-        <a:gradFill rotWithShape="1">
-          <a:gsLst>
-            <a:gs pos="0">
-              <a:schemeClr val="phClr">
-                <a:tint val="40000"/>
-                <a:satMod val="350000"/>
-              </a:schemeClr>
-            </a:gs>
-            <a:gs pos="40000">
-              <a:schemeClr val="phClr">
-                <a:tint val="45000"/>
-                <a:shade val="99000"/>
-                <a:satMod val="350000"/>
-              </a:schemeClr>
-            </a:gs>
-            <a:gs pos="100000">
-              <a:schemeClr val="phClr">
-                <a:shade val="20000"/>
-                <a:satMod val="255000"/>
-              </a:schemeClr>
-            </a:gs>
-          </a:gsLst>
-          <a:path path="circle">
-            <a:fillToRect l="50000" t="-80000" r="50000" b="180000"/>
-          </a:path>
-        </a:gradFill>
-        <a:gradFill rotWithShape="1">
-          <a:gsLst>
-            <a:gs pos="0">
-              <a:schemeClr val="phClr">
-                <a:tint val="80000"/>
-                <a:satMod val="300000"/>
-              </a:schemeClr>
-            </a:gs>
-            <a:gs pos="100000">
-              <a:schemeClr val="phClr">
-                <a:shade val="30000"/>
-                <a:satMod val="200000"/>
-              </a:schemeClr>
-            </a:gs>
-          </a:gsLst>
-          <a:path path="circle">
-            <a:fillToRect l="50000" t="50000" r="50000" b="50000"/>
-          </a:path>
-        </a:gradFill>
-      </a:bgFillStyleLst>
-    </a:fmtScheme>
-  </a:themeElements>
+  <a:objectDefaults/>
+  <a:extraClrSchemeLst/>
 </a:theme>
 </file>